--- a/docs/교재/실전반_오프라인/03회차/실전반_오프라인_03회차.pptx
+++ b/docs/교재/실전반_오프라인/03회차/실전반_오프라인_03회차.pptx
@@ -10386,7 +10386,7 @@
       </p:sp>
       <p:pic>
         <p:nvPicPr>
-          <p:cNvPr id="6" name="삽화:인용.svg" descr="illust_5177993264526192152_1791715498.png"/>
+          <p:cNvPr id="6" name="삽화:인용.svg" descr="illust_6406626081580715531_1791715498.png"/>
           <p:cNvPicPr>
             <a:picLocks noChangeAspect="1"/>
           </p:cNvPicPr>
@@ -11987,7 +11987,7 @@
       </p:sp>
       <p:pic>
         <p:nvPicPr>
-          <p:cNvPr id="6" name="삽화:인제스천_6.svg" descr="illust_4931510246469152734_1791715498.png"/>
+          <p:cNvPr id="6" name="삽화:인제스천_6.svg" descr="illust_5513914709697679576_1791715498.png"/>
           <p:cNvPicPr>
             <a:picLocks noChangeAspect="1"/>
           </p:cNvPicPr>
@@ -12541,7 +12541,7 @@
       </p:sp>
       <p:pic>
         <p:nvPicPr>
-          <p:cNvPr id="6" name="삽화:적재묶음_사슬.svg" descr="illust_6531636826851284551_1791715498.png"/>
+          <p:cNvPr id="6" name="삽화:적재묶음_사슬.svg" descr="illust_4561854547938094772_1791715498.png"/>
           <p:cNvPicPr>
             <a:picLocks noChangeAspect="1"/>
           </p:cNvPicPr>
@@ -21528,7 +21528,7 @@
       </p:sp>
       <p:pic>
         <p:nvPicPr>
-          <p:cNvPr id="6" name="삽화:네일차_흐름.svg" descr="illust_4095412503723934411_1791715498.png"/>
+          <p:cNvPr id="6" name="삽화:네일차_흐름.svg" descr="illust_6134772852652704440_1791715498.png"/>
           <p:cNvPicPr>
             <a:picLocks noChangeAspect="1"/>
           </p:cNvPicPr>
@@ -22377,7 +22377,7 @@
                 <a:ea typeface="맑은 고딕"/>
                 <a:cs typeface="맑은 고딕"/>
               </a:rPr>
-              <a:t>매뉴얼을 등록하고 추출 후보 확인하기</a:t>
+              <a:t>매뉴얼의 등록과 추출 후보 확인</a:t>
             </a:r>
           </a:p>
         </p:txBody>
@@ -22554,7 +22554,7 @@
                 <a:ea typeface="맑은 고딕"/>
                 <a:cs typeface="맑은 고딕"/>
               </a:rPr>
-              <a:t>예외 조건을 포함해 지식 추출하기</a:t>
+              <a:t>Claude Code로 문서에서 지식 추출하기</a:t>
             </a:r>
           </a:p>
         </p:txBody>
@@ -22731,7 +22731,7 @@
                 <a:ea typeface="맑은 고딕"/>
                 <a:cs typeface="맑은 고딕"/>
               </a:rPr>
-              <a:t>검토 완료된 지식만 그래프에 반영하기</a:t>
+              <a:t>검토한 지식을 그래프 DB에 반영하기</a:t>
             </a:r>
           </a:p>
         </p:txBody>
@@ -23373,7 +23373,7 @@
       </p:sp>
       <p:pic>
         <p:nvPicPr>
-          <p:cNvPr id="6" name="삽화:관계.svg" descr="illust_5738832806603147016_1791715399.png"/>
+          <p:cNvPr id="6" name="삽화:관계.svg" descr="illust_4870032344416193112_1791715399.png"/>
           <p:cNvPicPr>
             <a:picLocks noChangeAspect="1"/>
           </p:cNvPicPr>
@@ -29225,7 +29225,7 @@
       </p:sp>
       <p:pic>
         <p:nvPicPr>
-          <p:cNvPr id="6" name="삽화:경로_3.svg" descr="illust_4191211286877768874_1791715399.png"/>
+          <p:cNvPr id="6" name="삽화:경로_3.svg" descr="illust_5664770633279062130_1791715399.png"/>
           <p:cNvPicPr>
             <a:picLocks noChangeAspect="1"/>
           </p:cNvPicPr>
@@ -35771,7 +35771,7 @@
                 <a:ea typeface="맑은 고딕"/>
                 <a:cs typeface="맑은 고딕"/>
               </a:rPr>
-              <a:t>에이전트는 원인이나 값을 지어내지 않고 등록된 관계를 조회하고 규칙의 판정을 받고 도구로 값을 읽는다.</a:t>
+              <a:t>AI 프로그램인 에이전트는 원인이나 값을 지어내지 않고 등록된 관계를 조회하고 규칙의 판정을 받고 도구로 값을 읽는다.</a:t>
             </a:r>
           </a:p>
         </p:txBody>
@@ -45289,7 +45289,7 @@
       </p:sp>
       <p:pic>
         <p:nvPicPr>
-          <p:cNvPr id="6" name="삽화:인제스천_전체.svg" descr="illust_1752043193217436494_1791715498.png"/>
+          <p:cNvPr id="6" name="삽화:인제스천_전체.svg" descr="illust_215268219853410003_1791715498.png"/>
           <p:cNvPicPr>
             <a:picLocks noChangeAspect="1"/>
           </p:cNvPicPr>

--- a/docs/교재/실전반_오프라인/03회차/실전반_오프라인_03회차.pptx
+++ b/docs/교재/실전반_오프라인/03회차/실전반_오프라인_03회차.pptx
@@ -623,7 +623,7 @@
           <a:lstStyle/>
           <a:p>
             <a:r>
-              <a:t>모델의 출력이 틀릴 수 있는 방식은 크게 네 가지이고, 넷 모두 정해진 항목과 형식에는 맞습니다. 위의 둘부터 봅니다. 조건 문장이 통째로 빠지면 결과에는 틀린 글자가 하나도 없고, 단위만 바뀌면 숫자 자리에 숫자가 있으므로 프로그램이 이상을 찾지 못합니다. 아래의 둘은 매뉴얼이 쿨러 핀 오염에만 이은 핀 세척을 다른 원인에 짐작으로 잇는 오류와, 팬 최대 운전의 세 단계에 없는 단계를 만들어 넣는 오류입니다. 넷을 가려내는 방법은 원문과 인용을 나란히 놓고 읽는 것입니다.</a:t>
+              <a:t>모델의 출력이 틀릴 수 있는 방식은 크게 네 가지이고, 넷 모두 정해진 항목과 형식에는 맞습니다. 위의 둘부터 봅니다. 조건 문장이 통째로 빠지면 결과에는 틀린 글자가 하나도 없고, 단위만 바뀌면 숫자 자리에 숫자가 있으므로 프로그램이 이상을 찾지 못합니다. 아래의 둘은 매뉴얼이 쿨러 핀 오염에만 이은 핀 세척을 다른 원인에 짐작으로 잇는 오류, 곧 조치 방법이 듣는 원인을 가리키는 관계 ADDRESSES를 틀리게 잇는 오류와, 팬 최대 운전의 세 단계에 없는 단계를 만들어 넣는 오류입니다. 넷을 가려내는 방법은 원문과 인용을 나란히 놓고 읽는 것입니다.</a:t>
             </a:r>
           </a:p>
         </p:txBody>
@@ -10386,7 +10386,7 @@
       </p:sp>
       <p:pic>
         <p:nvPicPr>
-          <p:cNvPr id="6" name="삽화:인용.svg" descr="illust_6406626081580715531_1791715498.png"/>
+          <p:cNvPr id="6" name="삽화:인용.svg" descr="illust_6689800079922240644_1791715498.png"/>
           <p:cNvPicPr>
             <a:picLocks noChangeAspect="1"/>
           </p:cNvPicPr>
@@ -11987,7 +11987,7 @@
       </p:sp>
       <p:pic>
         <p:nvPicPr>
-          <p:cNvPr id="6" name="삽화:인제스천_6.svg" descr="illust_5513914709697679576_1791715498.png"/>
+          <p:cNvPr id="6" name="삽화:인제스천_6.svg" descr="illust_6546192603477261673_1791715498.png"/>
           <p:cNvPicPr>
             <a:picLocks noChangeAspect="1"/>
           </p:cNvPicPr>
@@ -12541,7 +12541,7 @@
       </p:sp>
       <p:pic>
         <p:nvPicPr>
-          <p:cNvPr id="6" name="삽화:적재묶음_사슬.svg" descr="illust_4561854547938094772_1791715498.png"/>
+          <p:cNvPr id="6" name="삽화:적재묶음_사슬.svg" descr="illust_5524440218970414998_1791715498.png"/>
           <p:cNvPicPr>
             <a:picLocks noChangeAspect="1"/>
           </p:cNvPicPr>
@@ -21528,7 +21528,7 @@
       </p:sp>
       <p:pic>
         <p:nvPicPr>
-          <p:cNvPr id="6" name="삽화:네일차_흐름.svg" descr="illust_6134772852652704440_1791715498.png"/>
+          <p:cNvPr id="6" name="삽화:네일차_흐름.svg" descr="illust_540978420377021193_1791715498.png"/>
           <p:cNvPicPr>
             <a:picLocks noChangeAspect="1"/>
           </p:cNvPicPr>
@@ -23373,7 +23373,7 @@
       </p:sp>
       <p:pic>
         <p:nvPicPr>
-          <p:cNvPr id="6" name="삽화:관계.svg" descr="illust_4870032344416193112_1791715399.png"/>
+          <p:cNvPr id="6" name="삽화:관계.svg" descr="illust_4984817056570909857_1791715399.png"/>
           <p:cNvPicPr>
             <a:picLocks noChangeAspect="1"/>
           </p:cNvPicPr>
@@ -25822,7 +25822,7 @@
                 <a:ea typeface="맑은 고딕"/>
                 <a:cs typeface="맑은 고딕"/>
               </a:rPr>
-              <a:t>→ 조치의 한계: 펌프 부하의 하한 60 % (판단 규칙으로는 만들지 않았다)</a:t>
+              <a:t>→ 조치의 한계: 펌프 부하의 하한 60 %</a:t>
             </a:r>
           </a:p>
         </p:txBody>
@@ -29225,7 +29225,7 @@
       </p:sp>
       <p:pic>
         <p:nvPicPr>
-          <p:cNvPr id="6" name="삽화:경로_3.svg" descr="illust_5664770633279062130_1791715399.png"/>
+          <p:cNvPr id="6" name="삽화:경로_3.svg" descr="illust_8188346272300554222_1791715399.png"/>
           <p:cNvPicPr>
             <a:picLocks noChangeAspect="1"/>
           </p:cNvPicPr>
@@ -45289,7 +45289,7 @@
       </p:sp>
       <p:pic>
         <p:nvPicPr>
-          <p:cNvPr id="6" name="삽화:인제스천_전체.svg" descr="illust_215268219853410003_1791715498.png"/>
+          <p:cNvPr id="6" name="삽화:인제스천_전체.svg" descr="illust_4549653583496841286_1791715498.png"/>
           <p:cNvPicPr>
             <a:picLocks noChangeAspect="1"/>
           </p:cNvPicPr>

--- a/docs/교재/실전반_오프라인/03회차/실전반_오프라인_03회차.pptx
+++ b/docs/교재/실전반_오프라인/03회차/실전반_오프라인_03회차.pptx
@@ -623,7 +623,7 @@
           <a:lstStyle/>
           <a:p>
             <a:r>
-              <a:t>모델의 출력이 틀릴 수 있는 방식은 크게 네 가지이고, 넷 모두 정해진 항목과 형식에는 맞습니다. 위의 둘부터 봅니다. 조건 문장이 통째로 빠지면 결과에는 틀린 글자가 하나도 없고, 단위만 바뀌면 숫자 자리에 숫자가 있으므로 프로그램이 이상을 찾지 못합니다. 아래의 둘은 매뉴얼이 쿨러 핀 오염에만 이은 핀 세척을 다른 원인에 짐작으로 잇는 오류, 곧 조치 방법이 듣는 원인을 가리키는 관계 ADDRESSES를 틀리게 잇는 오류와, 팬 최대 운전의 세 단계에 없는 단계를 만들어 넣는 오류입니다. 넷을 가려내는 방법은 원문과 인용을 나란히 놓고 읽는 것입니다.</a:t>
+              <a:t>모델의 출력이 틀릴 수 있는 방식은 크게 네 가지이고, 넷 모두 정해진 항목과 형식에는 맞습니다. 위의 둘부터 봅니다. 조건 문장이 통째로 빠지면 결과에는 틀린 글자가 하나도 없고, 단위만 바뀌면 숫자 자리에 숫자가 있으므로 프로그램이 이상을 찾지 못합니다. 셋째는 관계를 틀리게 잇는 오류입니다. ADDRESSES는 조치 방법이 어느 원인에 듣는지를 적는 관계인데, 매뉴얼은 핀 세척을 쿨러 핀 오염에만 이었습니다. 넷째는 팬 최대 운전의 세 단계에 없는 단계를 만들어 넣는 오류입니다. 넷을 가려내는 방법은 원문과 인용을 나란히 놓고 읽는 것입니다.</a:t>
             </a:r>
           </a:p>
         </p:txBody>
@@ -903,7 +903,7 @@
           <a:lstStyle/>
           <a:p>
             <a:r>
-              <a:t>먼저 맨 위의 판본입니다. 문서 식별자는 그대로이고 내용이 바뀔 때마다 판본만 새로 생깁니다. 다음으로 판본 아래의 적재 기록에는 누가 언제 검토해 넣었는지와 넣기 전후의 지식 그래프의 상태가 들어갑니다. 기록 사이의 화살표는 새 기록이 앞 기록을 가리킨다는 뜻이고, 이 사슬이 그 문서의 개정 이력입니다. 전과 후의 상태를 비교하면 어느 개정에서 무엇이 바뀌었는지를 알 수 있고, 되돌릴 때는 가장 새 기록부터 되돌립니다.</a:t>
+              <a:t>먼저 맨 위의 판본입니다. 문서 식별자는 그대로이고 내용이 바뀔 때마다 판본만 새로 생깁니다. 다음으로 판본 아래의 적재 기록에는 누가 언제 검토해 넣었는지와 넣기 전후의 지식 그래프의 상태가 들어가므로, 어느 지식이 어느 문서의 것인지가 남아 개정 때 그 문서의 지식만 바꿀 수 있습니다. 기록 사이의 화살표는 새 기록이 앞 기록을 가리킨다는 뜻이고, 이 사슬이 그 문서의 개정 이력입니다. 전과 후의 상태를 비교하면 어느 개정에서 무엇이 바뀌었는지를 알 수 있고, 되돌릴 때는 가장 새 기록부터 되돌립니다.</a:t>
             </a:r>
           </a:p>
         </p:txBody>
@@ -1463,7 +1463,7 @@
           <a:lstStyle/>
           <a:p>
             <a:r>
-              <a:t>칸마다 하늘색으로 칠한 부분이 그 단계에서 새로 더해진 것입니다. 앞 칸의 결과물이 다음 칸의 바탕이 됩니다.</a:t>
+              <a:t>왼쪽 칸부터 봅니다. 1회차의 첫 결과물은 손으로 그린 관계 그림이었고, 같은 회차에 그 그림에 클래스와 식별자라는 틀이 생겼습니다. 2회차에는 조치 방법과 판단 규칙과 성과 지표가 같은 그래프에 이어졌고, 3회차에는 문서에서 온 원인과 증거가 출처와 함께 더해졌습니다. 칸마다 하늘색으로 칠한 부분이 그 단계에서 새로 더해진 것이며, 앞 칸의 결과물이 다음 칸의 바탕이 됩니다.</a:t>
             </a:r>
           </a:p>
         </p:txBody>
@@ -1673,7 +1673,7 @@
           <a:lstStyle/>
           <a:p>
             <a:r>
-              <a:t>대상마다 식별자가 있고 관계는 스키마가 정한 방향으로 놓였습니다. Cypher로 이 관계를 따라가면 처음의 질문에 답이 나옵니다.</a:t>
+              <a:t>위의 점선 상자 줄이 둘째 결과물인 스키마이고 아래의 원 줄이 셋째 결과물인 인스턴스 데이터입니다. 아래 줄의 대상마다 식별자가 있고, 관계는 위 줄의 스키마가 정한 이름과 방향으로만 놓였습니다. 왼쪽의 HYD-01에서 오일 쿨러, 유온 센서, 유온까지 관계를 따라가면 스키마를 설계할 때 처음에 정한 질문의 답인 센서와 한계값 65도가 나옵니다. Cypher로 조회한 것이 이 길입니다.</a:t>
             </a:r>
           </a:p>
         </p:txBody>
@@ -1743,7 +1743,7 @@
           <a:lstStyle/>
           <a:p>
             <a:r>
-              <a:t>2회차에 SOP의 구성요소로 본 것 가운데 셋이 입력입니다. 첫 행에서 SOP 한 편이 조치 방법 노드 하나가 되고 번호가 붙은 줄이 작업 단계가 되었습니다. 둘째 행의 금지는 규칙으로 만들지 않았고, 부하를 60 % 아래로 내리지 못한다는 조치의 하한으로 남았습니다. 셋째 행의 전제 조건은 2회차에 본 제외 규칙이 되었습니다. 조건에 댈 운전 모드의 값은 규칙에 없고 판단할 때 읽어 옵니다.</a:t>
+              <a:t>2회차에 SOP의 구성요소로 본 것 가운데 셋이 입력입니다. 첫 행에서 SOP 한 편이 조치 방법 노드 하나가 되고 번호가 붙은 줄이 작업 단계가 되었습니다. 둘째 행의 금지는 규칙으로 만들지 않았고, 부하를 60 % 아래로 내리지 못한다는 조치의 한계로 남았습니다. 셋째 행의 전제 조건은 2회차에 본 제외 규칙이 되었습니다. 조건에 댈 운전 모드의 값은 규칙에 없고 판단할 때 읽어 옵니다.</a:t>
             </a:r>
           </a:p>
         </p:txBody>
@@ -1813,7 +1813,7 @@
           <a:lstStyle/>
           <a:p>
             <a:r>
-              <a:t>2회차에 조치가 지표에 미치는 영향을 따라가며 본 지표들입니다. 한 조치가 한 지표에는 이롭고 다른 지표에는 불리했습니다.</a:t>
+              <a:t>셋째 결과물은 성과 지표와, 조치가 그 지표에 닿는 길입니다. 왼쪽의 조치 후보에서 출발해 팬 속도와 펌프 부하라는 설비의 값을 거쳐 오른쪽의 세 지표에 이릅니다. 인터록 여유는 무재해 운전을, 전력 사용량은 에너지 효율을 재는 내부 프로세스 관점의 지표이고, 납기 준수율은 납기 신뢰를 재는 고객 관점의 지표입니다. 한 조치가 한 지표에는 이롭고 다른 지표에는 불리하므로, 규칙을 통과한 후보끼리는 이 지표로 견줍니다.</a:t>
             </a:r>
           </a:p>
         </p:txBody>
@@ -1953,7 +1953,7 @@
           <a:lstStyle/>
           <a:p>
             <a:r>
-              <a:t>다섯 걸음 전체의 밑그림은 1회차의 관계 그림입니다. 경보에서 조치 승인까지의 108초 동안 이루어진 판단이 이것이었고, 그것이 가능했던 것은 세 회차의 결과물이 미리 쌓여 있었기 때문입니다.</a:t>
+              <a:t>왼쪽부터 다섯 걸음입니다. 경보에서 고장 유형까지는 1회차의 스키마가 정한 관계를 따라갔고, 원인 후보와 그 기준은 3회차에 매뉴얼에서 들어온 지식이며, 기준에 댄 값은 그 순간 원천에서 읽었습니다. 넷째 걸음에서 2회차의 판단 규칙과 성과 기준이 후보를 가려 순서를 정했고, 마지막에 문서의 절과 인용이 근거로 붙었습니다. 다섯 걸음 전체의 밑그림은 1회차의 관계 그림입니다. 경보에서 조치 승인까지의 108초 동안 이루어진 판단이 이것이었고, 그것이 가능했던 것은 세 회차의 결과물이 미리 쌓여 있었기 때문입니다.</a:t>
             </a:r>
           </a:p>
         </p:txBody>
@@ -2163,7 +2163,7 @@
           <a:lstStyle/>
           <a:p>
             <a:r>
-              <a:t>행마다 윗줄이 매뉴얼에서 온 기준이고 아랫줄이 그 순간에 시계열 DB에서 읽은 값입니다. 첫 행부터 봅니다. 기준 70은 지식이고 46.2는 읽은 값이며, 둘은 서로 다른 곳에 있다가 판단하는 순간에만 만납니다. 팬 진동 0.575는 팬이 정상이라는 뜻이어서 핀 오염에는 맞고 팬 구동 불량에는 맞지 않습니다. 캐비닛 온도도 기준에 못 미쳐 원인은 쿨러 핀 오염 하나로 정해졌습니다.</a:t>
+              <a:t>가운데의 계기 셋이 그 순간에 시계열 DB에서 읽은 값이고, 오른쪽의 원인마다 적힌 기준이 매뉴얼에서 온 지식입니다. 맨 위부터 봅니다. 기준 70은 지식이고 46.2는 읽은 값이며, 둘은 서로 다른 곳에 있다가 판단하는 순간에만 만납니다. 팬 진동 0.575는 팬이 정상이라는 뜻이어서 핀 오염에는 맞고 팬 구동 불량에는 맞지 않습니다. 캐비닛 온도도 기준에 못 미쳐 원인은 쿨러 핀 오염 하나로 정해졌습니다.</a:t>
             </a:r>
           </a:p>
         </p:txBody>
@@ -2233,7 +2233,7 @@
           <a:lstStyle/>
           <a:p>
             <a:r>
-              <a:t>2회차에 본 순위 그대로입니다. 넷 모두 제외 규칙을 통과했고, 쿨러 핀 세척에는 경고가 붙었으며, 순서는 성과 기준이 정했습니다.</a:t>
+              <a:t>2회차에 본 순위 그대로입니다. 먼저 판단 규칙이 후보를 걸렀고, 넷 모두 제외 규칙을 통과했으며 예측 유온이 62.5도인 쿨러 핀 세척에는 경고가 붙었습니다. 다음으로 통과한 후보의 순서는 성과 기준이 정했습니다. 유온을 가장 많이 내리는 조치가 아니라 생산을 그대로 두는 팬 최대 운전이 추천으로 올라간 것은 납기에서 잃는 것을 크게 쳤기 때문입니다. 부하를 낮추는 두 후보는 점수가 같았습니다.</a:t>
             </a:r>
           </a:p>
         </p:txBody>
@@ -2303,7 +2303,7 @@
           <a:lstStyle/>
           <a:p>
             <a:r>
-              <a:t>쿨러 사건의 추천안에 함께 제시된 근거입니다. 이제 줄마다 그것이 어디에서 왔는지를 말할 수 있습니다.</a:t>
+              <a:t>쿨러 사건의 추천안에 함께 제시된 근거입니다. 이제 줄마다 그것이 어디에서 왔는지를 말할 수 있습니다. 추천안에 이른 길은 1회차의 스키마가 정한 관계를 따라온 경로이고, 후보로 고른 규칙은 2회차에 본 판단 규칙이며, 출처는 3회차에 조치 방법의 단계에 이어 둔 매뉴얼의 절입니다. 담당자는 이 세 가지를 보고 승인할지를 정합니다.</a:t>
             </a:r>
           </a:p>
         </p:txBody>
@@ -2373,7 +2373,7 @@
           <a:lstStyle/>
           <a:p>
             <a:r>
-              <a:t>위에서 아래로 스키마, 인스턴스 데이터, 값입니다. 위의 둘은 지식 그래프에 있고 맨 아래의 값은 지식 그래프 밖의 원천에 있습니다. 줄마다 둘째 줄이 그 층이 바뀌는 때입니다. 센서를 하나 새로 달면 인스턴스가 늘 뿐 스키마는 그대로이고, 매뉴얼의 기준이 바뀌면 인스턴스 데이터가 바뀌며, 유온은 매초 바뀝니다.</a:t>
+              <a:t>위에서 아래로 스키마, 인스턴스 데이터, 값입니다. 맨 위의 점선 상자는 원인이 고장 유형을 CAUSES로 가리킨다는 정의이고, 가운데는 그 정의에 맞추어 들어간 쿨러 핀 오염과 쿨러 냉각 성능 상실, 그리고 증거 기준입니다. 위의 둘은 지식 그래프에 있고 맨 아래의 값은 지식 그래프 밖의 원천에 있어, 판단하는 순간에 파란 점선을 따라 읽습니다. 왼쪽에 적힌 것이 그 층이 바뀌는 때입니다. 센서를 하나 새로 달면 인스턴스가 늘 뿐 스키마는 그대로이고, 매뉴얼의 기준이 바뀌면 인스턴스 데이터가 바뀌며, 유온은 매초 바뀝니다.</a:t>
             </a:r>
           </a:p>
         </p:txBody>
@@ -2513,7 +2513,7 @@
           <a:lstStyle/>
           <a:p>
             <a:r>
-              <a:t>규칙만 있고 근거가 없으면 어느 규칙을 고쳐야 하는지 찾을 수 없습니다. 출처 관계와 개정 이력이 여기서 함께 쓰입니다.</a:t>
+              <a:t>매뉴얼이 개정되어 24시간이라는 기준이 바뀐다고 해 봅니다. 문서 식별자는 그대로 두고 새 판본을 올린 뒤, 바뀐 절을 DERIVED_FROM으로 가리키는 규칙을 찾으면 고칠 대상이 나옵니다. 고친 내용은 처음 넣을 때와 같이 검토를 거쳐 적재하고 적재 기록을 남깁니다. 규칙만 있고 근거가 없으면 어느 규칙을 고쳐야 하는지 찾을 수 없으므로, 출처 관계와 개정 이력이 여기서 함께 쓰입니다.</a:t>
             </a:r>
           </a:p>
         </p:txBody>
@@ -2653,7 +2653,7 @@
           <a:lstStyle/>
           <a:p>
             <a:r>
-              <a:t>AI에게 그대로 물으면 답의 근거를 확인할 수 없습니다. 그 문제에 대한 답이 이 구분입니다.</a:t>
+              <a:t>사실과 기준을 AI가 그때그때 만들어 내면 그 답의 근거를 확인할 수 없습니다. 그래서 둘을 나눕니다. 왼쪽의 사실과 기준은 사람이 검토해 지식 그래프와 규칙에 정해 두고, 오른쪽의 조회와 종합만 에이전트에게 맡깁니다. 그래서 에이전트가 낸 추천은 어느 지식과 어느 값에서 나왔는지를 되짚을 수 있습니다.</a:t>
             </a:r>
           </a:p>
         </p:txBody>
@@ -9998,7 +9998,7 @@
                 <a:ea typeface="맑은 고딕"/>
                 <a:cs typeface="맑은 고딕"/>
               </a:rPr>
-              <a:t>쿨러 핀 세척을 주변 온도 상승에 ADDRESSES로 잇는다면 → 듣지 않는 조치의 추천</a:t>
+              <a:t>쿨러 핀 세척을 주변 온도 상승에 ADDRESSES(듣는 원인)로 잇는다면 → 듣지 않는 조치의 추천</a:t>
             </a:r>
           </a:p>
         </p:txBody>
@@ -10386,7 +10386,7 @@
       </p:sp>
       <p:pic>
         <p:nvPicPr>
-          <p:cNvPr id="6" name="삽화:인용.svg" descr="illust_6689800079922240644_1791715498.png"/>
+          <p:cNvPr id="6" name="삽화:인용.svg" descr="illust_5205224884406420648_1791770333.png"/>
           <p:cNvPicPr>
             <a:picLocks noChangeAspect="1"/>
           </p:cNvPicPr>
@@ -11987,7 +11987,7 @@
       </p:sp>
       <p:pic>
         <p:nvPicPr>
-          <p:cNvPr id="6" name="삽화:인제스천_6.svg" descr="illust_6546192603477261673_1791715498.png"/>
+          <p:cNvPr id="6" name="삽화:인제스천_6.svg" descr="illust_1316949905828381950_1791770333.png"/>
           <p:cNvPicPr>
             <a:picLocks noChangeAspect="1"/>
           </p:cNvPicPr>
@@ -12541,7 +12541,7 @@
       </p:sp>
       <p:pic>
         <p:nvPicPr>
-          <p:cNvPr id="6" name="삽화:적재묶음_사슬.svg" descr="illust_5524440218970414998_1791715498.png"/>
+          <p:cNvPr id="6" name="삽화:적재묶음_사슬.svg" descr="illust_7762298114911230886_1791770333.png"/>
           <p:cNvPicPr>
             <a:picLocks noChangeAspect="1"/>
           </p:cNvPicPr>
@@ -17629,7 +17629,7 @@
                 <a:ea typeface="맑은 고딕"/>
                 <a:cs typeface="맑은 고딕"/>
               </a:rPr>
-              <a:t>이 실습을 마치면 문서 식별자, 원문 구간, 인용문이 붙은 검토용 구조화 데이터가 만들어진다.</a:t>
+              <a:t>추출 실습의 결과물은 문서 식별자, 원문 구간, 인용문이 붙은 검토용 구조화 데이터이다.</a:t>
             </a:r>
           </a:p>
         </p:txBody>
@@ -21528,7 +21528,7 @@
       </p:sp>
       <p:pic>
         <p:nvPicPr>
-          <p:cNvPr id="6" name="삽화:네일차_흐름.svg" descr="illust_540978420377021193_1791715498.png"/>
+          <p:cNvPr id="6" name="삽화:네일차_흐름.svg" descr="illust_8627719086851511303_1791770333.png"/>
           <p:cNvPicPr>
             <a:picLocks noChangeAspect="1"/>
           </p:cNvPicPr>
@@ -23373,7 +23373,7 @@
       </p:sp>
       <p:pic>
         <p:nvPicPr>
-          <p:cNvPr id="6" name="삽화:관계.svg" descr="illust_4984817056570909857_1791715399.png"/>
+          <p:cNvPr id="6" name="삽화:관계.svg" descr="illust_3806986617173556911_1791715399.png"/>
           <p:cNvPicPr>
             <a:picLocks noChangeAspect="1"/>
           </p:cNvPicPr>
@@ -24618,40 +24618,9 @@
           </a:p>
         </p:txBody>
       </p:sp>
-      <p:sp>
-        <p:nvSpPr>
-          <p:cNvPr id="6" name="Oval 5"/>
-          <p:cNvSpPr/>
-          <p:nvPr/>
-        </p:nvSpPr>
-        <p:spPr>
-          <a:xfrm>
-            <a:off x="548639" y="3122676"/>
-            <a:ext cx="1737360" cy="1737360"/>
-          </a:xfrm>
-          <a:prstGeom prst="ellipse">
-            <a:avLst/>
-          </a:prstGeom>
-          <a:solidFill>
-            <a:srgbClr val="E7F3FD"/>
-          </a:solidFill>
-          <a:ln w="25400">
-            <a:solidFill>
-              <a:srgbClr val="5CB8F2"/>
-            </a:solidFill>
-          </a:ln>
-        </p:spPr>
-        <p:txBody>
-          <a:bodyPr rtlCol="0" anchor="ctr"/>
-          <a:lstStyle/>
-          <a:p>
-            <a:pPr algn="ctr"/>
-          </a:p>
-        </p:txBody>
-      </p:sp>
       <p:pic>
         <p:nvPicPr>
-          <p:cNvPr id="7" name="아이콘:engine" descr="engine_13294B_1.6.png"/>
+          <p:cNvPr id="6" name="삽화:두층_3.svg" descr="illust_8384317966668686316_1791770880.png"/>
           <p:cNvPicPr>
             <a:picLocks noChangeAspect="1"/>
           </p:cNvPicPr>
@@ -24665,8 +24634,8 @@
         </p:blipFill>
         <p:spPr>
           <a:xfrm>
-            <a:off x="1208836" y="3365906"/>
-            <a:ext cx="416966" cy="416966"/>
+            <a:off x="641100" y="1627632"/>
+            <a:ext cx="10909495" cy="4727448"/>
           </a:xfrm>
           <a:prstGeom prst="rect">
             <a:avLst/>
@@ -24675,31 +24644,97 @@
       </p:pic>
       <p:sp>
         <p:nvSpPr>
+          <p:cNvPr id="7" name="TextBox 6"/>
+          <p:cNvSpPr txBox="1"/>
+          <p:nvPr/>
+        </p:nvSpPr>
+        <p:spPr>
+          <a:xfrm>
+            <a:off x="3804853" y="1651269"/>
+            <a:ext cx="6763886" cy="507618"/>
+          </a:xfrm>
+          <a:prstGeom prst="rect">
+            <a:avLst/>
+          </a:prstGeom>
+          <a:noFill/>
+        </p:spPr>
+        <p:txBody>
+          <a:bodyPr wrap="square" anchor="t"/>
+          <a:lstStyle/>
+          <a:p>
+            <a:pPr algn="ctr">
+              <a:lnSpc>
+                <a:spcPct val="110000"/>
+              </a:lnSpc>
+              <a:spcAft>
+                <a:spcPts val="100"/>
+              </a:spcAft>
+            </a:pPr>
+            <a:r>
+              <a:rPr sz="1350" b="1">
+                <a:solidFill>
+                  <a:srgbClr val="13294B"/>
+                </a:solidFill>
+                <a:latin typeface="맑은 고딕"/>
+                <a:ea typeface="맑은 고딕"/>
+                <a:cs typeface="맑은 고딕"/>
+              </a:rPr>
+              <a:t>질문의 답이 나오는 길</a:t>
+            </a:r>
+          </a:p>
+          <a:p>
+            <a:pPr algn="ctr">
+              <a:lnSpc>
+                <a:spcPct val="110000"/>
+              </a:lnSpc>
+              <a:spcAft>
+                <a:spcPts val="100"/>
+              </a:spcAft>
+            </a:pPr>
+            <a:r>
+              <a:rPr sz="1100" b="0">
+                <a:solidFill>
+                  <a:srgbClr val="556175"/>
+                </a:solidFill>
+                <a:latin typeface="맑은 고딕"/>
+                <a:ea typeface="맑은 고딕"/>
+                <a:cs typeface="맑은 고딕"/>
+              </a:rPr>
+              <a:t>오일 쿨러를 재는 센서와 그 한계값은 아래 줄의 관계를 따라가면 나온다</a:t>
+            </a:r>
+          </a:p>
+        </p:txBody>
+      </p:sp>
+      <p:sp>
+        <p:nvSpPr>
           <p:cNvPr id="8" name="TextBox 7"/>
           <p:cNvSpPr txBox="1"/>
           <p:nvPr/>
         </p:nvSpPr>
         <p:spPr>
           <a:xfrm>
-            <a:off x="670255" y="3817620"/>
-            <a:ext cx="1494129" cy="868680"/>
-          </a:xfrm>
-          <a:prstGeom prst="rect">
-            <a:avLst/>
-          </a:prstGeom>
-          <a:noFill/>
-        </p:spPr>
-        <p:txBody>
-          <a:bodyPr wrap="square" anchor="ctr"/>
+            <a:off x="804742" y="2573121"/>
+            <a:ext cx="1854614" cy="678053"/>
+          </a:xfrm>
+          <a:prstGeom prst="rect">
+            <a:avLst/>
+          </a:prstGeom>
+          <a:noFill/>
+        </p:spPr>
+        <p:txBody>
+          <a:bodyPr wrap="square" anchor="t"/>
           <a:lstStyle/>
           <a:p>
             <a:pPr algn="ctr">
               <a:lnSpc>
                 <a:spcPct val="110000"/>
               </a:lnSpc>
-            </a:pPr>
-            <a:r>
-              <a:rPr sz="1400" b="1">
+              <a:spcAft>
+                <a:spcPts val="100"/>
+              </a:spcAft>
+            </a:pPr>
+            <a:r>
+              <a:rPr sz="1350" b="1">
                 <a:solidFill>
                   <a:srgbClr val="13294B"/>
                 </a:solidFill>
@@ -24707,6 +24742,552 @@
                 <a:ea typeface="맑은 고딕"/>
                 <a:cs typeface="맑은 고딕"/>
               </a:rPr>
+              <a:t>결과물 ② 스키마</a:t>
+            </a:r>
+          </a:p>
+          <a:p>
+            <a:pPr algn="ctr">
+              <a:lnSpc>
+                <a:spcPct val="110000"/>
+              </a:lnSpc>
+              <a:spcAft>
+                <a:spcPts val="100"/>
+              </a:spcAft>
+            </a:pPr>
+            <a:r>
+              <a:rPr sz="1100" b="0">
+                <a:solidFill>
+                  <a:srgbClr val="556175"/>
+                </a:solidFill>
+                <a:latin typeface="맑은 고딕"/>
+                <a:ea typeface="맑은 고딕"/>
+                <a:cs typeface="맑은 고딕"/>
+              </a:rPr>
+              <a:t>무엇이 무엇에</a:t>
+            </a:r>
+          </a:p>
+          <a:p>
+            <a:pPr algn="ctr">
+              <a:lnSpc>
+                <a:spcPct val="110000"/>
+              </a:lnSpc>
+              <a:spcAft>
+                <a:spcPts val="100"/>
+              </a:spcAft>
+            </a:pPr>
+            <a:r>
+              <a:rPr sz="1100" b="0">
+                <a:solidFill>
+                  <a:srgbClr val="556175"/>
+                </a:solidFill>
+                <a:latin typeface="맑은 고딕"/>
+                <a:ea typeface="맑은 고딕"/>
+                <a:cs typeface="맑은 고딕"/>
+              </a:rPr>
+              <a:t>이어질 수 있는가</a:t>
+            </a:r>
+          </a:p>
+        </p:txBody>
+      </p:sp>
+      <p:sp>
+        <p:nvSpPr>
+          <p:cNvPr id="9" name="TextBox 8"/>
+          <p:cNvSpPr txBox="1"/>
+          <p:nvPr/>
+        </p:nvSpPr>
+        <p:spPr>
+          <a:xfrm>
+            <a:off x="2986641" y="2762219"/>
+            <a:ext cx="1309139" cy="507618"/>
+          </a:xfrm>
+          <a:prstGeom prst="rect">
+            <a:avLst/>
+          </a:prstGeom>
+          <a:noFill/>
+        </p:spPr>
+        <p:txBody>
+          <a:bodyPr wrap="square" anchor="t"/>
+          <a:lstStyle/>
+          <a:p>
+            <a:pPr algn="ctr">
+              <a:lnSpc>
+                <a:spcPct val="110000"/>
+              </a:lnSpc>
+              <a:spcAft>
+                <a:spcPts val="100"/>
+              </a:spcAft>
+            </a:pPr>
+            <a:r>
+              <a:rPr sz="1350" b="1">
+                <a:solidFill>
+                  <a:srgbClr val="13294B"/>
+                </a:solidFill>
+                <a:latin typeface="맑은 고딕"/>
+                <a:ea typeface="맑은 고딕"/>
+                <a:cs typeface="맑은 고딕"/>
+              </a:rPr>
+              <a:t>Asset</a:t>
+            </a:r>
+          </a:p>
+          <a:p>
+            <a:pPr algn="ctr">
+              <a:lnSpc>
+                <a:spcPct val="110000"/>
+              </a:lnSpc>
+              <a:spcAft>
+                <a:spcPts val="100"/>
+              </a:spcAft>
+            </a:pPr>
+            <a:r>
+              <a:rPr sz="1100" b="0">
+                <a:solidFill>
+                  <a:srgbClr val="556175"/>
+                </a:solidFill>
+                <a:latin typeface="맑은 고딕"/>
+                <a:ea typeface="맑은 고딕"/>
+                <a:cs typeface="맑은 고딕"/>
+              </a:rPr>
+              <a:t>설비</a:t>
+            </a:r>
+          </a:p>
+        </p:txBody>
+      </p:sp>
+      <p:sp>
+        <p:nvSpPr>
+          <p:cNvPr id="10" name="TextBox 9"/>
+          <p:cNvSpPr txBox="1"/>
+          <p:nvPr/>
+        </p:nvSpPr>
+        <p:spPr>
+          <a:xfrm>
+            <a:off x="5354001" y="2762219"/>
+            <a:ext cx="1309139" cy="507618"/>
+          </a:xfrm>
+          <a:prstGeom prst="rect">
+            <a:avLst/>
+          </a:prstGeom>
+          <a:noFill/>
+        </p:spPr>
+        <p:txBody>
+          <a:bodyPr wrap="square" anchor="t"/>
+          <a:lstStyle/>
+          <a:p>
+            <a:pPr algn="ctr">
+              <a:lnSpc>
+                <a:spcPct val="110000"/>
+              </a:lnSpc>
+              <a:spcAft>
+                <a:spcPts val="100"/>
+              </a:spcAft>
+            </a:pPr>
+            <a:r>
+              <a:rPr sz="1350" b="1">
+                <a:solidFill>
+                  <a:srgbClr val="13294B"/>
+                </a:solidFill>
+                <a:latin typeface="맑은 고딕"/>
+                <a:ea typeface="맑은 고딕"/>
+                <a:cs typeface="맑은 고딕"/>
+              </a:rPr>
+              <a:t>Component</a:t>
+            </a:r>
+          </a:p>
+          <a:p>
+            <a:pPr algn="ctr">
+              <a:lnSpc>
+                <a:spcPct val="110000"/>
+              </a:lnSpc>
+              <a:spcAft>
+                <a:spcPts val="100"/>
+              </a:spcAft>
+            </a:pPr>
+            <a:r>
+              <a:rPr sz="1100" b="0">
+                <a:solidFill>
+                  <a:srgbClr val="556175"/>
+                </a:solidFill>
+                <a:latin typeface="맑은 고딕"/>
+                <a:ea typeface="맑은 고딕"/>
+                <a:cs typeface="맑은 고딕"/>
+              </a:rPr>
+              <a:t>구성 요소</a:t>
+            </a:r>
+          </a:p>
+        </p:txBody>
+      </p:sp>
+      <p:sp>
+        <p:nvSpPr>
+          <p:cNvPr id="11" name="TextBox 10"/>
+          <p:cNvSpPr txBox="1"/>
+          <p:nvPr/>
+        </p:nvSpPr>
+        <p:spPr>
+          <a:xfrm>
+            <a:off x="7710452" y="2762219"/>
+            <a:ext cx="1309139" cy="507618"/>
+          </a:xfrm>
+          <a:prstGeom prst="rect">
+            <a:avLst/>
+          </a:prstGeom>
+          <a:noFill/>
+        </p:spPr>
+        <p:txBody>
+          <a:bodyPr wrap="square" anchor="t"/>
+          <a:lstStyle/>
+          <a:p>
+            <a:pPr algn="ctr">
+              <a:lnSpc>
+                <a:spcPct val="110000"/>
+              </a:lnSpc>
+              <a:spcAft>
+                <a:spcPts val="100"/>
+              </a:spcAft>
+            </a:pPr>
+            <a:r>
+              <a:rPr sz="1350" b="1">
+                <a:solidFill>
+                  <a:srgbClr val="13294B"/>
+                </a:solidFill>
+                <a:latin typeface="맑은 고딕"/>
+                <a:ea typeface="맑은 고딕"/>
+                <a:cs typeface="맑은 고딕"/>
+              </a:rPr>
+              <a:t>Sensor</a:t>
+            </a:r>
+          </a:p>
+          <a:p>
+            <a:pPr algn="ctr">
+              <a:lnSpc>
+                <a:spcPct val="110000"/>
+              </a:lnSpc>
+              <a:spcAft>
+                <a:spcPts val="100"/>
+              </a:spcAft>
+            </a:pPr>
+            <a:r>
+              <a:rPr sz="1100" b="0">
+                <a:solidFill>
+                  <a:srgbClr val="556175"/>
+                </a:solidFill>
+                <a:latin typeface="맑은 고딕"/>
+                <a:ea typeface="맑은 고딕"/>
+                <a:cs typeface="맑은 고딕"/>
+              </a:rPr>
+              <a:t>센서</a:t>
+            </a:r>
+          </a:p>
+        </p:txBody>
+      </p:sp>
+      <p:sp>
+        <p:nvSpPr>
+          <p:cNvPr id="12" name="TextBox 11"/>
+          <p:cNvSpPr txBox="1"/>
+          <p:nvPr/>
+        </p:nvSpPr>
+        <p:spPr>
+          <a:xfrm>
+            <a:off x="10077813" y="2762219"/>
+            <a:ext cx="1309139" cy="716788"/>
+          </a:xfrm>
+          <a:prstGeom prst="rect">
+            <a:avLst/>
+          </a:prstGeom>
+          <a:noFill/>
+        </p:spPr>
+        <p:txBody>
+          <a:bodyPr wrap="square" anchor="t"/>
+          <a:lstStyle/>
+          <a:p>
+            <a:pPr algn="ctr">
+              <a:lnSpc>
+                <a:spcPct val="110000"/>
+              </a:lnSpc>
+              <a:spcAft>
+                <a:spcPts val="100"/>
+              </a:spcAft>
+            </a:pPr>
+            <a:r>
+              <a:rPr sz="1350" b="1">
+                <a:solidFill>
+                  <a:srgbClr val="13294B"/>
+                </a:solidFill>
+                <a:latin typeface="맑은 고딕"/>
+                <a:ea typeface="맑은 고딕"/>
+                <a:cs typeface="맑은 고딕"/>
+              </a:rPr>
+              <a:t>StateVariable</a:t>
+            </a:r>
+          </a:p>
+          <a:p>
+            <a:pPr algn="ctr">
+              <a:lnSpc>
+                <a:spcPct val="110000"/>
+              </a:lnSpc>
+              <a:spcAft>
+                <a:spcPts val="100"/>
+              </a:spcAft>
+            </a:pPr>
+            <a:r>
+              <a:rPr sz="1100" b="0">
+                <a:solidFill>
+                  <a:srgbClr val="556175"/>
+                </a:solidFill>
+                <a:latin typeface="맑은 고딕"/>
+                <a:ea typeface="맑은 고딕"/>
+                <a:cs typeface="맑은 고딕"/>
+              </a:rPr>
+              <a:t>상태 변수</a:t>
+            </a:r>
+          </a:p>
+        </p:txBody>
+      </p:sp>
+      <p:sp>
+        <p:nvSpPr>
+          <p:cNvPr id="13" name="TextBox 12"/>
+          <p:cNvSpPr txBox="1"/>
+          <p:nvPr/>
+        </p:nvSpPr>
+        <p:spPr>
+          <a:xfrm>
+            <a:off x="3783034" y="2251655"/>
+            <a:ext cx="2072804" cy="337185"/>
+          </a:xfrm>
+          <a:prstGeom prst="rect">
+            <a:avLst/>
+          </a:prstGeom>
+          <a:noFill/>
+        </p:spPr>
+        <p:txBody>
+          <a:bodyPr wrap="square" anchor="t"/>
+          <a:lstStyle/>
+          <a:p>
+            <a:pPr algn="ctr">
+              <a:lnSpc>
+                <a:spcPct val="110000"/>
+              </a:lnSpc>
+              <a:spcAft>
+                <a:spcPts val="100"/>
+              </a:spcAft>
+            </a:pPr>
+            <a:r>
+              <a:rPr sz="1350" b="1">
+                <a:solidFill>
+                  <a:srgbClr val="13294B"/>
+                </a:solidFill>
+                <a:latin typeface="맑은 고딕"/>
+                <a:ea typeface="맑은 고딕"/>
+                <a:cs typeface="맑은 고딕"/>
+              </a:rPr>
+              <a:t>HAS_COMPONENT</a:t>
+            </a:r>
+          </a:p>
+        </p:txBody>
+      </p:sp>
+      <p:sp>
+        <p:nvSpPr>
+          <p:cNvPr id="14" name="TextBox 13"/>
+          <p:cNvSpPr txBox="1"/>
+          <p:nvPr/>
+        </p:nvSpPr>
+        <p:spPr>
+          <a:xfrm>
+            <a:off x="6368584" y="2251655"/>
+            <a:ext cx="1636424" cy="337185"/>
+          </a:xfrm>
+          <a:prstGeom prst="rect">
+            <a:avLst/>
+          </a:prstGeom>
+          <a:noFill/>
+        </p:spPr>
+        <p:txBody>
+          <a:bodyPr wrap="square" anchor="t"/>
+          <a:lstStyle/>
+          <a:p>
+            <a:pPr algn="ctr">
+              <a:lnSpc>
+                <a:spcPct val="110000"/>
+              </a:lnSpc>
+              <a:spcAft>
+                <a:spcPts val="100"/>
+              </a:spcAft>
+            </a:pPr>
+            <a:r>
+              <a:rPr sz="1350" b="1">
+                <a:solidFill>
+                  <a:srgbClr val="13294B"/>
+                </a:solidFill>
+                <a:latin typeface="맑은 고딕"/>
+                <a:ea typeface="맑은 고딕"/>
+                <a:cs typeface="맑은 고딕"/>
+              </a:rPr>
+              <a:t>MONITORED_BY</a:t>
+            </a:r>
+          </a:p>
+        </p:txBody>
+      </p:sp>
+      <p:sp>
+        <p:nvSpPr>
+          <p:cNvPr id="15" name="TextBox 14"/>
+          <p:cNvSpPr txBox="1"/>
+          <p:nvPr/>
+        </p:nvSpPr>
+        <p:spPr>
+          <a:xfrm>
+            <a:off x="8735945" y="2251655"/>
+            <a:ext cx="1636424" cy="337185"/>
+          </a:xfrm>
+          <a:prstGeom prst="rect">
+            <a:avLst/>
+          </a:prstGeom>
+          <a:noFill/>
+        </p:spPr>
+        <p:txBody>
+          <a:bodyPr wrap="square" anchor="t"/>
+          <a:lstStyle/>
+          <a:p>
+            <a:pPr algn="ctr">
+              <a:lnSpc>
+                <a:spcPct val="110000"/>
+              </a:lnSpc>
+              <a:spcAft>
+                <a:spcPts val="100"/>
+              </a:spcAft>
+            </a:pPr>
+            <a:r>
+              <a:rPr sz="1350" b="1">
+                <a:solidFill>
+                  <a:srgbClr val="13294B"/>
+                </a:solidFill>
+                <a:latin typeface="맑은 고딕"/>
+                <a:ea typeface="맑은 고딕"/>
+                <a:cs typeface="맑은 고딕"/>
+              </a:rPr>
+              <a:t>OBSERVES</a:t>
+            </a:r>
+          </a:p>
+        </p:txBody>
+      </p:sp>
+      <p:sp>
+        <p:nvSpPr>
+          <p:cNvPr id="16" name="TextBox 15"/>
+          <p:cNvSpPr txBox="1"/>
+          <p:nvPr/>
+        </p:nvSpPr>
+        <p:spPr>
+          <a:xfrm>
+            <a:off x="695647" y="4605924"/>
+            <a:ext cx="2072804" cy="887222"/>
+          </a:xfrm>
+          <a:prstGeom prst="rect">
+            <a:avLst/>
+          </a:prstGeom>
+          <a:noFill/>
+        </p:spPr>
+        <p:txBody>
+          <a:bodyPr wrap="square" anchor="t"/>
+          <a:lstStyle/>
+          <a:p>
+            <a:pPr algn="ctr">
+              <a:lnSpc>
+                <a:spcPct val="110000"/>
+              </a:lnSpc>
+              <a:spcAft>
+                <a:spcPts val="100"/>
+              </a:spcAft>
+            </a:pPr>
+            <a:r>
+              <a:rPr sz="1350" b="1">
+                <a:solidFill>
+                  <a:srgbClr val="1A6FC4"/>
+                </a:solidFill>
+                <a:latin typeface="맑은 고딕"/>
+                <a:ea typeface="맑은 고딕"/>
+                <a:cs typeface="맑은 고딕"/>
+              </a:rPr>
+              <a:t>결과물 ③ 인스턴스 데이터</a:t>
+            </a:r>
+          </a:p>
+          <a:p>
+            <a:pPr algn="ctr">
+              <a:lnSpc>
+                <a:spcPct val="110000"/>
+              </a:lnSpc>
+              <a:spcAft>
+                <a:spcPts val="100"/>
+              </a:spcAft>
+            </a:pPr>
+            <a:r>
+              <a:rPr sz="1100" b="0">
+                <a:solidFill>
+                  <a:srgbClr val="556175"/>
+                </a:solidFill>
+                <a:latin typeface="맑은 고딕"/>
+                <a:ea typeface="맑은 고딕"/>
+                <a:cs typeface="맑은 고딕"/>
+              </a:rPr>
+              <a:t>무엇이 무엇에</a:t>
+            </a:r>
+          </a:p>
+          <a:p>
+            <a:pPr algn="ctr">
+              <a:lnSpc>
+                <a:spcPct val="110000"/>
+              </a:lnSpc>
+              <a:spcAft>
+                <a:spcPts val="100"/>
+              </a:spcAft>
+            </a:pPr>
+            <a:r>
+              <a:rPr sz="1100" b="0">
+                <a:solidFill>
+                  <a:srgbClr val="556175"/>
+                </a:solidFill>
+                <a:latin typeface="맑은 고딕"/>
+                <a:ea typeface="맑은 고딕"/>
+                <a:cs typeface="맑은 고딕"/>
+              </a:rPr>
+              <a:t>이어져 있는가</a:t>
+            </a:r>
+          </a:p>
+        </p:txBody>
+      </p:sp>
+      <p:sp>
+        <p:nvSpPr>
+          <p:cNvPr id="17" name="TextBox 16"/>
+          <p:cNvSpPr txBox="1"/>
+          <p:nvPr/>
+        </p:nvSpPr>
+        <p:spPr>
+          <a:xfrm>
+            <a:off x="2550261" y="5608143"/>
+            <a:ext cx="2181899" cy="507618"/>
+          </a:xfrm>
+          <a:prstGeom prst="rect">
+            <a:avLst/>
+          </a:prstGeom>
+          <a:noFill/>
+        </p:spPr>
+        <p:txBody>
+          <a:bodyPr wrap="square" anchor="t"/>
+          <a:lstStyle/>
+          <a:p>
+            <a:pPr algn="ctr">
+              <a:lnSpc>
+                <a:spcPct val="110000"/>
+              </a:lnSpc>
+              <a:spcAft>
+                <a:spcPts val="100"/>
+              </a:spcAft>
+            </a:pPr>
+            <a:r>
+              <a:rPr sz="1350" b="1">
+                <a:solidFill>
+                  <a:srgbClr val="13294B"/>
+                </a:solidFill>
+                <a:latin typeface="맑은 고딕"/>
+                <a:ea typeface="맑은 고딕"/>
+                <a:cs typeface="맑은 고딕"/>
+              </a:rPr>
               <a:t>HYD-01</a:t>
             </a:r>
           </a:p>
@@ -24715,6 +25296,9 @@
               <a:lnSpc>
                 <a:spcPct val="110000"/>
               </a:lnSpc>
+              <a:spcAft>
+                <a:spcPts val="100"/>
+              </a:spcAft>
             </a:pPr>
             <a:r>
               <a:rPr sz="1100" b="0">
@@ -24725,14 +25309,59 @@
                 <a:ea typeface="맑은 고딕"/>
                 <a:cs typeface="맑은 고딕"/>
               </a:rPr>
-              <a:t>설비</a:t>
-            </a:r>
-          </a:p>
+              <a:t>asset:hyd-01</a:t>
+            </a:r>
+          </a:p>
+        </p:txBody>
+      </p:sp>
+      <p:sp>
+        <p:nvSpPr>
+          <p:cNvPr id="18" name="TextBox 17"/>
+          <p:cNvSpPr txBox="1"/>
+          <p:nvPr/>
+        </p:nvSpPr>
+        <p:spPr>
+          <a:xfrm>
+            <a:off x="4917622" y="5608143"/>
+            <a:ext cx="2181899" cy="507618"/>
+          </a:xfrm>
+          <a:prstGeom prst="rect">
+            <a:avLst/>
+          </a:prstGeom>
+          <a:noFill/>
+        </p:spPr>
+        <p:txBody>
+          <a:bodyPr wrap="square" anchor="t"/>
+          <a:lstStyle/>
           <a:p>
             <a:pPr algn="ctr">
               <a:lnSpc>
                 <a:spcPct val="110000"/>
               </a:lnSpc>
+              <a:spcAft>
+                <a:spcPts val="100"/>
+              </a:spcAft>
+            </a:pPr>
+            <a:r>
+              <a:rPr sz="1350" b="1">
+                <a:solidFill>
+                  <a:srgbClr val="13294B"/>
+                </a:solidFill>
+                <a:latin typeface="맑은 고딕"/>
+                <a:ea typeface="맑은 고딕"/>
+                <a:cs typeface="맑은 고딕"/>
+              </a:rPr>
+              <a:t>오일 쿨러</a:t>
+            </a:r>
+          </a:p>
+          <a:p>
+            <a:pPr algn="ctr">
+              <a:lnSpc>
+                <a:spcPct val="110000"/>
+              </a:lnSpc>
+              <a:spcAft>
+                <a:spcPts val="100"/>
+              </a:spcAft>
             </a:pPr>
             <a:r>
               <a:rPr sz="1100" b="0">
@@ -24743,93 +25372,41 @@
                 <a:ea typeface="맑은 고딕"/>
                 <a:cs typeface="맑은 고딕"/>
               </a:rPr>
-              <a:t>asset:hyd-01</a:t>
-            </a:r>
-          </a:p>
-        </p:txBody>
-      </p:sp>
-      <p:sp>
-        <p:nvSpPr>
-          <p:cNvPr id="9" name="Oval 8"/>
-          <p:cNvSpPr/>
-          <p:nvPr/>
-        </p:nvSpPr>
-        <p:spPr>
-          <a:xfrm>
-            <a:off x="5227167" y="3122676"/>
-            <a:ext cx="1737360" cy="1737360"/>
-          </a:xfrm>
-          <a:prstGeom prst="ellipse">
-            <a:avLst/>
-          </a:prstGeom>
-          <a:solidFill>
-            <a:srgbClr val="5CB8F2"/>
-          </a:solidFill>
-          <a:ln w="25400">
-            <a:solidFill>
-              <a:srgbClr val="13294B"/>
-            </a:solidFill>
-          </a:ln>
-        </p:spPr>
-        <p:txBody>
-          <a:bodyPr rtlCol="0" anchor="ctr"/>
-          <a:lstStyle/>
-          <a:p>
-            <a:pPr algn="ctr"/>
-          </a:p>
-        </p:txBody>
-      </p:sp>
-      <p:pic>
-        <p:nvPicPr>
-          <p:cNvPr id="10" name="아이콘:components" descr="components_13294B_1.6.png"/>
-          <p:cNvPicPr>
-            <a:picLocks noChangeAspect="1"/>
-          </p:cNvPicPr>
-          <p:nvPr/>
-        </p:nvPicPr>
-        <p:blipFill>
-          <a:blip r:embed="rId4"/>
-          <a:stretch>
-            <a:fillRect/>
-          </a:stretch>
-        </p:blipFill>
-        <p:spPr>
-          <a:xfrm>
-            <a:off x="5887364" y="3365906"/>
-            <a:ext cx="416966" cy="416966"/>
-          </a:xfrm>
-          <a:prstGeom prst="rect">
-            <a:avLst/>
-          </a:prstGeom>
-        </p:spPr>
-      </p:pic>
-      <p:sp>
-        <p:nvSpPr>
-          <p:cNvPr id="11" name="TextBox 10"/>
-          <p:cNvSpPr txBox="1"/>
-          <p:nvPr/>
-        </p:nvSpPr>
-        <p:spPr>
-          <a:xfrm>
-            <a:off x="5348782" y="3817620"/>
-            <a:ext cx="1494129" cy="868680"/>
-          </a:xfrm>
-          <a:prstGeom prst="rect">
-            <a:avLst/>
-          </a:prstGeom>
-          <a:noFill/>
-        </p:spPr>
-        <p:txBody>
-          <a:bodyPr wrap="square" anchor="ctr"/>
+              <a:t>comp:cooler</a:t>
+            </a:r>
+          </a:p>
+        </p:txBody>
+      </p:sp>
+      <p:sp>
+        <p:nvSpPr>
+          <p:cNvPr id="19" name="TextBox 18"/>
+          <p:cNvSpPr txBox="1"/>
+          <p:nvPr/>
+        </p:nvSpPr>
+        <p:spPr>
+          <a:xfrm>
+            <a:off x="7274073" y="5608143"/>
+            <a:ext cx="2181899" cy="507618"/>
+          </a:xfrm>
+          <a:prstGeom prst="rect">
+            <a:avLst/>
+          </a:prstGeom>
+          <a:noFill/>
+        </p:spPr>
+        <p:txBody>
+          <a:bodyPr wrap="square" anchor="t"/>
           <a:lstStyle/>
           <a:p>
             <a:pPr algn="ctr">
               <a:lnSpc>
                 <a:spcPct val="110000"/>
               </a:lnSpc>
-            </a:pPr>
-            <a:r>
-              <a:rPr sz="1400" b="1">
+              <a:spcAft>
+                <a:spcPts val="100"/>
+              </a:spcAft>
+            </a:pPr>
+            <a:r>
+              <a:rPr sz="1350" b="1">
                 <a:solidFill>
                   <a:srgbClr val="13294B"/>
                 </a:solidFill>
@@ -24837,7 +25414,7 @@
                 <a:ea typeface="맑은 고딕"/>
                 <a:cs typeface="맑은 고딕"/>
               </a:rPr>
-              <a:t>오일 쿨러</a:t>
+              <a:t>유온 센서</a:t>
             </a:r>
           </a:p>
           <a:p>
@@ -24845,6 +25422,9 @@
               <a:lnSpc>
                 <a:spcPct val="110000"/>
               </a:lnSpc>
+              <a:spcAft>
+                <a:spcPts val="100"/>
+              </a:spcAft>
             </a:pPr>
             <a:r>
               <a:rPr sz="1100" b="0">
@@ -24855,14 +25435,59 @@
                 <a:ea typeface="맑은 고딕"/>
                 <a:cs typeface="맑은 고딕"/>
               </a:rPr>
-              <a:t>구성 요소</a:t>
-            </a:r>
-          </a:p>
+              <a:t>sen:ts1</a:t>
+            </a:r>
+          </a:p>
+        </p:txBody>
+      </p:sp>
+      <p:sp>
+        <p:nvSpPr>
+          <p:cNvPr id="20" name="TextBox 19"/>
+          <p:cNvSpPr txBox="1"/>
+          <p:nvPr/>
+        </p:nvSpPr>
+        <p:spPr>
+          <a:xfrm>
+            <a:off x="9641433" y="5608143"/>
+            <a:ext cx="2181899" cy="507618"/>
+          </a:xfrm>
+          <a:prstGeom prst="rect">
+            <a:avLst/>
+          </a:prstGeom>
+          <a:noFill/>
+        </p:spPr>
+        <p:txBody>
+          <a:bodyPr wrap="square" anchor="t"/>
+          <a:lstStyle/>
           <a:p>
             <a:pPr algn="ctr">
               <a:lnSpc>
                 <a:spcPct val="110000"/>
               </a:lnSpc>
+              <a:spcAft>
+                <a:spcPts val="100"/>
+              </a:spcAft>
+            </a:pPr>
+            <a:r>
+              <a:rPr sz="1350" b="1">
+                <a:solidFill>
+                  <a:srgbClr val="13294B"/>
+                </a:solidFill>
+                <a:latin typeface="맑은 고딕"/>
+                <a:ea typeface="맑은 고딕"/>
+                <a:cs typeface="맑은 고딕"/>
+              </a:rPr>
+              <a:t>유온</a:t>
+            </a:r>
+          </a:p>
+          <a:p>
+            <a:pPr algn="ctr">
+              <a:lnSpc>
+                <a:spcPct val="110000"/>
+              </a:lnSpc>
+              <a:spcAft>
+                <a:spcPts val="100"/>
+              </a:spcAft>
             </a:pPr>
             <a:r>
               <a:rPr sz="1100" b="0">
@@ -24873,325 +25498,7 @@
                 <a:ea typeface="맑은 고딕"/>
                 <a:cs typeface="맑은 고딕"/>
               </a:rPr>
-              <a:t>comp:cooler</a:t>
-            </a:r>
-          </a:p>
-        </p:txBody>
-      </p:sp>
-      <p:sp>
-        <p:nvSpPr>
-          <p:cNvPr id="12" name="Oval 11"/>
-          <p:cNvSpPr/>
-          <p:nvPr/>
-        </p:nvSpPr>
-        <p:spPr>
-          <a:xfrm>
-            <a:off x="9905695" y="3122676"/>
-            <a:ext cx="1737360" cy="1737360"/>
-          </a:xfrm>
-          <a:prstGeom prst="ellipse">
-            <a:avLst/>
-          </a:prstGeom>
-          <a:solidFill>
-            <a:srgbClr val="E7F3FD"/>
-          </a:solidFill>
-          <a:ln w="25400">
-            <a:solidFill>
-              <a:srgbClr val="5CB8F2"/>
-            </a:solidFill>
-          </a:ln>
-        </p:spPr>
-        <p:txBody>
-          <a:bodyPr rtlCol="0" anchor="ctr"/>
-          <a:lstStyle/>
-          <a:p>
-            <a:pPr algn="ctr"/>
-          </a:p>
-        </p:txBody>
-      </p:sp>
-      <p:pic>
-        <p:nvPicPr>
-          <p:cNvPr id="13" name="아이콘:gauge" descr="gauge_13294B_1.6.png"/>
-          <p:cNvPicPr>
-            <a:picLocks noChangeAspect="1"/>
-          </p:cNvPicPr>
-          <p:nvPr/>
-        </p:nvPicPr>
-        <p:blipFill>
-          <a:blip r:embed="rId5"/>
-          <a:stretch>
-            <a:fillRect/>
-          </a:stretch>
-        </p:blipFill>
-        <p:spPr>
-          <a:xfrm>
-            <a:off x="10565892" y="3365906"/>
-            <a:ext cx="416966" cy="416966"/>
-          </a:xfrm>
-          <a:prstGeom prst="rect">
-            <a:avLst/>
-          </a:prstGeom>
-        </p:spPr>
-      </p:pic>
-      <p:sp>
-        <p:nvSpPr>
-          <p:cNvPr id="14" name="TextBox 13"/>
-          <p:cNvSpPr txBox="1"/>
-          <p:nvPr/>
-        </p:nvSpPr>
-        <p:spPr>
-          <a:xfrm>
-            <a:off x="10027310" y="3817620"/>
-            <a:ext cx="1494129" cy="868680"/>
-          </a:xfrm>
-          <a:prstGeom prst="rect">
-            <a:avLst/>
-          </a:prstGeom>
-          <a:noFill/>
-        </p:spPr>
-        <p:txBody>
-          <a:bodyPr wrap="square" anchor="ctr"/>
-          <a:lstStyle/>
-          <a:p>
-            <a:pPr algn="ctr">
-              <a:lnSpc>
-                <a:spcPct val="110000"/>
-              </a:lnSpc>
-            </a:pPr>
-            <a:r>
-              <a:rPr sz="1400" b="1">
-                <a:solidFill>
-                  <a:srgbClr val="13294B"/>
-                </a:solidFill>
-                <a:latin typeface="맑은 고딕"/>
-                <a:ea typeface="맑은 고딕"/>
-                <a:cs typeface="맑은 고딕"/>
-              </a:rPr>
-              <a:t>유온 센서</a:t>
-            </a:r>
-          </a:p>
-          <a:p>
-            <a:pPr algn="ctr">
-              <a:lnSpc>
-                <a:spcPct val="110000"/>
-              </a:lnSpc>
-            </a:pPr>
-            <a:r>
-              <a:rPr sz="1100" b="0">
-                <a:solidFill>
-                  <a:srgbClr val="556175"/>
-                </a:solidFill>
-                <a:latin typeface="맑은 고딕"/>
-                <a:ea typeface="맑은 고딕"/>
-                <a:cs typeface="맑은 고딕"/>
-              </a:rPr>
-              <a:t>센서</a:t>
-            </a:r>
-          </a:p>
-          <a:p>
-            <a:pPr algn="ctr">
-              <a:lnSpc>
-                <a:spcPct val="110000"/>
-              </a:lnSpc>
-            </a:pPr>
-            <a:r>
-              <a:rPr sz="1100" b="0">
-                <a:solidFill>
-                  <a:srgbClr val="556175"/>
-                </a:solidFill>
-                <a:latin typeface="맑은 고딕"/>
-                <a:ea typeface="맑은 고딕"/>
-                <a:cs typeface="맑은 고딕"/>
-              </a:rPr>
-              <a:t>sen:ts1</a:t>
-            </a:r>
-          </a:p>
-        </p:txBody>
-      </p:sp>
-      <p:cxnSp>
-        <p:nvCxnSpPr>
-          <p:cNvPr id="15" name="Connector 14"/>
-          <p:cNvCxnSpPr/>
-          <p:nvPr/>
-        </p:nvCxnSpPr>
-        <p:spPr>
-          <a:xfrm>
-            <a:off x="2331720" y="3991356"/>
-            <a:ext cx="2822295" cy="0"/>
-          </a:xfrm>
-          <a:prstGeom prst="line">
-            <a:avLst/>
-          </a:prstGeom>
-          <a:ln w="28575">
-            <a:solidFill>
-              <a:srgbClr val="13294B"/>
-            </a:solidFill>
-            <a:tailEnd type="triangle" w="med" len="med"/>
-          </a:ln>
-        </p:spPr>
-      </p:cxnSp>
-      <p:sp>
-        <p:nvSpPr>
-          <p:cNvPr id="16" name="Rounded Rectangle 15"/>
-          <p:cNvSpPr/>
-          <p:nvPr/>
-        </p:nvSpPr>
-        <p:spPr>
-          <a:xfrm>
-            <a:off x="2919798" y="3625596"/>
-            <a:ext cx="1646138" cy="292608"/>
-          </a:xfrm>
-          <a:prstGeom prst="roundRect">
-            <a:avLst>
-              <a:gd name="adj" fmla="val 50000"/>
-            </a:avLst>
-          </a:prstGeom>
-          <a:solidFill>
-            <a:srgbClr val="FFFFFF"/>
-          </a:solidFill>
-          <a:ln w="12700">
-            <a:solidFill>
-              <a:srgbClr val="13294B"/>
-            </a:solidFill>
-          </a:ln>
-        </p:spPr>
-        <p:txBody>
-          <a:bodyPr rtlCol="0" anchor="ctr"/>
-          <a:lstStyle/>
-          <a:p>
-            <a:pPr algn="ctr"/>
-          </a:p>
-        </p:txBody>
-      </p:sp>
-      <p:sp>
-        <p:nvSpPr>
-          <p:cNvPr id="17" name="TextBox 16"/>
-          <p:cNvSpPr txBox="1"/>
-          <p:nvPr/>
-        </p:nvSpPr>
-        <p:spPr>
-          <a:xfrm>
-            <a:off x="2919798" y="3625596"/>
-            <a:ext cx="1646138" cy="292608"/>
-          </a:xfrm>
-          <a:prstGeom prst="rect">
-            <a:avLst/>
-          </a:prstGeom>
-          <a:noFill/>
-        </p:spPr>
-        <p:txBody>
-          <a:bodyPr wrap="square" anchor="ctr"/>
-          <a:lstStyle/>
-          <a:p>
-            <a:pPr algn="ctr">
-              <a:lnSpc>
-                <a:spcPct val="110000"/>
-              </a:lnSpc>
-            </a:pPr>
-            <a:r>
-              <a:rPr sz="1150" b="1">
-                <a:solidFill>
-                  <a:srgbClr val="13294B"/>
-                </a:solidFill>
-                <a:latin typeface="맑은 고딕"/>
-                <a:ea typeface="맑은 고딕"/>
-                <a:cs typeface="맑은 고딕"/>
-              </a:rPr>
-              <a:t>HAS_COMPONENT</a:t>
-            </a:r>
-          </a:p>
-        </p:txBody>
-      </p:sp>
-      <p:cxnSp>
-        <p:nvCxnSpPr>
-          <p:cNvPr id="18" name="Connector 17"/>
-          <p:cNvCxnSpPr/>
-          <p:nvPr/>
-        </p:nvCxnSpPr>
-        <p:spPr>
-          <a:xfrm>
-            <a:off x="7010247" y="3991356"/>
-            <a:ext cx="2822296" cy="0"/>
-          </a:xfrm>
-          <a:prstGeom prst="line">
-            <a:avLst/>
-          </a:prstGeom>
-          <a:ln w="28575">
-            <a:solidFill>
-              <a:srgbClr val="13294B"/>
-            </a:solidFill>
-            <a:tailEnd type="triangle" w="med" len="med"/>
-          </a:ln>
-        </p:spPr>
-      </p:cxnSp>
-      <p:sp>
-        <p:nvSpPr>
-          <p:cNvPr id="19" name="Rounded Rectangle 18"/>
-          <p:cNvSpPr/>
-          <p:nvPr/>
-        </p:nvSpPr>
-        <p:spPr>
-          <a:xfrm>
-            <a:off x="7651751" y="3625596"/>
-            <a:ext cx="1539288" cy="292608"/>
-          </a:xfrm>
-          <a:prstGeom prst="roundRect">
-            <a:avLst>
-              <a:gd name="adj" fmla="val 50000"/>
-            </a:avLst>
-          </a:prstGeom>
-          <a:solidFill>
-            <a:srgbClr val="FFFFFF"/>
-          </a:solidFill>
-          <a:ln w="12700">
-            <a:solidFill>
-              <a:srgbClr val="13294B"/>
-            </a:solidFill>
-          </a:ln>
-        </p:spPr>
-        <p:txBody>
-          <a:bodyPr rtlCol="0" anchor="ctr"/>
-          <a:lstStyle/>
-          <a:p>
-            <a:pPr algn="ctr"/>
-          </a:p>
-        </p:txBody>
-      </p:sp>
-      <p:sp>
-        <p:nvSpPr>
-          <p:cNvPr id="20" name="TextBox 19"/>
-          <p:cNvSpPr txBox="1"/>
-          <p:nvPr/>
-        </p:nvSpPr>
-        <p:spPr>
-          <a:xfrm>
-            <a:off x="7651751" y="3625596"/>
-            <a:ext cx="1539288" cy="292608"/>
-          </a:xfrm>
-          <a:prstGeom prst="rect">
-            <a:avLst/>
-          </a:prstGeom>
-          <a:noFill/>
-        </p:spPr>
-        <p:txBody>
-          <a:bodyPr wrap="square" anchor="ctr"/>
-          <a:lstStyle/>
-          <a:p>
-            <a:pPr algn="ctr">
-              <a:lnSpc>
-                <a:spcPct val="110000"/>
-              </a:lnSpc>
-            </a:pPr>
-            <a:r>
-              <a:rPr sz="1150" b="1">
-                <a:solidFill>
-                  <a:srgbClr val="13294B"/>
-                </a:solidFill>
-                <a:latin typeface="맑은 고딕"/>
-                <a:ea typeface="맑은 고딕"/>
-                <a:cs typeface="맑은 고딕"/>
-              </a:rPr>
-              <a:t>MONITORED_BY</a:t>
+              <a:t>sv:ts1 · 한계 65 ℃</a:t>
             </a:r>
           </a:p>
         </p:txBody>
@@ -25295,7 +25602,7 @@
                 <a:ea typeface="맑은 고딕"/>
                 <a:cs typeface="맑은 고딕"/>
               </a:rPr>
-              <a:t>수행 단계는 조치 방법의 작업 단계로, 전제 조건은 판단 규칙으로 옮겨지고 금지 사항은 조치의 하한으로 남는다.</a:t>
+              <a:t>수행 단계는 조치 방법의 작업 단계로, 전제 조건은 판단 규칙으로, 금지 사항은 펌프 부하의 하한 60 %로 옮겨진다.</a:t>
             </a:r>
           </a:p>
         </p:txBody>
@@ -25804,7 +26111,7 @@
                 <a:ea typeface="맑은 고딕"/>
                 <a:cs typeface="맑은 고딕"/>
               </a:rPr>
-              <a:t>「펌프 부하를 60 % 미만으로 설정하지 않는다.」</a:t>
+              <a:t>「펌프 부하는 60 % 아래로 내리지 않는다.」</a:t>
             </a:r>
           </a:p>
           <a:p>
@@ -26240,71 +26547,9 @@
           </a:p>
         </p:txBody>
       </p:sp>
-      <p:sp>
-        <p:nvSpPr>
-          <p:cNvPr id="6" name="Rounded Rectangle 5"/>
-          <p:cNvSpPr/>
-          <p:nvPr/>
-        </p:nvSpPr>
-        <p:spPr>
-          <a:xfrm>
-            <a:off x="548640" y="2728468"/>
-            <a:ext cx="3515258" cy="2525776"/>
-          </a:xfrm>
-          <a:prstGeom prst="roundRect">
-            <a:avLst>
-              <a:gd name="adj" fmla="val 4000"/>
-            </a:avLst>
-          </a:prstGeom>
-          <a:solidFill>
-            <a:srgbClr val="FFFFFF"/>
-          </a:solidFill>
-          <a:ln w="15875">
-            <a:solidFill>
-              <a:srgbClr val="D3D9E1"/>
-            </a:solidFill>
-          </a:ln>
-        </p:spPr>
-        <p:txBody>
-          <a:bodyPr rtlCol="0" anchor="ctr"/>
-          <a:lstStyle/>
-          <a:p>
-            <a:pPr algn="ctr"/>
-          </a:p>
-        </p:txBody>
-      </p:sp>
-      <p:sp>
-        <p:nvSpPr>
-          <p:cNvPr id="7" name="Oval 6"/>
-          <p:cNvSpPr/>
-          <p:nvPr/>
-        </p:nvSpPr>
-        <p:spPr>
-          <a:xfrm>
-            <a:off x="777240" y="2929636"/>
-            <a:ext cx="731520" cy="731520"/>
-          </a:xfrm>
-          <a:prstGeom prst="ellipse">
-            <a:avLst/>
-          </a:prstGeom>
-          <a:solidFill>
-            <a:srgbClr val="E7F3FD"/>
-          </a:solidFill>
-          <a:ln>
-            <a:noFill/>
-          </a:ln>
-        </p:spPr>
-        <p:txBody>
-          <a:bodyPr rtlCol="0" anchor="ctr"/>
-          <a:lstStyle/>
-          <a:p>
-            <a:pPr algn="ctr"/>
-          </a:p>
-        </p:txBody>
-      </p:sp>
       <p:pic>
         <p:nvPicPr>
-          <p:cNvPr id="8" name="아이콘:shield-check" descr="shield-check_13294B_1.6.png"/>
+          <p:cNvPr id="6" name="삽화:성과경로_5.svg" descr="illust_1060158762438132532_1791770880.png"/>
           <p:cNvPicPr>
             <a:picLocks noChangeAspect="1"/>
           </p:cNvPicPr>
@@ -26318,8 +26563,8 @@
         </p:blipFill>
         <p:spPr>
           <a:xfrm>
-            <a:off x="930859" y="3083255"/>
-            <a:ext cx="424281" cy="424281"/>
+            <a:off x="641100" y="1627632"/>
+            <a:ext cx="10909495" cy="4727448"/>
           </a:xfrm>
           <a:prstGeom prst="rect">
             <a:avLst/>
@@ -26328,14 +26573,140 @@
       </p:pic>
       <p:sp>
         <p:nvSpPr>
+          <p:cNvPr id="7" name="TextBox 6"/>
+          <p:cNvSpPr txBox="1"/>
+          <p:nvPr/>
+        </p:nvSpPr>
+        <p:spPr>
+          <a:xfrm>
+            <a:off x="673828" y="4345914"/>
+            <a:ext cx="1963709" cy="825246"/>
+          </a:xfrm>
+          <a:prstGeom prst="rect">
+            <a:avLst/>
+          </a:prstGeom>
+          <a:noFill/>
+        </p:spPr>
+        <p:txBody>
+          <a:bodyPr wrap="square" anchor="t"/>
+          <a:lstStyle/>
+          <a:p>
+            <a:pPr algn="ctr">
+              <a:lnSpc>
+                <a:spcPct val="110000"/>
+              </a:lnSpc>
+              <a:spcAft>
+                <a:spcPts val="100"/>
+              </a:spcAft>
+            </a:pPr>
+            <a:r>
+              <a:rPr sz="1600" b="1">
+                <a:solidFill>
+                  <a:srgbClr val="13294B"/>
+                </a:solidFill>
+                <a:latin typeface="맑은 고딕"/>
+                <a:ea typeface="맑은 고딕"/>
+                <a:cs typeface="맑은 고딕"/>
+              </a:rPr>
+              <a:t>팬 최대 운전과 부하 80 %</a:t>
+            </a:r>
+          </a:p>
+          <a:p>
+            <a:pPr algn="ctr">
+              <a:lnSpc>
+                <a:spcPct val="110000"/>
+              </a:lnSpc>
+              <a:spcAft>
+                <a:spcPts val="100"/>
+              </a:spcAft>
+            </a:pPr>
+            <a:r>
+              <a:rPr sz="1300" b="0">
+                <a:solidFill>
+                  <a:srgbClr val="556175"/>
+                </a:solidFill>
+                <a:latin typeface="맑은 고딕"/>
+                <a:ea typeface="맑은 고딕"/>
+                <a:cs typeface="맑은 고딕"/>
+              </a:rPr>
+              <a:t>조치 후보</a:t>
+            </a:r>
+          </a:p>
+        </p:txBody>
+      </p:sp>
+      <p:sp>
+        <p:nvSpPr>
+          <p:cNvPr id="8" name="TextBox 7"/>
+          <p:cNvSpPr txBox="1"/>
+          <p:nvPr/>
+        </p:nvSpPr>
+        <p:spPr>
+          <a:xfrm>
+            <a:off x="3204831" y="2818948"/>
+            <a:ext cx="1636424" cy="577342"/>
+          </a:xfrm>
+          <a:prstGeom prst="rect">
+            <a:avLst/>
+          </a:prstGeom>
+          <a:noFill/>
+        </p:spPr>
+        <p:txBody>
+          <a:bodyPr wrap="square" anchor="t"/>
+          <a:lstStyle/>
+          <a:p>
+            <a:pPr algn="ctr">
+              <a:lnSpc>
+                <a:spcPct val="110000"/>
+              </a:lnSpc>
+              <a:spcAft>
+                <a:spcPts val="100"/>
+              </a:spcAft>
+            </a:pPr>
+            <a:r>
+              <a:rPr sz="1600" b="1">
+                <a:solidFill>
+                  <a:srgbClr val="13294B"/>
+                </a:solidFill>
+                <a:latin typeface="맑은 고딕"/>
+                <a:ea typeface="맑은 고딕"/>
+                <a:cs typeface="맑은 고딕"/>
+              </a:rPr>
+              <a:t>팬 속도</a:t>
+            </a:r>
+          </a:p>
+          <a:p>
+            <a:pPr algn="ctr">
+              <a:lnSpc>
+                <a:spcPct val="110000"/>
+              </a:lnSpc>
+              <a:spcAft>
+                <a:spcPts val="100"/>
+              </a:spcAft>
+            </a:pPr>
+            <a:r>
+              <a:rPr sz="1300" b="0">
+                <a:solidFill>
+                  <a:srgbClr val="556175"/>
+                </a:solidFill>
+                <a:latin typeface="맑은 고딕"/>
+                <a:ea typeface="맑은 고딕"/>
+                <a:cs typeface="맑은 고딕"/>
+              </a:rPr>
+              <a:t>올린다</a:t>
+            </a:r>
+          </a:p>
+        </p:txBody>
+      </p:sp>
+      <p:sp>
+        <p:nvSpPr>
           <p:cNvPr id="9" name="TextBox 8"/>
           <p:cNvSpPr txBox="1"/>
           <p:nvPr/>
         </p:nvSpPr>
         <p:spPr>
           <a:xfrm>
-            <a:off x="713232" y="3752596"/>
-            <a:ext cx="3186074" cy="998728"/>
+            <a:off x="3455749" y="5721601"/>
+            <a:ext cx="1636424" cy="577342"/>
           </a:xfrm>
           <a:prstGeom prst="rect">
             <a:avLst/>
@@ -26346,16 +26717,16 @@
           <a:bodyPr wrap="square" anchor="t"/>
           <a:lstStyle/>
           <a:p>
-            <a:pPr algn="l">
+            <a:pPr algn="ctr">
               <a:lnSpc>
                 <a:spcPct val="110000"/>
               </a:lnSpc>
               <a:spcAft>
-                <a:spcPts val="400"/>
+                <a:spcPts val="100"/>
               </a:spcAft>
             </a:pPr>
             <a:r>
-              <a:rPr sz="1800" b="1">
+              <a:rPr sz="1600" b="1">
                 <a:solidFill>
                   <a:srgbClr val="13294B"/>
                 </a:solidFill>
@@ -26363,90 +26734,314 @@
                 <a:ea typeface="맑은 고딕"/>
                 <a:cs typeface="맑은 고딕"/>
               </a:rPr>
+              <a:t>펌프 부하</a:t>
+            </a:r>
+          </a:p>
+          <a:p>
+            <a:pPr algn="ctr">
+              <a:lnSpc>
+                <a:spcPct val="110000"/>
+              </a:lnSpc>
+              <a:spcAft>
+                <a:spcPts val="100"/>
+              </a:spcAft>
+            </a:pPr>
+            <a:r>
+              <a:rPr sz="1300" b="0">
+                <a:solidFill>
+                  <a:srgbClr val="556175"/>
+                </a:solidFill>
+                <a:latin typeface="맑은 고딕"/>
+                <a:ea typeface="맑은 고딕"/>
+                <a:cs typeface="맑은 고딕"/>
+              </a:rPr>
+              <a:t>내린다</a:t>
+            </a:r>
+          </a:p>
+        </p:txBody>
+      </p:sp>
+      <p:sp>
+        <p:nvSpPr>
+          <p:cNvPr id="10" name="TextBox 9"/>
+          <p:cNvSpPr txBox="1"/>
+          <p:nvPr/>
+        </p:nvSpPr>
+        <p:spPr>
+          <a:xfrm>
+            <a:off x="6150395" y="4227728"/>
+            <a:ext cx="1527329" cy="577342"/>
+          </a:xfrm>
+          <a:prstGeom prst="rect">
+            <a:avLst/>
+          </a:prstGeom>
+          <a:noFill/>
+        </p:spPr>
+        <p:txBody>
+          <a:bodyPr wrap="square" anchor="t"/>
+          <a:lstStyle/>
+          <a:p>
+            <a:pPr algn="ctr">
+              <a:lnSpc>
+                <a:spcPct val="110000"/>
+              </a:lnSpc>
+              <a:spcAft>
+                <a:spcPts val="100"/>
+              </a:spcAft>
+            </a:pPr>
+            <a:r>
+              <a:rPr sz="1600" b="1">
+                <a:solidFill>
+                  <a:srgbClr val="13294B"/>
+                </a:solidFill>
+                <a:latin typeface="맑은 고딕"/>
+                <a:ea typeface="맑은 고딕"/>
+                <a:cs typeface="맑은 고딕"/>
+              </a:rPr>
+              <a:t>유온</a:t>
+            </a:r>
+          </a:p>
+          <a:p>
+            <a:pPr algn="ctr">
+              <a:lnSpc>
+                <a:spcPct val="110000"/>
+              </a:lnSpc>
+              <a:spcAft>
+                <a:spcPts val="100"/>
+              </a:spcAft>
+            </a:pPr>
+            <a:r>
+              <a:rPr sz="1300" b="0">
+                <a:solidFill>
+                  <a:srgbClr val="556175"/>
+                </a:solidFill>
+                <a:latin typeface="맑은 고딕"/>
+                <a:ea typeface="맑은 고딕"/>
+                <a:cs typeface="맑은 고딕"/>
+              </a:rPr>
+              <a:t>내려간다</a:t>
+            </a:r>
+          </a:p>
+        </p:txBody>
+      </p:sp>
+      <p:sp>
+        <p:nvSpPr>
+          <p:cNvPr id="11" name="TextBox 10"/>
+          <p:cNvSpPr txBox="1"/>
+          <p:nvPr/>
+        </p:nvSpPr>
+        <p:spPr>
+          <a:xfrm>
+            <a:off x="6150395" y="5721601"/>
+            <a:ext cx="1527329" cy="577342"/>
+          </a:xfrm>
+          <a:prstGeom prst="rect">
+            <a:avLst/>
+          </a:prstGeom>
+          <a:noFill/>
+        </p:spPr>
+        <p:txBody>
+          <a:bodyPr wrap="square" anchor="t"/>
+          <a:lstStyle/>
+          <a:p>
+            <a:pPr algn="ctr">
+              <a:lnSpc>
+                <a:spcPct val="110000"/>
+              </a:lnSpc>
+              <a:spcAft>
+                <a:spcPts val="100"/>
+              </a:spcAft>
+            </a:pPr>
+            <a:r>
+              <a:rPr sz="1600" b="1">
+                <a:solidFill>
+                  <a:srgbClr val="13294B"/>
+                </a:solidFill>
+                <a:latin typeface="맑은 고딕"/>
+                <a:ea typeface="맑은 고딕"/>
+                <a:cs typeface="맑은 고딕"/>
+              </a:rPr>
+              <a:t>생산량</a:t>
+            </a:r>
+          </a:p>
+          <a:p>
+            <a:pPr algn="ctr">
+              <a:lnSpc>
+                <a:spcPct val="110000"/>
+              </a:lnSpc>
+              <a:spcAft>
+                <a:spcPts val="100"/>
+              </a:spcAft>
+            </a:pPr>
+            <a:r>
+              <a:rPr sz="1300" b="0">
+                <a:solidFill>
+                  <a:srgbClr val="556175"/>
+                </a:solidFill>
+                <a:latin typeface="맑은 고딕"/>
+                <a:ea typeface="맑은 고딕"/>
+                <a:cs typeface="맑은 고딕"/>
+              </a:rPr>
+              <a:t>줄어든다</a:t>
+            </a:r>
+          </a:p>
+        </p:txBody>
+      </p:sp>
+      <p:sp>
+        <p:nvSpPr>
+          <p:cNvPr id="12" name="TextBox 11"/>
+          <p:cNvSpPr txBox="1"/>
+          <p:nvPr/>
+        </p:nvSpPr>
+        <p:spPr>
+          <a:xfrm>
+            <a:off x="8506845" y="2601486"/>
+            <a:ext cx="2181899" cy="577342"/>
+          </a:xfrm>
+          <a:prstGeom prst="rect">
+            <a:avLst/>
+          </a:prstGeom>
+          <a:noFill/>
+        </p:spPr>
+        <p:txBody>
+          <a:bodyPr wrap="square" anchor="t"/>
+          <a:lstStyle/>
+          <a:p>
+            <a:pPr algn="ctr">
+              <a:lnSpc>
+                <a:spcPct val="110000"/>
+              </a:lnSpc>
+              <a:spcAft>
+                <a:spcPts val="100"/>
+              </a:spcAft>
+            </a:pPr>
+            <a:r>
+              <a:rPr sz="1600" b="1">
+                <a:solidFill>
+                  <a:srgbClr val="13294B"/>
+                </a:solidFill>
+                <a:latin typeface="맑은 고딕"/>
+                <a:ea typeface="맑은 고딕"/>
+                <a:cs typeface="맑은 고딕"/>
+              </a:rPr>
+              <a:t>전력 사용량</a:t>
+            </a:r>
+          </a:p>
+          <a:p>
+            <a:pPr algn="ctr">
+              <a:lnSpc>
+                <a:spcPct val="110000"/>
+              </a:lnSpc>
+              <a:spcAft>
+                <a:spcPts val="100"/>
+              </a:spcAft>
+            </a:pPr>
+            <a:r>
+              <a:rPr sz="1300" b="0">
+                <a:solidFill>
+                  <a:srgbClr val="556175"/>
+                </a:solidFill>
+                <a:latin typeface="맑은 고딕"/>
+                <a:ea typeface="맑은 고딕"/>
+                <a:cs typeface="맑은 고딕"/>
+              </a:rPr>
+              <a:t>불리하다</a:t>
+            </a:r>
+          </a:p>
+        </p:txBody>
+      </p:sp>
+      <p:sp>
+        <p:nvSpPr>
+          <p:cNvPr id="13" name="TextBox 12"/>
+          <p:cNvSpPr txBox="1"/>
+          <p:nvPr/>
+        </p:nvSpPr>
+        <p:spPr>
+          <a:xfrm>
+            <a:off x="8506845" y="4227728"/>
+            <a:ext cx="2181899" cy="577342"/>
+          </a:xfrm>
+          <a:prstGeom prst="rect">
+            <a:avLst/>
+          </a:prstGeom>
+          <a:noFill/>
+        </p:spPr>
+        <p:txBody>
+          <a:bodyPr wrap="square" anchor="t"/>
+          <a:lstStyle/>
+          <a:p>
+            <a:pPr algn="ctr">
+              <a:lnSpc>
+                <a:spcPct val="110000"/>
+              </a:lnSpc>
+              <a:spcAft>
+                <a:spcPts val="100"/>
+              </a:spcAft>
+            </a:pPr>
+            <a:r>
+              <a:rPr sz="1600" b="1">
+                <a:solidFill>
+                  <a:srgbClr val="1A6FC4"/>
+                </a:solidFill>
+                <a:latin typeface="맑은 고딕"/>
+                <a:ea typeface="맑은 고딕"/>
+                <a:cs typeface="맑은 고딕"/>
+              </a:rPr>
               <a:t>인터록 여유</a:t>
             </a:r>
           </a:p>
           <a:p>
-            <a:pPr algn="l">
+            <a:pPr algn="ctr">
               <a:lnSpc>
                 <a:spcPct val="110000"/>
               </a:lnSpc>
               <a:spcAft>
-                <a:spcPts val="400"/>
+                <a:spcPts val="100"/>
               </a:spcAft>
             </a:pPr>
             <a:r>
-              <a:rPr sz="1400" b="0">
-                <a:solidFill>
-                  <a:srgbClr val="1F2A3A"/>
-                </a:solidFill>
-                <a:latin typeface="맑은 고딕"/>
-                <a:ea typeface="맑은 고딕"/>
-                <a:cs typeface="맑은 고딕"/>
-              </a:rPr>
-              <a:t>유온이 내려가면 늘어난다</a:t>
-            </a:r>
-          </a:p>
-        </p:txBody>
-      </p:sp>
-      <p:sp>
-        <p:nvSpPr>
-          <p:cNvPr id="10" name="Rounded Rectangle 9"/>
-          <p:cNvSpPr/>
-          <p:nvPr/>
-        </p:nvSpPr>
-        <p:spPr>
-          <a:xfrm>
-            <a:off x="777240" y="4824476"/>
-            <a:ext cx="822960" cy="292608"/>
-          </a:xfrm>
-          <a:prstGeom prst="roundRect">
-            <a:avLst>
-              <a:gd name="adj" fmla="val 50000"/>
-            </a:avLst>
-          </a:prstGeom>
-          <a:solidFill>
-            <a:srgbClr val="D3D9E1"/>
-          </a:solidFill>
-          <a:ln>
-            <a:noFill/>
-          </a:ln>
-        </p:spPr>
-        <p:txBody>
-          <a:bodyPr rtlCol="0" anchor="ctr"/>
-          <a:lstStyle/>
-          <a:p>
-            <a:pPr algn="ctr"/>
-          </a:p>
-        </p:txBody>
-      </p:sp>
-      <p:sp>
-        <p:nvSpPr>
-          <p:cNvPr id="11" name="TextBox 10"/>
-          <p:cNvSpPr txBox="1"/>
-          <p:nvPr/>
-        </p:nvSpPr>
-        <p:spPr>
-          <a:xfrm>
-            <a:off x="777240" y="4824476"/>
-            <a:ext cx="822960" cy="292608"/>
-          </a:xfrm>
-          <a:prstGeom prst="rect">
-            <a:avLst/>
-          </a:prstGeom>
-          <a:noFill/>
-        </p:spPr>
-        <p:txBody>
-          <a:bodyPr wrap="square" anchor="ctr"/>
+              <a:rPr sz="1300" b="0">
+                <a:solidFill>
+                  <a:srgbClr val="556175"/>
+                </a:solidFill>
+                <a:latin typeface="맑은 고딕"/>
+                <a:ea typeface="맑은 고딕"/>
+                <a:cs typeface="맑은 고딕"/>
+              </a:rPr>
+              <a:t>이롭다</a:t>
+            </a:r>
+          </a:p>
+        </p:txBody>
+      </p:sp>
+      <p:sp>
+        <p:nvSpPr>
+          <p:cNvPr id="14" name="TextBox 13"/>
+          <p:cNvSpPr txBox="1"/>
+          <p:nvPr/>
+        </p:nvSpPr>
+        <p:spPr>
+          <a:xfrm>
+            <a:off x="8506845" y="5721601"/>
+            <a:ext cx="2181899" cy="577342"/>
+          </a:xfrm>
+          <a:prstGeom prst="rect">
+            <a:avLst/>
+          </a:prstGeom>
+          <a:noFill/>
+        </p:spPr>
+        <p:txBody>
+          <a:bodyPr wrap="square" anchor="t"/>
           <a:lstStyle/>
           <a:p>
             <a:pPr algn="ctr">
               <a:lnSpc>
                 <a:spcPct val="110000"/>
               </a:lnSpc>
-            </a:pPr>
-            <a:r>
-              <a:rPr sz="1200" b="1">
+              <a:spcAft>
+                <a:spcPts val="100"/>
+              </a:spcAft>
+            </a:pPr>
+            <a:r>
+              <a:rPr sz="1600" b="1">
                 <a:solidFill>
                   <a:srgbClr val="13294B"/>
                 </a:solidFill>
@@ -26454,97 +27049,32 @@
                 <a:ea typeface="맑은 고딕"/>
                 <a:cs typeface="맑은 고딕"/>
               </a:rPr>
-              <a:t>설비</a:t>
-            </a:r>
-          </a:p>
-        </p:txBody>
-      </p:sp>
-      <p:sp>
-        <p:nvSpPr>
-          <p:cNvPr id="12" name="Rounded Rectangle 11"/>
-          <p:cNvSpPr/>
-          <p:nvPr/>
-        </p:nvSpPr>
-        <p:spPr>
-          <a:xfrm>
-            <a:off x="4338218" y="2728468"/>
-            <a:ext cx="3515258" cy="2525776"/>
-          </a:xfrm>
-          <a:prstGeom prst="roundRect">
-            <a:avLst>
-              <a:gd name="adj" fmla="val 4000"/>
-            </a:avLst>
-          </a:prstGeom>
-          <a:solidFill>
-            <a:srgbClr val="FFFFFF"/>
-          </a:solidFill>
-          <a:ln w="15875">
-            <a:solidFill>
-              <a:srgbClr val="D3D9E1"/>
-            </a:solidFill>
-          </a:ln>
-        </p:spPr>
-        <p:txBody>
-          <a:bodyPr rtlCol="0" anchor="ctr"/>
-          <a:lstStyle/>
-          <a:p>
-            <a:pPr algn="ctr"/>
-          </a:p>
-        </p:txBody>
-      </p:sp>
-      <p:sp>
-        <p:nvSpPr>
-          <p:cNvPr id="13" name="Oval 12"/>
-          <p:cNvSpPr/>
-          <p:nvPr/>
-        </p:nvSpPr>
-        <p:spPr>
-          <a:xfrm>
-            <a:off x="4566818" y="2929636"/>
-            <a:ext cx="731520" cy="731520"/>
-          </a:xfrm>
-          <a:prstGeom prst="ellipse">
-            <a:avLst/>
-          </a:prstGeom>
-          <a:solidFill>
-            <a:srgbClr val="E7F3FD"/>
-          </a:solidFill>
-          <a:ln>
-            <a:noFill/>
-          </a:ln>
-        </p:spPr>
-        <p:txBody>
-          <a:bodyPr rtlCol="0" anchor="ctr"/>
-          <a:lstStyle/>
-          <a:p>
-            <a:pPr algn="ctr"/>
-          </a:p>
-        </p:txBody>
-      </p:sp>
-      <p:pic>
-        <p:nvPicPr>
-          <p:cNvPr id="14" name="아이콘:bolt" descr="bolt_13294B_1.6.png"/>
-          <p:cNvPicPr>
-            <a:picLocks noChangeAspect="1"/>
-          </p:cNvPicPr>
-          <p:nvPr/>
-        </p:nvPicPr>
-        <p:blipFill>
-          <a:blip r:embed="rId4"/>
-          <a:stretch>
-            <a:fillRect/>
-          </a:stretch>
-        </p:blipFill>
-        <p:spPr>
-          <a:xfrm>
-            <a:off x="4720437" y="3083255"/>
-            <a:ext cx="424281" cy="424281"/>
-          </a:xfrm>
-          <a:prstGeom prst="rect">
-            <a:avLst/>
-          </a:prstGeom>
-        </p:spPr>
-      </p:pic>
+              <a:t>납기 준수율</a:t>
+            </a:r>
+          </a:p>
+          <a:p>
+            <a:pPr algn="ctr">
+              <a:lnSpc>
+                <a:spcPct val="110000"/>
+              </a:lnSpc>
+              <a:spcAft>
+                <a:spcPts val="100"/>
+              </a:spcAft>
+            </a:pPr>
+            <a:r>
+              <a:rPr sz="1300" b="0">
+                <a:solidFill>
+                  <a:srgbClr val="556175"/>
+                </a:solidFill>
+                <a:latin typeface="맑은 고딕"/>
+                <a:ea typeface="맑은 고딕"/>
+                <a:cs typeface="맑은 고딕"/>
+              </a:rPr>
+              <a:t>불리하다</a:t>
+            </a:r>
+          </a:p>
+        </p:txBody>
+      </p:sp>
       <p:sp>
         <p:nvSpPr>
           <p:cNvPr id="15" name="TextBox 14"/>
@@ -26553,8 +27083,8 @@
         </p:nvSpPr>
         <p:spPr>
           <a:xfrm>
-            <a:off x="4502810" y="3752596"/>
-            <a:ext cx="3186074" cy="998728"/>
+            <a:off x="10241455" y="1958553"/>
+            <a:ext cx="1309139" cy="778764"/>
           </a:xfrm>
           <a:prstGeom prst="rect">
             <a:avLst/>
@@ -26565,16 +27095,16 @@
           <a:bodyPr wrap="square" anchor="t"/>
           <a:lstStyle/>
           <a:p>
-            <a:pPr algn="l">
+            <a:pPr algn="ctr">
               <a:lnSpc>
                 <a:spcPct val="110000"/>
               </a:lnSpc>
               <a:spcAft>
-                <a:spcPts val="400"/>
+                <a:spcPts val="100"/>
               </a:spcAft>
             </a:pPr>
             <a:r>
-              <a:rPr sz="1800" b="1">
+              <a:rPr sz="1600" b="1">
                 <a:solidFill>
                   <a:srgbClr val="13294B"/>
                 </a:solidFill>
@@ -26582,60 +27112,92 @@
                 <a:ea typeface="맑은 고딕"/>
                 <a:cs typeface="맑은 고딕"/>
               </a:rPr>
-              <a:t>전력 사용량</a:t>
-            </a:r>
-          </a:p>
-          <a:p>
-            <a:pPr algn="l">
+              <a:t>에너지 효율</a:t>
+            </a:r>
+          </a:p>
+          <a:p>
+            <a:pPr algn="ctr">
               <a:lnSpc>
                 <a:spcPct val="110000"/>
               </a:lnSpc>
               <a:spcAft>
-                <a:spcPts val="400"/>
+                <a:spcPts val="100"/>
               </a:spcAft>
             </a:pPr>
             <a:r>
-              <a:rPr sz="1400" b="0">
-                <a:solidFill>
-                  <a:srgbClr val="1F2A3A"/>
-                </a:solidFill>
-                <a:latin typeface="맑은 고딕"/>
-                <a:ea typeface="맑은 고딕"/>
-                <a:cs typeface="맑은 고딕"/>
-              </a:rPr>
-              <a:t>팬 속도를 올리면 늘어난다</a:t>
-            </a:r>
-          </a:p>
-        </p:txBody>
-      </p:sp>
-      <p:sp>
-        <p:nvSpPr>
-          <p:cNvPr id="16" name="Rounded Rectangle 15"/>
-          <p:cNvSpPr/>
-          <p:nvPr/>
-        </p:nvSpPr>
-        <p:spPr>
-          <a:xfrm>
-            <a:off x="4566818" y="4824476"/>
-            <a:ext cx="822960" cy="292608"/>
-          </a:xfrm>
-          <a:prstGeom prst="roundRect">
-            <a:avLst>
-              <a:gd name="adj" fmla="val 50000"/>
-            </a:avLst>
-          </a:prstGeom>
-          <a:solidFill>
-            <a:srgbClr val="D3D9E1"/>
-          </a:solidFill>
-          <a:ln>
-            <a:noFill/>
-          </a:ln>
-        </p:spPr>
-        <p:txBody>
-          <a:bodyPr rtlCol="0" anchor="ctr"/>
-          <a:lstStyle/>
-          <a:p>
-            <a:pPr algn="ctr"/>
+              <a:rPr sz="1300" b="0">
+                <a:solidFill>
+                  <a:srgbClr val="556175"/>
+                </a:solidFill>
+                <a:latin typeface="맑은 고딕"/>
+                <a:ea typeface="맑은 고딕"/>
+                <a:cs typeface="맑은 고딕"/>
+              </a:rPr>
+              <a:t>내부 프로세스 관점</a:t>
+            </a:r>
+          </a:p>
+        </p:txBody>
+      </p:sp>
+      <p:sp>
+        <p:nvSpPr>
+          <p:cNvPr id="16" name="TextBox 15"/>
+          <p:cNvSpPr txBox="1"/>
+          <p:nvPr/>
+        </p:nvSpPr>
+        <p:spPr>
+          <a:xfrm>
+            <a:off x="10241455" y="3684071"/>
+            <a:ext cx="1309139" cy="778764"/>
+          </a:xfrm>
+          <a:prstGeom prst="rect">
+            <a:avLst/>
+          </a:prstGeom>
+          <a:noFill/>
+        </p:spPr>
+        <p:txBody>
+          <a:bodyPr wrap="square" anchor="t"/>
+          <a:lstStyle/>
+          <a:p>
+            <a:pPr algn="ctr">
+              <a:lnSpc>
+                <a:spcPct val="110000"/>
+              </a:lnSpc>
+              <a:spcAft>
+                <a:spcPts val="100"/>
+              </a:spcAft>
+            </a:pPr>
+            <a:r>
+              <a:rPr sz="1600" b="1">
+                <a:solidFill>
+                  <a:srgbClr val="13294B"/>
+                </a:solidFill>
+                <a:latin typeface="맑은 고딕"/>
+                <a:ea typeface="맑은 고딕"/>
+                <a:cs typeface="맑은 고딕"/>
+              </a:rPr>
+              <a:t>무재해 운전</a:t>
+            </a:r>
+          </a:p>
+          <a:p>
+            <a:pPr algn="ctr">
+              <a:lnSpc>
+                <a:spcPct val="110000"/>
+              </a:lnSpc>
+              <a:spcAft>
+                <a:spcPts val="100"/>
+              </a:spcAft>
+            </a:pPr>
+            <a:r>
+              <a:rPr sz="1300" b="0">
+                <a:solidFill>
+                  <a:srgbClr val="556175"/>
+                </a:solidFill>
+                <a:latin typeface="맑은 고딕"/>
+                <a:ea typeface="맑은 고딕"/>
+                <a:cs typeface="맑은 고딕"/>
+              </a:rPr>
+              <a:t>내부 프로세스 관점</a:t>
+            </a:r>
           </a:p>
         </p:txBody>
       </p:sp>
@@ -26647,25 +27209,28 @@
         </p:nvSpPr>
         <p:spPr>
           <a:xfrm>
-            <a:off x="4566818" y="4824476"/>
-            <a:ext cx="822960" cy="292608"/>
-          </a:xfrm>
-          <a:prstGeom prst="rect">
-            <a:avLst/>
-          </a:prstGeom>
-          <a:noFill/>
-        </p:spPr>
-        <p:txBody>
-          <a:bodyPr wrap="square" anchor="ctr"/>
+            <a:off x="10241455" y="5244129"/>
+            <a:ext cx="1309139" cy="577342"/>
+          </a:xfrm>
+          <a:prstGeom prst="rect">
+            <a:avLst/>
+          </a:prstGeom>
+          <a:noFill/>
+        </p:spPr>
+        <p:txBody>
+          <a:bodyPr wrap="square" anchor="t"/>
           <a:lstStyle/>
           <a:p>
             <a:pPr algn="ctr">
               <a:lnSpc>
                 <a:spcPct val="110000"/>
               </a:lnSpc>
-            </a:pPr>
-            <a:r>
-              <a:rPr sz="1200" b="1">
+              <a:spcAft>
+                <a:spcPts val="100"/>
+              </a:spcAft>
+            </a:pPr>
+            <a:r>
+              <a:rPr sz="1600" b="1">
                 <a:solidFill>
                   <a:srgbClr val="13294B"/>
                 </a:solidFill>
@@ -26673,226 +27238,28 @@
                 <a:ea typeface="맑은 고딕"/>
                 <a:cs typeface="맑은 고딕"/>
               </a:rPr>
-              <a:t>비용</a:t>
-            </a:r>
-          </a:p>
-        </p:txBody>
-      </p:sp>
-      <p:sp>
-        <p:nvSpPr>
-          <p:cNvPr id="18" name="Rounded Rectangle 17"/>
-          <p:cNvSpPr/>
-          <p:nvPr/>
-        </p:nvSpPr>
-        <p:spPr>
-          <a:xfrm>
-            <a:off x="8127796" y="2728468"/>
-            <a:ext cx="3515258" cy="2525776"/>
-          </a:xfrm>
-          <a:prstGeom prst="roundRect">
-            <a:avLst>
-              <a:gd name="adj" fmla="val 4000"/>
-            </a:avLst>
-          </a:prstGeom>
-          <a:solidFill>
-            <a:srgbClr val="FFFFFF"/>
-          </a:solidFill>
-          <a:ln w="28575">
-            <a:solidFill>
-              <a:srgbClr val="5CB8F2"/>
-            </a:solidFill>
-          </a:ln>
-        </p:spPr>
-        <p:txBody>
-          <a:bodyPr rtlCol="0" anchor="ctr"/>
-          <a:lstStyle/>
-          <a:p>
-            <a:pPr algn="ctr"/>
-          </a:p>
-        </p:txBody>
-      </p:sp>
-      <p:sp>
-        <p:nvSpPr>
-          <p:cNvPr id="19" name="Oval 18"/>
-          <p:cNvSpPr/>
-          <p:nvPr/>
-        </p:nvSpPr>
-        <p:spPr>
-          <a:xfrm>
-            <a:off x="8356396" y="2929636"/>
-            <a:ext cx="731520" cy="731520"/>
-          </a:xfrm>
-          <a:prstGeom prst="ellipse">
-            <a:avLst/>
-          </a:prstGeom>
-          <a:solidFill>
-            <a:srgbClr val="5CB8F2"/>
-          </a:solidFill>
-          <a:ln>
-            <a:noFill/>
-          </a:ln>
-        </p:spPr>
-        <p:txBody>
-          <a:bodyPr rtlCol="0" anchor="ctr"/>
-          <a:lstStyle/>
-          <a:p>
-            <a:pPr algn="ctr"/>
-          </a:p>
-        </p:txBody>
-      </p:sp>
-      <p:pic>
-        <p:nvPicPr>
-          <p:cNvPr id="20" name="아이콘:calendar-time" descr="calendar-time_13294B_1.6.png"/>
-          <p:cNvPicPr>
-            <a:picLocks noChangeAspect="1"/>
-          </p:cNvPicPr>
-          <p:nvPr/>
-        </p:nvPicPr>
-        <p:blipFill>
-          <a:blip r:embed="rId5"/>
-          <a:stretch>
-            <a:fillRect/>
-          </a:stretch>
-        </p:blipFill>
-        <p:spPr>
-          <a:xfrm>
-            <a:off x="8510016" y="3083255"/>
-            <a:ext cx="424281" cy="424281"/>
-          </a:xfrm>
-          <a:prstGeom prst="rect">
-            <a:avLst/>
-          </a:prstGeom>
-        </p:spPr>
-      </p:pic>
-      <p:sp>
-        <p:nvSpPr>
-          <p:cNvPr id="21" name="TextBox 20"/>
-          <p:cNvSpPr txBox="1"/>
-          <p:nvPr/>
-        </p:nvSpPr>
-        <p:spPr>
-          <a:xfrm>
-            <a:off x="8292388" y="3752596"/>
-            <a:ext cx="3186074" cy="998728"/>
-          </a:xfrm>
-          <a:prstGeom prst="rect">
-            <a:avLst/>
-          </a:prstGeom>
-          <a:noFill/>
-        </p:spPr>
-        <p:txBody>
-          <a:bodyPr wrap="square" anchor="t"/>
-          <a:lstStyle/>
-          <a:p>
-            <a:pPr algn="l">
+              <a:t>납기 신뢰</a:t>
+            </a:r>
+          </a:p>
+          <a:p>
+            <a:pPr algn="ctr">
               <a:lnSpc>
                 <a:spcPct val="110000"/>
               </a:lnSpc>
               <a:spcAft>
-                <a:spcPts val="400"/>
+                <a:spcPts val="100"/>
               </a:spcAft>
             </a:pPr>
             <a:r>
-              <a:rPr sz="1800" b="1">
-                <a:solidFill>
-                  <a:srgbClr val="13294B"/>
-                </a:solidFill>
-                <a:latin typeface="맑은 고딕"/>
-                <a:ea typeface="맑은 고딕"/>
-                <a:cs typeface="맑은 고딕"/>
-              </a:rPr>
-              <a:t>납기 준수율</a:t>
-            </a:r>
-          </a:p>
-          <a:p>
-            <a:pPr algn="l">
-              <a:lnSpc>
-                <a:spcPct val="110000"/>
-              </a:lnSpc>
-              <a:spcAft>
-                <a:spcPts val="400"/>
-              </a:spcAft>
-            </a:pPr>
-            <a:r>
-              <a:rPr sz="1400" b="0">
-                <a:solidFill>
-                  <a:srgbClr val="1F2A3A"/>
-                </a:solidFill>
-                <a:latin typeface="맑은 고딕"/>
-                <a:ea typeface="맑은 고딕"/>
-                <a:cs typeface="맑은 고딕"/>
-              </a:rPr>
-              <a:t>펌프 부하를 내리면 낮아진다</a:t>
-            </a:r>
-          </a:p>
-        </p:txBody>
-      </p:sp>
-      <p:sp>
-        <p:nvSpPr>
-          <p:cNvPr id="22" name="Rounded Rectangle 21"/>
-          <p:cNvSpPr/>
-          <p:nvPr/>
-        </p:nvSpPr>
-        <p:spPr>
-          <a:xfrm>
-            <a:off x="8356396" y="4824476"/>
-            <a:ext cx="822960" cy="292608"/>
-          </a:xfrm>
-          <a:prstGeom prst="roundRect">
-            <a:avLst>
-              <a:gd name="adj" fmla="val 50000"/>
-            </a:avLst>
-          </a:prstGeom>
-          <a:solidFill>
-            <a:srgbClr val="5CB8F2"/>
-          </a:solidFill>
-          <a:ln>
-            <a:noFill/>
-          </a:ln>
-        </p:spPr>
-        <p:txBody>
-          <a:bodyPr rtlCol="0" anchor="ctr"/>
-          <a:lstStyle/>
-          <a:p>
-            <a:pPr algn="ctr"/>
-          </a:p>
-        </p:txBody>
-      </p:sp>
-      <p:sp>
-        <p:nvSpPr>
-          <p:cNvPr id="23" name="TextBox 22"/>
-          <p:cNvSpPr txBox="1"/>
-          <p:nvPr/>
-        </p:nvSpPr>
-        <p:spPr>
-          <a:xfrm>
-            <a:off x="8356396" y="4824476"/>
-            <a:ext cx="822960" cy="292608"/>
-          </a:xfrm>
-          <a:prstGeom prst="rect">
-            <a:avLst/>
-          </a:prstGeom>
-          <a:noFill/>
-        </p:spPr>
-        <p:txBody>
-          <a:bodyPr wrap="square" anchor="ctr"/>
-          <a:lstStyle/>
-          <a:p>
-            <a:pPr algn="ctr">
-              <a:lnSpc>
-                <a:spcPct val="110000"/>
-              </a:lnSpc>
-            </a:pPr>
-            <a:r>
-              <a:rPr sz="1200" b="1">
-                <a:solidFill>
-                  <a:srgbClr val="13294B"/>
-                </a:solidFill>
-                <a:latin typeface="맑은 고딕"/>
-                <a:ea typeface="맑은 고딕"/>
-                <a:cs typeface="맑은 고딕"/>
-              </a:rPr>
-              <a:t>고객</a:t>
+              <a:rPr sz="1300" b="0">
+                <a:solidFill>
+                  <a:srgbClr val="556175"/>
+                </a:solidFill>
+                <a:latin typeface="맑은 고딕"/>
+                <a:ea typeface="맑은 고딕"/>
+                <a:cs typeface="맑은 고딕"/>
+              </a:rPr>
+              <a:t>고객 관점</a:t>
             </a:r>
           </a:p>
         </p:txBody>
@@ -29225,7 +29592,7 @@
       </p:sp>
       <p:pic>
         <p:nvPicPr>
-          <p:cNvPr id="6" name="삽화:경로_3.svg" descr="illust_8188346272300554222_1791715399.png"/>
+          <p:cNvPr id="6" name="삽화:경로_3.svg" descr="illust_9185223296310348004_1791715399.png"/>
           <p:cNvPicPr>
             <a:picLocks noChangeAspect="1"/>
           </p:cNvPicPr>
@@ -30196,37 +30563,30 @@
           </a:p>
         </p:txBody>
       </p:sp>
-      <p:sp>
-        <p:nvSpPr>
-          <p:cNvPr id="6" name="Rounded Rectangle 5"/>
-          <p:cNvSpPr/>
-          <p:nvPr/>
-        </p:nvSpPr>
-        <p:spPr>
-          <a:xfrm>
-            <a:off x="548640" y="2418587"/>
-            <a:ext cx="11094415" cy="347472"/>
-          </a:xfrm>
-          <a:prstGeom prst="roundRect">
-            <a:avLst>
-              <a:gd name="adj" fmla="val 12000"/>
-            </a:avLst>
-          </a:prstGeom>
-          <a:solidFill>
-            <a:srgbClr val="13294B"/>
-          </a:solidFill>
-          <a:ln>
-            <a:noFill/>
-          </a:ln>
-        </p:spPr>
-        <p:txBody>
-          <a:bodyPr rtlCol="0" anchor="ctr"/>
-          <a:lstStyle/>
-          <a:p>
-            <a:pPr algn="ctr"/>
-          </a:p>
-        </p:txBody>
-      </p:sp>
+      <p:pic>
+        <p:nvPicPr>
+          <p:cNvPr id="6" name="삽화:원인후보.svg" descr="illust_1541636311092453762_1791770880.png"/>
+          <p:cNvPicPr>
+            <a:picLocks noChangeAspect="1"/>
+          </p:cNvPicPr>
+          <p:nvPr/>
+        </p:nvPicPr>
+        <p:blipFill>
+          <a:blip r:embed="rId3"/>
+          <a:stretch>
+            <a:fillRect/>
+          </a:stretch>
+        </p:blipFill>
+        <p:spPr>
+          <a:xfrm>
+            <a:off x="641100" y="1627632"/>
+            <a:ext cx="10909495" cy="4727448"/>
+          </a:xfrm>
+          <a:prstGeom prst="rect">
+            <a:avLst/>
+          </a:prstGeom>
+        </p:spPr>
+      </p:pic>
       <p:sp>
         <p:nvSpPr>
           <p:cNvPr id="7" name="TextBox 6"/>
@@ -30235,33 +30595,57 @@
         </p:nvSpPr>
         <p:spPr>
           <a:xfrm>
-            <a:off x="685800" y="2418587"/>
-            <a:ext cx="2514600" cy="347472"/>
-          </a:xfrm>
-          <a:prstGeom prst="rect">
-            <a:avLst/>
-          </a:prstGeom>
-          <a:noFill/>
-        </p:spPr>
-        <p:txBody>
-          <a:bodyPr wrap="square" anchor="ctr"/>
-          <a:lstStyle/>
-          <a:p>
-            <a:pPr algn="l">
-              <a:lnSpc>
-                <a:spcPct val="110000"/>
-              </a:lnSpc>
-            </a:pPr>
-            <a:r>
-              <a:rPr sz="1300" b="1">
-                <a:solidFill>
-                  <a:srgbClr val="FFFFFF"/>
-                </a:solidFill>
-                <a:latin typeface="맑은 고딕"/>
-                <a:ea typeface="맑은 고딕"/>
-                <a:cs typeface="맑은 고딕"/>
-              </a:rPr>
-              <a:t>원인 후보</a:t>
+            <a:off x="586552" y="4747747"/>
+            <a:ext cx="2181899" cy="577342"/>
+          </a:xfrm>
+          <a:prstGeom prst="rect">
+            <a:avLst/>
+          </a:prstGeom>
+          <a:noFill/>
+        </p:spPr>
+        <p:txBody>
+          <a:bodyPr wrap="square" anchor="t"/>
+          <a:lstStyle/>
+          <a:p>
+            <a:pPr algn="ctr">
+              <a:lnSpc>
+                <a:spcPct val="110000"/>
+              </a:lnSpc>
+              <a:spcAft>
+                <a:spcPts val="100"/>
+              </a:spcAft>
+            </a:pPr>
+            <a:r>
+              <a:rPr sz="1600" b="1">
+                <a:solidFill>
+                  <a:srgbClr val="13294B"/>
+                </a:solidFill>
+                <a:latin typeface="맑은 고딕"/>
+                <a:ea typeface="맑은 고딕"/>
+                <a:cs typeface="맑은 고딕"/>
+              </a:rPr>
+              <a:t>유온 상승</a:t>
+            </a:r>
+          </a:p>
+          <a:p>
+            <a:pPr algn="ctr">
+              <a:lnSpc>
+                <a:spcPct val="110000"/>
+              </a:lnSpc>
+              <a:spcAft>
+                <a:spcPts val="100"/>
+              </a:spcAft>
+            </a:pPr>
+            <a:r>
+              <a:rPr sz="1300" b="0">
+                <a:solidFill>
+                  <a:srgbClr val="556175"/>
+                </a:solidFill>
+                <a:latin typeface="맑은 고딕"/>
+                <a:ea typeface="맑은 고딕"/>
+                <a:cs typeface="맑은 고딕"/>
+              </a:rPr>
+              <a:t>경보가 알려 주는 증상</a:t>
             </a:r>
           </a:p>
         </p:txBody>
@@ -30274,33 +30658,57 @@
         </p:nvSpPr>
         <p:spPr>
           <a:xfrm>
-            <a:off x="3200400" y="2418587"/>
-            <a:ext cx="6248095" cy="347472"/>
-          </a:xfrm>
-          <a:prstGeom prst="rect">
-            <a:avLst/>
-          </a:prstGeom>
-          <a:noFill/>
-        </p:spPr>
-        <p:txBody>
-          <a:bodyPr wrap="square" anchor="ctr"/>
-          <a:lstStyle/>
-          <a:p>
-            <a:pPr algn="l">
-              <a:lnSpc>
-                <a:spcPct val="110000"/>
-              </a:lnSpc>
-            </a:pPr>
-            <a:r>
-              <a:rPr sz="1300" b="1">
-                <a:solidFill>
-                  <a:srgbClr val="FFFFFF"/>
-                </a:solidFill>
-                <a:latin typeface="맑은 고딕"/>
-                <a:ea typeface="맑은 고딕"/>
-                <a:cs typeface="맑은 고딕"/>
-              </a:rPr>
-              <a:t>증거 기준(지식)과 읽은 값(원천)</a:t>
+            <a:off x="3777579" y="1698543"/>
+            <a:ext cx="1963709" cy="577342"/>
+          </a:xfrm>
+          <a:prstGeom prst="rect">
+            <a:avLst/>
+          </a:prstGeom>
+          <a:noFill/>
+        </p:spPr>
+        <p:txBody>
+          <a:bodyPr wrap="square" anchor="t"/>
+          <a:lstStyle/>
+          <a:p>
+            <a:pPr algn="ctr">
+              <a:lnSpc>
+                <a:spcPct val="110000"/>
+              </a:lnSpc>
+              <a:spcAft>
+                <a:spcPts val="100"/>
+              </a:spcAft>
+            </a:pPr>
+            <a:r>
+              <a:rPr sz="1600" b="1">
+                <a:solidFill>
+                  <a:srgbClr val="13294B"/>
+                </a:solidFill>
+                <a:latin typeface="맑은 고딕"/>
+                <a:ea typeface="맑은 고딕"/>
+                <a:cs typeface="맑은 고딕"/>
+              </a:rPr>
+              <a:t>냉각 효율 46.2 %</a:t>
+            </a:r>
+          </a:p>
+          <a:p>
+            <a:pPr algn="ctr">
+              <a:lnSpc>
+                <a:spcPct val="110000"/>
+              </a:lnSpc>
+              <a:spcAft>
+                <a:spcPts val="100"/>
+              </a:spcAft>
+            </a:pPr>
+            <a:r>
+              <a:rPr sz="1300" b="0">
+                <a:solidFill>
+                  <a:srgbClr val="556175"/>
+                </a:solidFill>
+                <a:latin typeface="맑은 고딕"/>
+                <a:ea typeface="맑은 고딕"/>
+                <a:cs typeface="맑은 고딕"/>
+              </a:rPr>
+              <a:t>읽은 값</a:t>
             </a:r>
           </a:p>
         </p:txBody>
@@ -30313,65 +30721,121 @@
         </p:nvSpPr>
         <p:spPr>
           <a:xfrm>
-            <a:off x="9448495" y="2418587"/>
-            <a:ext cx="2194560" cy="347472"/>
-          </a:xfrm>
-          <a:prstGeom prst="rect">
-            <a:avLst/>
-          </a:prstGeom>
-          <a:noFill/>
-        </p:spPr>
-        <p:txBody>
-          <a:bodyPr wrap="square" anchor="ctr"/>
-          <a:lstStyle/>
-          <a:p>
-            <a:pPr algn="l">
-              <a:lnSpc>
-                <a:spcPct val="110000"/>
-              </a:lnSpc>
-            </a:pPr>
-            <a:r>
-              <a:rPr sz="1300" b="1">
-                <a:solidFill>
-                  <a:srgbClr val="FFFFFF"/>
-                </a:solidFill>
-                <a:latin typeface="맑은 고딕"/>
-                <a:ea typeface="맑은 고딕"/>
-                <a:cs typeface="맑은 고딕"/>
-              </a:rPr>
-              <a:t>판정</a:t>
-            </a:r>
-          </a:p>
-        </p:txBody>
-      </p:sp>
-      <p:sp>
-        <p:nvSpPr>
-          <p:cNvPr id="10" name="Rounded Rectangle 9"/>
-          <p:cNvSpPr/>
-          <p:nvPr/>
-        </p:nvSpPr>
-        <p:spPr>
-          <a:xfrm>
-            <a:off x="548640" y="2852927"/>
-            <a:ext cx="11094415" cy="850392"/>
-          </a:xfrm>
-          <a:prstGeom prst="roundRect">
-            <a:avLst>
-              <a:gd name="adj" fmla="val 8000"/>
-            </a:avLst>
-          </a:prstGeom>
-          <a:solidFill>
-            <a:srgbClr val="E7F3FD"/>
-          </a:solidFill>
-          <a:ln>
-            <a:noFill/>
-          </a:ln>
-        </p:spPr>
-        <p:txBody>
-          <a:bodyPr rtlCol="0" anchor="ctr"/>
-          <a:lstStyle/>
-          <a:p>
-            <a:pPr algn="ctr"/>
+            <a:off x="3668484" y="3164052"/>
+            <a:ext cx="2181899" cy="577342"/>
+          </a:xfrm>
+          <a:prstGeom prst="rect">
+            <a:avLst/>
+          </a:prstGeom>
+          <a:noFill/>
+        </p:spPr>
+        <p:txBody>
+          <a:bodyPr wrap="square" anchor="t"/>
+          <a:lstStyle/>
+          <a:p>
+            <a:pPr algn="ctr">
+              <a:lnSpc>
+                <a:spcPct val="110000"/>
+              </a:lnSpc>
+              <a:spcAft>
+                <a:spcPts val="100"/>
+              </a:spcAft>
+            </a:pPr>
+            <a:r>
+              <a:rPr sz="1600" b="1">
+                <a:solidFill>
+                  <a:srgbClr val="13294B"/>
+                </a:solidFill>
+                <a:latin typeface="맑은 고딕"/>
+                <a:ea typeface="맑은 고딕"/>
+                <a:cs typeface="맑은 고딕"/>
+              </a:rPr>
+              <a:t>팬 진동 0.575 mm/s</a:t>
+            </a:r>
+          </a:p>
+          <a:p>
+            <a:pPr algn="ctr">
+              <a:lnSpc>
+                <a:spcPct val="110000"/>
+              </a:lnSpc>
+              <a:spcAft>
+                <a:spcPts val="100"/>
+              </a:spcAft>
+            </a:pPr>
+            <a:r>
+              <a:rPr sz="1300" b="0">
+                <a:solidFill>
+                  <a:srgbClr val="556175"/>
+                </a:solidFill>
+                <a:latin typeface="맑은 고딕"/>
+                <a:ea typeface="맑은 고딕"/>
+                <a:cs typeface="맑은 고딕"/>
+              </a:rPr>
+              <a:t>읽은 값</a:t>
+            </a:r>
+          </a:p>
+        </p:txBody>
+      </p:sp>
+      <p:sp>
+        <p:nvSpPr>
+          <p:cNvPr id="10" name="TextBox 9"/>
+          <p:cNvSpPr txBox="1"/>
+          <p:nvPr/>
+        </p:nvSpPr>
+        <p:spPr>
+          <a:xfrm>
+            <a:off x="3777579" y="4639016"/>
+            <a:ext cx="1963709" cy="577342"/>
+          </a:xfrm>
+          <a:prstGeom prst="rect">
+            <a:avLst/>
+          </a:prstGeom>
+          <a:noFill/>
+        </p:spPr>
+        <p:txBody>
+          <a:bodyPr wrap="square" anchor="t"/>
+          <a:lstStyle/>
+          <a:p>
+            <a:pPr algn="ctr">
+              <a:lnSpc>
+                <a:spcPct val="110000"/>
+              </a:lnSpc>
+              <a:spcAft>
+                <a:spcPts val="100"/>
+              </a:spcAft>
+            </a:pPr>
+            <a:r>
+              <a:rPr sz="1600" b="1">
+                <a:solidFill>
+                  <a:srgbClr val="13294B"/>
+                </a:solidFill>
+                <a:latin typeface="맑은 고딕"/>
+                <a:ea typeface="맑은 고딕"/>
+                <a:cs typeface="맑은 고딕"/>
+              </a:rPr>
+              <a:t>캐비닛 온도 28 ℃</a:t>
+            </a:r>
+          </a:p>
+          <a:p>
+            <a:pPr algn="ctr">
+              <a:lnSpc>
+                <a:spcPct val="110000"/>
+              </a:lnSpc>
+              <a:spcAft>
+                <a:spcPts val="100"/>
+              </a:spcAft>
+            </a:pPr>
+            <a:r>
+              <a:rPr sz="1300" b="0">
+                <a:solidFill>
+                  <a:srgbClr val="556175"/>
+                </a:solidFill>
+                <a:latin typeface="맑은 고딕"/>
+                <a:ea typeface="맑은 고딕"/>
+                <a:cs typeface="맑은 고딕"/>
+              </a:rPr>
+              <a:t>읽은 값</a:t>
+            </a:r>
           </a:p>
         </p:txBody>
       </p:sp>
@@ -30383,90 +30847,183 @@
         </p:nvSpPr>
         <p:spPr>
           <a:xfrm>
-            <a:off x="685800" y="2820923"/>
-            <a:ext cx="2514600" cy="914400"/>
-          </a:xfrm>
-          <a:prstGeom prst="rect">
-            <a:avLst/>
-          </a:prstGeom>
-          <a:noFill/>
-        </p:spPr>
-        <p:txBody>
-          <a:bodyPr wrap="square" anchor="ctr"/>
-          <a:lstStyle/>
-          <a:p>
-            <a:pPr algn="l">
-              <a:lnSpc>
-                <a:spcPct val="110000"/>
-              </a:lnSpc>
+            <a:off x="7394077" y="2076739"/>
+            <a:ext cx="4036513" cy="980185"/>
+          </a:xfrm>
+          <a:prstGeom prst="rect">
+            <a:avLst/>
+          </a:prstGeom>
+          <a:noFill/>
+        </p:spPr>
+        <p:txBody>
+          <a:bodyPr wrap="square" anchor="t"/>
+          <a:lstStyle/>
+          <a:p>
+            <a:pPr algn="ctr">
+              <a:lnSpc>
+                <a:spcPct val="110000"/>
+              </a:lnSpc>
+              <a:spcAft>
+                <a:spcPts val="100"/>
+              </a:spcAft>
             </a:pPr>
             <a:r>
               <a:rPr sz="1600" b="1">
                 <a:solidFill>
+                  <a:srgbClr val="1A6FC4"/>
+                </a:solidFill>
+                <a:latin typeface="맑은 고딕"/>
+                <a:ea typeface="맑은 고딕"/>
+                <a:cs typeface="맑은 고딕"/>
+              </a:rPr>
+              <a:t>쿨러 핀 오염</a:t>
+            </a:r>
+          </a:p>
+          <a:p>
+            <a:pPr algn="ctr">
+              <a:lnSpc>
+                <a:spcPct val="110000"/>
+              </a:lnSpc>
+              <a:spcAft>
+                <a:spcPts val="100"/>
+              </a:spcAft>
+            </a:pPr>
+            <a:r>
+              <a:rPr sz="1300" b="0">
+                <a:solidFill>
+                  <a:srgbClr val="556175"/>
+                </a:solidFill>
+                <a:latin typeface="맑은 고딕"/>
+                <a:ea typeface="맑은 고딕"/>
+                <a:cs typeface="맑은 고딕"/>
+              </a:rPr>
+              <a:t>기준: 냉각 효율 평균 70 % 미만,</a:t>
+            </a:r>
+          </a:p>
+          <a:p>
+            <a:pPr algn="ctr">
+              <a:lnSpc>
+                <a:spcPct val="110000"/>
+              </a:lnSpc>
+              <a:spcAft>
+                <a:spcPts val="100"/>
+              </a:spcAft>
+            </a:pPr>
+            <a:r>
+              <a:rPr sz="1300" b="0">
+                <a:solidFill>
+                  <a:srgbClr val="556175"/>
+                </a:solidFill>
+                <a:latin typeface="맑은 고딕"/>
+                <a:ea typeface="맑은 고딕"/>
+                <a:cs typeface="맑은 고딕"/>
+              </a:rPr>
+              <a:t>팬 진동 평균 0.9 mm/s 미만</a:t>
+            </a:r>
+          </a:p>
+          <a:p>
+            <a:pPr algn="ctr">
+              <a:lnSpc>
+                <a:spcPct val="110000"/>
+              </a:lnSpc>
+              <a:spcAft>
+                <a:spcPts val="100"/>
+              </a:spcAft>
+            </a:pPr>
+            <a:r>
+              <a:rPr sz="1300" b="0">
+                <a:solidFill>
+                  <a:srgbClr val="556175"/>
+                </a:solidFill>
+                <a:latin typeface="맑은 고딕"/>
+                <a:ea typeface="맑은 고딕"/>
+                <a:cs typeface="맑은 고딕"/>
+              </a:rPr>
+              <a:t>판정: 맞음</a:t>
+            </a:r>
+          </a:p>
+        </p:txBody>
+      </p:sp>
+      <p:sp>
+        <p:nvSpPr>
+          <p:cNvPr id="12" name="TextBox 11"/>
+          <p:cNvSpPr txBox="1"/>
+          <p:nvPr/>
+        </p:nvSpPr>
+        <p:spPr>
+          <a:xfrm>
+            <a:off x="7394077" y="3627342"/>
+            <a:ext cx="4036513" cy="778764"/>
+          </a:xfrm>
+          <a:prstGeom prst="rect">
+            <a:avLst/>
+          </a:prstGeom>
+          <a:noFill/>
+        </p:spPr>
+        <p:txBody>
+          <a:bodyPr wrap="square" anchor="t"/>
+          <a:lstStyle/>
+          <a:p>
+            <a:pPr algn="ctr">
+              <a:lnSpc>
+                <a:spcPct val="110000"/>
+              </a:lnSpc>
+              <a:spcAft>
+                <a:spcPts val="100"/>
+              </a:spcAft>
+            </a:pPr>
+            <a:r>
+              <a:rPr sz="1600" b="1">
+                <a:solidFill>
                   <a:srgbClr val="13294B"/>
                 </a:solidFill>
                 <a:latin typeface="맑은 고딕"/>
                 <a:ea typeface="맑은 고딕"/>
                 <a:cs typeface="맑은 고딕"/>
               </a:rPr>
-              <a:t>쿨러 핀 오염</a:t>
-            </a:r>
-          </a:p>
-        </p:txBody>
-      </p:sp>
-      <p:sp>
-        <p:nvSpPr>
-          <p:cNvPr id="12" name="TextBox 11"/>
-          <p:cNvSpPr txBox="1"/>
-          <p:nvPr/>
-        </p:nvSpPr>
-        <p:spPr>
-          <a:xfrm>
-            <a:off x="3200400" y="2820923"/>
-            <a:ext cx="6156655" cy="914400"/>
-          </a:xfrm>
-          <a:prstGeom prst="rect">
-            <a:avLst/>
-          </a:prstGeom>
-          <a:noFill/>
-        </p:spPr>
-        <p:txBody>
-          <a:bodyPr wrap="square" anchor="ctr"/>
-          <a:lstStyle/>
-          <a:p>
-            <a:pPr algn="l">
-              <a:lnSpc>
-                <a:spcPct val="110000"/>
-              </a:lnSpc>
-            </a:pPr>
-            <a:r>
-              <a:rPr sz="1400" b="0">
-                <a:solidFill>
-                  <a:srgbClr val="1F2A3A"/>
-                </a:solidFill>
-                <a:latin typeface="맑은 고딕"/>
-                <a:ea typeface="맑은 고딕"/>
-                <a:cs typeface="맑은 고딕"/>
-              </a:rPr>
-              <a:t>기준: 냉각 효율 평균 70 % 미만이고 팬 진동 평균 0.9 mm/s 미만</a:t>
-            </a:r>
-          </a:p>
-          <a:p>
-            <a:pPr algn="l">
-              <a:lnSpc>
-                <a:spcPct val="110000"/>
-              </a:lnSpc>
-            </a:pPr>
-            <a:r>
-              <a:rPr sz="1400" b="0">
-                <a:solidFill>
-                  <a:srgbClr val="1F2A3A"/>
-                </a:solidFill>
-                <a:latin typeface="맑은 고딕"/>
-                <a:ea typeface="맑은 고딕"/>
-                <a:cs typeface="맑은 고딕"/>
-              </a:rPr>
-              <a:t>읽은 값: 냉각 효율 46.2 %, 팬 진동 0.575 mm/s</a:t>
+              <a:t>팬 구동 불량</a:t>
+            </a:r>
+          </a:p>
+          <a:p>
+            <a:pPr algn="ctr">
+              <a:lnSpc>
+                <a:spcPct val="110000"/>
+              </a:lnSpc>
+              <a:spcAft>
+                <a:spcPts val="100"/>
+              </a:spcAft>
+            </a:pPr>
+            <a:r>
+              <a:rPr sz="1300" b="0">
+                <a:solidFill>
+                  <a:srgbClr val="556175"/>
+                </a:solidFill>
+                <a:latin typeface="맑은 고딕"/>
+                <a:ea typeface="맑은 고딕"/>
+                <a:cs typeface="맑은 고딕"/>
+              </a:rPr>
+              <a:t>기준: 팬 진동 평균 0.9 mm/s 이상</a:t>
+            </a:r>
+          </a:p>
+          <a:p>
+            <a:pPr algn="ctr">
+              <a:lnSpc>
+                <a:spcPct val="110000"/>
+              </a:lnSpc>
+              <a:spcAft>
+                <a:spcPts val="100"/>
+              </a:spcAft>
+            </a:pPr>
+            <a:r>
+              <a:rPr sz="1300" b="0">
+                <a:solidFill>
+                  <a:srgbClr val="556175"/>
+                </a:solidFill>
+                <a:latin typeface="맑은 고딕"/>
+                <a:ea typeface="맑은 고딕"/>
+                <a:cs typeface="맑은 고딕"/>
+              </a:rPr>
+              <a:t>판정: 아님</a:t>
             </a:r>
           </a:p>
         </p:txBody>
@@ -30479,92 +31036,25 @@
         </p:nvSpPr>
         <p:spPr>
           <a:xfrm>
-            <a:off x="9448495" y="2820923"/>
-            <a:ext cx="2103120" cy="914400"/>
-          </a:xfrm>
-          <a:prstGeom prst="rect">
-            <a:avLst/>
-          </a:prstGeom>
-          <a:noFill/>
-        </p:spPr>
-        <p:txBody>
-          <a:bodyPr wrap="square" anchor="ctr"/>
-          <a:lstStyle/>
-          <a:p>
-            <a:pPr algn="l">
-              <a:lnSpc>
-                <a:spcPct val="110000"/>
-              </a:lnSpc>
-            </a:pPr>
-            <a:r>
-              <a:rPr sz="1250" b="1">
-                <a:solidFill>
-                  <a:srgbClr val="1A6FC4"/>
-                </a:solidFill>
-                <a:latin typeface="맑은 고딕"/>
-                <a:ea typeface="맑은 고딕"/>
-                <a:cs typeface="맑은 고딕"/>
-              </a:rPr>
-              <a:t>맞음</a:t>
-            </a:r>
-          </a:p>
-        </p:txBody>
-      </p:sp>
-      <p:sp>
-        <p:nvSpPr>
-          <p:cNvPr id="14" name="Rounded Rectangle 13"/>
-          <p:cNvSpPr/>
-          <p:nvPr/>
-        </p:nvSpPr>
-        <p:spPr>
-          <a:xfrm>
-            <a:off x="548640" y="3767327"/>
-            <a:ext cx="11094415" cy="850392"/>
-          </a:xfrm>
-          <a:prstGeom prst="roundRect">
-            <a:avLst>
-              <a:gd name="adj" fmla="val 8000"/>
-            </a:avLst>
-          </a:prstGeom>
-          <a:solidFill>
-            <a:srgbClr val="F3F6F9"/>
-          </a:solidFill>
-          <a:ln>
-            <a:noFill/>
-          </a:ln>
-        </p:spPr>
-        <p:txBody>
-          <a:bodyPr rtlCol="0" anchor="ctr"/>
-          <a:lstStyle/>
-          <a:p>
-            <a:pPr algn="ctr"/>
-          </a:p>
-        </p:txBody>
-      </p:sp>
-      <p:sp>
-        <p:nvSpPr>
-          <p:cNvPr id="15" name="TextBox 14"/>
-          <p:cNvSpPr txBox="1"/>
-          <p:nvPr/>
-        </p:nvSpPr>
-        <p:spPr>
-          <a:xfrm>
-            <a:off x="685800" y="3735323"/>
-            <a:ext cx="2514600" cy="914400"/>
-          </a:xfrm>
-          <a:prstGeom prst="rect">
-            <a:avLst/>
-          </a:prstGeom>
-          <a:noFill/>
-        </p:spPr>
-        <p:txBody>
-          <a:bodyPr wrap="square" anchor="ctr"/>
-          <a:lstStyle/>
-          <a:p>
-            <a:pPr algn="l">
-              <a:lnSpc>
-                <a:spcPct val="110000"/>
-              </a:lnSpc>
+            <a:off x="7394077" y="5102306"/>
+            <a:ext cx="4036513" cy="778764"/>
+          </a:xfrm>
+          <a:prstGeom prst="rect">
+            <a:avLst/>
+          </a:prstGeom>
+          <a:noFill/>
+        </p:spPr>
+        <p:txBody>
+          <a:bodyPr wrap="square" anchor="t"/>
+          <a:lstStyle/>
+          <a:p>
+            <a:pPr algn="ctr">
+              <a:lnSpc>
+                <a:spcPct val="110000"/>
+              </a:lnSpc>
+              <a:spcAft>
+                <a:spcPts val="100"/>
+              </a:spcAft>
             </a:pPr>
             <a:r>
               <a:rPr sz="1600" b="1">
@@ -30575,95 +31065,20 @@
                 <a:ea typeface="맑은 고딕"/>
                 <a:cs typeface="맑은 고딕"/>
               </a:rPr>
-              <a:t>팬 구동 불량</a:t>
-            </a:r>
-          </a:p>
-        </p:txBody>
-      </p:sp>
-      <p:sp>
-        <p:nvSpPr>
-          <p:cNvPr id="16" name="TextBox 15"/>
-          <p:cNvSpPr txBox="1"/>
-          <p:nvPr/>
-        </p:nvSpPr>
-        <p:spPr>
-          <a:xfrm>
-            <a:off x="3200400" y="3735323"/>
-            <a:ext cx="6156655" cy="914400"/>
-          </a:xfrm>
-          <a:prstGeom prst="rect">
-            <a:avLst/>
-          </a:prstGeom>
-          <a:noFill/>
-        </p:spPr>
-        <p:txBody>
-          <a:bodyPr wrap="square" anchor="ctr"/>
-          <a:lstStyle/>
-          <a:p>
-            <a:pPr algn="l">
-              <a:lnSpc>
-                <a:spcPct val="110000"/>
-              </a:lnSpc>
-            </a:pPr>
-            <a:r>
-              <a:rPr sz="1400" b="0">
-                <a:solidFill>
-                  <a:srgbClr val="1F2A3A"/>
-                </a:solidFill>
-                <a:latin typeface="맑은 고딕"/>
-                <a:ea typeface="맑은 고딕"/>
-                <a:cs typeface="맑은 고딕"/>
-              </a:rPr>
-              <a:t>기준: 팬 진동 평균 0.9 mm/s 이상</a:t>
-            </a:r>
-          </a:p>
-          <a:p>
-            <a:pPr algn="l">
-              <a:lnSpc>
-                <a:spcPct val="110000"/>
-              </a:lnSpc>
-            </a:pPr>
-            <a:r>
-              <a:rPr sz="1400" b="0">
-                <a:solidFill>
-                  <a:srgbClr val="1F2A3A"/>
-                </a:solidFill>
-                <a:latin typeface="맑은 고딕"/>
-                <a:ea typeface="맑은 고딕"/>
-                <a:cs typeface="맑은 고딕"/>
-              </a:rPr>
-              <a:t>읽은 값: 팬 진동 0.575 mm/s</a:t>
-            </a:r>
-          </a:p>
-        </p:txBody>
-      </p:sp>
-      <p:sp>
-        <p:nvSpPr>
-          <p:cNvPr id="17" name="TextBox 16"/>
-          <p:cNvSpPr txBox="1"/>
-          <p:nvPr/>
-        </p:nvSpPr>
-        <p:spPr>
-          <a:xfrm>
-            <a:off x="9448495" y="3735323"/>
-            <a:ext cx="2103120" cy="914400"/>
-          </a:xfrm>
-          <a:prstGeom prst="rect">
-            <a:avLst/>
-          </a:prstGeom>
-          <a:noFill/>
-        </p:spPr>
-        <p:txBody>
-          <a:bodyPr wrap="square" anchor="ctr"/>
-          <a:lstStyle/>
-          <a:p>
-            <a:pPr algn="l">
-              <a:lnSpc>
-                <a:spcPct val="110000"/>
-              </a:lnSpc>
-            </a:pPr>
-            <a:r>
-              <a:rPr sz="1250" b="1">
+              <a:t>주변 온도 상승</a:t>
+            </a:r>
+          </a:p>
+          <a:p>
+            <a:pPr algn="ctr">
+              <a:lnSpc>
+                <a:spcPct val="110000"/>
+              </a:lnSpc>
+              <a:spcAft>
+                <a:spcPts val="100"/>
+              </a:spcAft>
+            </a:pPr>
+            <a:r>
+              <a:rPr sz="1300" b="0">
                 <a:solidFill>
                   <a:srgbClr val="556175"/>
                 </a:solidFill>
@@ -30671,66 +31086,59 @@
                 <a:ea typeface="맑은 고딕"/>
                 <a:cs typeface="맑은 고딕"/>
               </a:rPr>
-              <a:t>아님</a:t>
-            </a:r>
-          </a:p>
-        </p:txBody>
-      </p:sp>
-      <p:sp>
-        <p:nvSpPr>
-          <p:cNvPr id="18" name="Rounded Rectangle 17"/>
-          <p:cNvSpPr/>
-          <p:nvPr/>
-        </p:nvSpPr>
-        <p:spPr>
-          <a:xfrm>
-            <a:off x="548640" y="4681727"/>
-            <a:ext cx="11094415" cy="850392"/>
-          </a:xfrm>
-          <a:prstGeom prst="roundRect">
-            <a:avLst>
-              <a:gd name="adj" fmla="val 8000"/>
-            </a:avLst>
-          </a:prstGeom>
-          <a:solidFill>
-            <a:srgbClr val="F3F6F9"/>
-          </a:solidFill>
-          <a:ln>
-            <a:noFill/>
-          </a:ln>
-        </p:spPr>
-        <p:txBody>
-          <a:bodyPr rtlCol="0" anchor="ctr"/>
-          <a:lstStyle/>
-          <a:p>
-            <a:pPr algn="ctr"/>
-          </a:p>
-        </p:txBody>
-      </p:sp>
-      <p:sp>
-        <p:nvSpPr>
-          <p:cNvPr id="19" name="TextBox 18"/>
-          <p:cNvSpPr txBox="1"/>
-          <p:nvPr/>
-        </p:nvSpPr>
-        <p:spPr>
-          <a:xfrm>
-            <a:off x="685800" y="4649723"/>
-            <a:ext cx="2514600" cy="914400"/>
-          </a:xfrm>
-          <a:prstGeom prst="rect">
-            <a:avLst/>
-          </a:prstGeom>
-          <a:noFill/>
-        </p:spPr>
-        <p:txBody>
-          <a:bodyPr wrap="square" anchor="ctr"/>
-          <a:lstStyle/>
-          <a:p>
-            <a:pPr algn="l">
-              <a:lnSpc>
-                <a:spcPct val="110000"/>
-              </a:lnSpc>
+              <a:t>기준: 캐비닛 온도 평균 35 ℃ 이상</a:t>
+            </a:r>
+          </a:p>
+          <a:p>
+            <a:pPr algn="ctr">
+              <a:lnSpc>
+                <a:spcPct val="110000"/>
+              </a:lnSpc>
+              <a:spcAft>
+                <a:spcPts val="100"/>
+              </a:spcAft>
+            </a:pPr>
+            <a:r>
+              <a:rPr sz="1300" b="0">
+                <a:solidFill>
+                  <a:srgbClr val="556175"/>
+                </a:solidFill>
+                <a:latin typeface="맑은 고딕"/>
+                <a:ea typeface="맑은 고딕"/>
+                <a:cs typeface="맑은 고딕"/>
+              </a:rPr>
+              <a:t>판정: 아님</a:t>
+            </a:r>
+          </a:p>
+        </p:txBody>
+      </p:sp>
+      <p:sp>
+        <p:nvSpPr>
+          <p:cNvPr id="14" name="TextBox 13"/>
+          <p:cNvSpPr txBox="1"/>
+          <p:nvPr/>
+        </p:nvSpPr>
+        <p:spPr>
+          <a:xfrm>
+            <a:off x="3450295" y="5835060"/>
+            <a:ext cx="2618278" cy="778764"/>
+          </a:xfrm>
+          <a:prstGeom prst="rect">
+            <a:avLst/>
+          </a:prstGeom>
+          <a:noFill/>
+        </p:spPr>
+        <p:txBody>
+          <a:bodyPr wrap="square" anchor="t"/>
+          <a:lstStyle/>
+          <a:p>
+            <a:pPr algn="ctr">
+              <a:lnSpc>
+                <a:spcPct val="110000"/>
+              </a:lnSpc>
+              <a:spcAft>
+                <a:spcPts val="100"/>
+              </a:spcAft>
             </a:pPr>
             <a:r>
               <a:rPr sz="1600" b="1">
@@ -30741,95 +31149,20 @@
                 <a:ea typeface="맑은 고딕"/>
                 <a:cs typeface="맑은 고딕"/>
               </a:rPr>
-              <a:t>주변 온도 상승</a:t>
-            </a:r>
-          </a:p>
-        </p:txBody>
-      </p:sp>
-      <p:sp>
-        <p:nvSpPr>
-          <p:cNvPr id="20" name="TextBox 19"/>
-          <p:cNvSpPr txBox="1"/>
-          <p:nvPr/>
-        </p:nvSpPr>
-        <p:spPr>
-          <a:xfrm>
-            <a:off x="3200400" y="4649723"/>
-            <a:ext cx="6156655" cy="914400"/>
-          </a:xfrm>
-          <a:prstGeom prst="rect">
-            <a:avLst/>
-          </a:prstGeom>
-          <a:noFill/>
-        </p:spPr>
-        <p:txBody>
-          <a:bodyPr wrap="square" anchor="ctr"/>
-          <a:lstStyle/>
-          <a:p>
-            <a:pPr algn="l">
-              <a:lnSpc>
-                <a:spcPct val="110000"/>
-              </a:lnSpc>
-            </a:pPr>
-            <a:r>
-              <a:rPr sz="1400" b="0">
-                <a:solidFill>
-                  <a:srgbClr val="1F2A3A"/>
-                </a:solidFill>
-                <a:latin typeface="맑은 고딕"/>
-                <a:ea typeface="맑은 고딕"/>
-                <a:cs typeface="맑은 고딕"/>
-              </a:rPr>
-              <a:t>기준: 캐비닛 온도 평균 35 ℃ 이상</a:t>
-            </a:r>
-          </a:p>
-          <a:p>
-            <a:pPr algn="l">
-              <a:lnSpc>
-                <a:spcPct val="110000"/>
-              </a:lnSpc>
-            </a:pPr>
-            <a:r>
-              <a:rPr sz="1400" b="0">
-                <a:solidFill>
-                  <a:srgbClr val="1F2A3A"/>
-                </a:solidFill>
-                <a:latin typeface="맑은 고딕"/>
-                <a:ea typeface="맑은 고딕"/>
-                <a:cs typeface="맑은 고딕"/>
-              </a:rPr>
-              <a:t>읽은 값: 캐비닛 온도 28 ℃</a:t>
-            </a:r>
-          </a:p>
-        </p:txBody>
-      </p:sp>
-      <p:sp>
-        <p:nvSpPr>
-          <p:cNvPr id="21" name="TextBox 20"/>
-          <p:cNvSpPr txBox="1"/>
-          <p:nvPr/>
-        </p:nvSpPr>
-        <p:spPr>
-          <a:xfrm>
-            <a:off x="9448495" y="4649723"/>
-            <a:ext cx="2103120" cy="914400"/>
-          </a:xfrm>
-          <a:prstGeom prst="rect">
-            <a:avLst/>
-          </a:prstGeom>
-          <a:noFill/>
-        </p:spPr>
-        <p:txBody>
-          <a:bodyPr wrap="square" anchor="ctr"/>
-          <a:lstStyle/>
-          <a:p>
-            <a:pPr algn="l">
-              <a:lnSpc>
-                <a:spcPct val="110000"/>
-              </a:lnSpc>
-            </a:pPr>
-            <a:r>
-              <a:rPr sz="1250" b="1">
+              <a:t>값은 원천에 있다</a:t>
+            </a:r>
+          </a:p>
+          <a:p>
+            <a:pPr algn="ctr">
+              <a:lnSpc>
+                <a:spcPct val="110000"/>
+              </a:lnSpc>
+              <a:spcAft>
+                <a:spcPts val="100"/>
+              </a:spcAft>
+            </a:pPr>
+            <a:r>
+              <a:rPr sz="1300" b="0">
                 <a:solidFill>
                   <a:srgbClr val="556175"/>
                 </a:solidFill>
@@ -30837,7 +31170,7 @@
                 <a:ea typeface="맑은 고딕"/>
                 <a:cs typeface="맑은 고딕"/>
               </a:rPr>
-              <a:t>아님</a:t>
+              <a:t>판단하는 순간에 시계열 DB에서 읽는다</a:t>
             </a:r>
           </a:p>
         </p:txBody>
@@ -31014,21 +31347,200 @@
           </a:p>
         </p:txBody>
       </p:sp>
-      <p:sp>
-        <p:nvSpPr>
-          <p:cNvPr id="6" name="Rounded Rectangle 5"/>
+      <p:pic>
+        <p:nvPicPr>
+          <p:cNvPr id="6" name="Picture 5" descr="그래프_조치후보_예측유온.png"/>
+          <p:cNvPicPr>
+            <a:picLocks noChangeAspect="1"/>
+          </p:cNvPicPr>
+          <p:nvPr/>
+        </p:nvPicPr>
+        <p:blipFill>
+          <a:blip r:embed="rId3"/>
+          <a:stretch>
+            <a:fillRect/>
+          </a:stretch>
+        </p:blipFill>
+        <p:spPr>
+          <a:xfrm>
+            <a:off x="548640" y="1682496"/>
+            <a:ext cx="7223760" cy="4572000"/>
+          </a:xfrm>
+          <a:prstGeom prst="rect">
+            <a:avLst/>
+          </a:prstGeom>
+          <a:ln w="12700">
+            <a:solidFill>
+              <a:srgbClr val="D3D9E1"/>
+            </a:solidFill>
+          </a:ln>
+        </p:spPr>
+      </p:pic>
+      <p:sp>
+        <p:nvSpPr>
+          <p:cNvPr id="7" name="Oval 6"/>
           <p:cNvSpPr/>
           <p:nvPr/>
         </p:nvSpPr>
         <p:spPr>
           <a:xfrm>
-            <a:off x="548640" y="1961387"/>
-            <a:ext cx="11094415" cy="347472"/>
-          </a:xfrm>
-          <a:prstGeom prst="roundRect">
-            <a:avLst>
-              <a:gd name="adj" fmla="val 12000"/>
-            </a:avLst>
+            <a:off x="8138160" y="1682496"/>
+            <a:ext cx="347472" cy="347472"/>
+          </a:xfrm>
+          <a:prstGeom prst="ellipse">
+            <a:avLst/>
+          </a:prstGeom>
+          <a:solidFill>
+            <a:srgbClr val="5CB8F2"/>
+          </a:solidFill>
+          <a:ln>
+            <a:noFill/>
+          </a:ln>
+        </p:spPr>
+        <p:txBody>
+          <a:bodyPr rtlCol="0" anchor="ctr"/>
+          <a:lstStyle/>
+          <a:p>
+            <a:pPr algn="ctr"/>
+          </a:p>
+        </p:txBody>
+      </p:sp>
+      <p:sp>
+        <p:nvSpPr>
+          <p:cNvPr id="8" name="TextBox 7"/>
+          <p:cNvSpPr txBox="1"/>
+          <p:nvPr/>
+        </p:nvSpPr>
+        <p:spPr>
+          <a:xfrm>
+            <a:off x="8138160" y="1682496"/>
+            <a:ext cx="347472" cy="347472"/>
+          </a:xfrm>
+          <a:prstGeom prst="rect">
+            <a:avLst/>
+          </a:prstGeom>
+          <a:noFill/>
+        </p:spPr>
+        <p:txBody>
+          <a:bodyPr wrap="square" anchor="ctr"/>
+          <a:lstStyle/>
+          <a:p>
+            <a:pPr algn="ctr">
+              <a:lnSpc>
+                <a:spcPct val="110000"/>
+              </a:lnSpc>
+            </a:pPr>
+            <a:r>
+              <a:rPr sz="1200" b="1">
+                <a:solidFill>
+                  <a:srgbClr val="13294B"/>
+                </a:solidFill>
+                <a:latin typeface="맑은 고딕"/>
+                <a:ea typeface="맑은 고딕"/>
+                <a:cs typeface="맑은 고딕"/>
+              </a:rPr>
+              <a:t>1</a:t>
+            </a:r>
+          </a:p>
+        </p:txBody>
+      </p:sp>
+      <p:sp>
+        <p:nvSpPr>
+          <p:cNvPr id="9" name="TextBox 8"/>
+          <p:cNvSpPr txBox="1"/>
+          <p:nvPr/>
+        </p:nvSpPr>
+        <p:spPr>
+          <a:xfrm>
+            <a:off x="8549640" y="1627632"/>
+            <a:ext cx="3093415" cy="1170432"/>
+          </a:xfrm>
+          <a:prstGeom prst="rect">
+            <a:avLst/>
+          </a:prstGeom>
+          <a:noFill/>
+        </p:spPr>
+        <p:txBody>
+          <a:bodyPr wrap="square" anchor="t"/>
+          <a:lstStyle/>
+          <a:p>
+            <a:pPr algn="l">
+              <a:lnSpc>
+                <a:spcPct val="110000"/>
+              </a:lnSpc>
+              <a:spcAft>
+                <a:spcPts val="400"/>
+              </a:spcAft>
+            </a:pPr>
+            <a:r>
+              <a:rPr sz="1700" b="1">
+                <a:solidFill>
+                  <a:srgbClr val="13294B"/>
+                </a:solidFill>
+                <a:latin typeface="맑은 고딕"/>
+                <a:ea typeface="맑은 고딕"/>
+                <a:cs typeface="맑은 고딕"/>
+              </a:rPr>
+              <a:t>판단 규칙</a:t>
+            </a:r>
+          </a:p>
+          <a:p>
+            <a:pPr algn="l">
+              <a:lnSpc>
+                <a:spcPct val="110000"/>
+              </a:lnSpc>
+              <a:spcAft>
+                <a:spcPts val="400"/>
+              </a:spcAft>
+            </a:pPr>
+            <a:r>
+              <a:rPr sz="1400" b="0">
+                <a:solidFill>
+                  <a:srgbClr val="1F2A3A"/>
+                </a:solidFill>
+                <a:latin typeface="맑은 고딕"/>
+                <a:ea typeface="맑은 고딕"/>
+                <a:cs typeface="맑은 고딕"/>
+              </a:rPr>
+              <a:t>네 후보 모두 제외 규칙을 통과했다.</a:t>
+            </a:r>
+          </a:p>
+          <a:p>
+            <a:pPr algn="l">
+              <a:lnSpc>
+                <a:spcPct val="110000"/>
+              </a:lnSpc>
+              <a:spcAft>
+                <a:spcPts val="400"/>
+              </a:spcAft>
+            </a:pPr>
+            <a:r>
+              <a:rPr sz="1400" b="0">
+                <a:solidFill>
+                  <a:srgbClr val="1F2A3A"/>
+                </a:solidFill>
+                <a:latin typeface="맑은 고딕"/>
+                <a:ea typeface="맑은 고딕"/>
+                <a:cs typeface="맑은 고딕"/>
+              </a:rPr>
+              <a:t>쿨러 핀 세척에는 경고가 붙었다.</a:t>
+            </a:r>
+          </a:p>
+        </p:txBody>
+      </p:sp>
+      <p:sp>
+        <p:nvSpPr>
+          <p:cNvPr id="10" name="Oval 9"/>
+          <p:cNvSpPr/>
+          <p:nvPr/>
+        </p:nvSpPr>
+        <p:spPr>
+          <a:xfrm>
+            <a:off x="8138160" y="2852928"/>
+            <a:ext cx="347472" cy="347472"/>
+          </a:xfrm>
+          <a:prstGeom prst="ellipse">
+            <a:avLst/>
           </a:prstGeom>
           <a:solidFill>
             <a:srgbClr val="13294B"/>
@@ -31047,14 +31559,14 @@
       </p:sp>
       <p:sp>
         <p:nvSpPr>
-          <p:cNvPr id="7" name="TextBox 6"/>
-          <p:cNvSpPr txBox="1"/>
-          <p:nvPr/>
-        </p:nvSpPr>
-        <p:spPr>
-          <a:xfrm>
-            <a:off x="685800" y="1961387"/>
-            <a:ext cx="2514600" cy="347472"/>
+          <p:cNvPr id="11" name="TextBox 10"/>
+          <p:cNvSpPr txBox="1"/>
+          <p:nvPr/>
+        </p:nvSpPr>
+        <p:spPr>
+          <a:xfrm>
+            <a:off x="8138160" y="2852928"/>
+            <a:ext cx="347472" cy="347472"/>
           </a:xfrm>
           <a:prstGeom prst="rect">
             <a:avLst/>
@@ -31065,121 +31577,125 @@
           <a:bodyPr wrap="square" anchor="ctr"/>
           <a:lstStyle/>
           <a:p>
+            <a:pPr algn="ctr">
+              <a:lnSpc>
+                <a:spcPct val="110000"/>
+              </a:lnSpc>
+            </a:pPr>
+            <a:r>
+              <a:rPr sz="1200" b="1">
+                <a:solidFill>
+                  <a:srgbClr val="FFFFFF"/>
+                </a:solidFill>
+                <a:latin typeface="맑은 고딕"/>
+                <a:ea typeface="맑은 고딕"/>
+                <a:cs typeface="맑은 고딕"/>
+              </a:rPr>
+              <a:t>2</a:t>
+            </a:r>
+          </a:p>
+        </p:txBody>
+      </p:sp>
+      <p:sp>
+        <p:nvSpPr>
+          <p:cNvPr id="12" name="TextBox 11"/>
+          <p:cNvSpPr txBox="1"/>
+          <p:nvPr/>
+        </p:nvSpPr>
+        <p:spPr>
+          <a:xfrm>
+            <a:off x="8549640" y="2798064"/>
+            <a:ext cx="3093415" cy="1170432"/>
+          </a:xfrm>
+          <a:prstGeom prst="rect">
+            <a:avLst/>
+          </a:prstGeom>
+          <a:noFill/>
+        </p:spPr>
+        <p:txBody>
+          <a:bodyPr wrap="square" anchor="t"/>
+          <a:lstStyle/>
+          <a:p>
             <a:pPr algn="l">
               <a:lnSpc>
                 <a:spcPct val="110000"/>
               </a:lnSpc>
-            </a:pPr>
-            <a:r>
-              <a:rPr sz="1300" b="1">
-                <a:solidFill>
-                  <a:srgbClr val="FFFFFF"/>
-                </a:solidFill>
-                <a:latin typeface="맑은 고딕"/>
-                <a:ea typeface="맑은 고딕"/>
-                <a:cs typeface="맑은 고딕"/>
-              </a:rPr>
-              <a:t>순위</a:t>
-            </a:r>
-          </a:p>
-        </p:txBody>
-      </p:sp>
-      <p:sp>
-        <p:nvSpPr>
-          <p:cNvPr id="8" name="TextBox 7"/>
-          <p:cNvSpPr txBox="1"/>
-          <p:nvPr/>
-        </p:nvSpPr>
-        <p:spPr>
-          <a:xfrm>
-            <a:off x="3200400" y="1961387"/>
-            <a:ext cx="6248095" cy="347472"/>
-          </a:xfrm>
-          <a:prstGeom prst="rect">
-            <a:avLst/>
-          </a:prstGeom>
-          <a:noFill/>
-        </p:spPr>
-        <p:txBody>
-          <a:bodyPr wrap="square" anchor="ctr"/>
-          <a:lstStyle/>
+              <a:spcAft>
+                <a:spcPts val="400"/>
+              </a:spcAft>
+            </a:pPr>
+            <a:r>
+              <a:rPr sz="1700" b="1">
+                <a:solidFill>
+                  <a:srgbClr val="13294B"/>
+                </a:solidFill>
+                <a:latin typeface="맑은 고딕"/>
+                <a:ea typeface="맑은 고딕"/>
+                <a:cs typeface="맑은 고딕"/>
+              </a:rPr>
+              <a:t>성과 기준</a:t>
+            </a:r>
+          </a:p>
           <a:p>
             <a:pPr algn="l">
               <a:lnSpc>
                 <a:spcPct val="110000"/>
               </a:lnSpc>
-            </a:pPr>
-            <a:r>
-              <a:rPr sz="1300" b="1">
-                <a:solidFill>
-                  <a:srgbClr val="FFFFFF"/>
-                </a:solidFill>
-                <a:latin typeface="맑은 고딕"/>
-                <a:ea typeface="맑은 고딕"/>
-                <a:cs typeface="맑은 고딕"/>
-              </a:rPr>
-              <a:t>조치 방법과 조치 후 예측 유온</a:t>
-            </a:r>
-          </a:p>
-        </p:txBody>
-      </p:sp>
-      <p:sp>
-        <p:nvSpPr>
-          <p:cNvPr id="9" name="TextBox 8"/>
-          <p:cNvSpPr txBox="1"/>
-          <p:nvPr/>
-        </p:nvSpPr>
-        <p:spPr>
-          <a:xfrm>
-            <a:off x="9448495" y="1961387"/>
-            <a:ext cx="2194560" cy="347472"/>
-          </a:xfrm>
-          <a:prstGeom prst="rect">
-            <a:avLst/>
-          </a:prstGeom>
-          <a:noFill/>
-        </p:spPr>
-        <p:txBody>
-          <a:bodyPr wrap="square" anchor="ctr"/>
-          <a:lstStyle/>
+              <a:spcAft>
+                <a:spcPts val="400"/>
+              </a:spcAft>
+            </a:pPr>
+            <a:r>
+              <a:rPr sz="1400" b="0">
+                <a:solidFill>
+                  <a:srgbClr val="1F2A3A"/>
+                </a:solidFill>
+                <a:latin typeface="맑은 고딕"/>
+                <a:ea typeface="맑은 고딕"/>
+                <a:cs typeface="맑은 고딕"/>
+              </a:rPr>
+              <a:t>통과한 후보의 순서를 정했다.</a:t>
+            </a:r>
+          </a:p>
           <a:p>
             <a:pPr algn="l">
               <a:lnSpc>
                 <a:spcPct val="110000"/>
               </a:lnSpc>
-            </a:pPr>
-            <a:r>
-              <a:rPr sz="1300" b="1">
-                <a:solidFill>
-                  <a:srgbClr val="FFFFFF"/>
-                </a:solidFill>
-                <a:latin typeface="맑은 고딕"/>
-                <a:ea typeface="맑은 고딕"/>
-                <a:cs typeface="맑은 고딕"/>
-              </a:rPr>
-              <a:t>판정</a:t>
-            </a:r>
-          </a:p>
-        </p:txBody>
-      </p:sp>
-      <p:sp>
-        <p:nvSpPr>
-          <p:cNvPr id="10" name="Rounded Rectangle 9"/>
+              <a:spcAft>
+                <a:spcPts val="400"/>
+              </a:spcAft>
+            </a:pPr>
+            <a:r>
+              <a:rPr sz="1400" b="0">
+                <a:solidFill>
+                  <a:srgbClr val="1F2A3A"/>
+                </a:solidFill>
+                <a:latin typeface="맑은 고딕"/>
+                <a:ea typeface="맑은 고딕"/>
+                <a:cs typeface="맑은 고딕"/>
+              </a:rPr>
+              <a:t>납기에서 잃는 것을 크게 쳤다.</a:t>
+            </a:r>
+          </a:p>
+        </p:txBody>
+      </p:sp>
+      <p:sp>
+        <p:nvSpPr>
+          <p:cNvPr id="13" name="Oval 12"/>
           <p:cNvSpPr/>
           <p:nvPr/>
         </p:nvSpPr>
         <p:spPr>
           <a:xfrm>
-            <a:off x="548640" y="2395727"/>
-            <a:ext cx="11094415" cy="850392"/>
-          </a:xfrm>
-          <a:prstGeom prst="roundRect">
-            <a:avLst>
-              <a:gd name="adj" fmla="val 8000"/>
-            </a:avLst>
+            <a:off x="8138160" y="4023359"/>
+            <a:ext cx="347472" cy="347472"/>
+          </a:xfrm>
+          <a:prstGeom prst="ellipse">
+            <a:avLst/>
           </a:prstGeom>
           <a:solidFill>
-            <a:srgbClr val="E7F3FD"/>
+            <a:srgbClr val="5CB8F2"/>
           </a:solidFill>
           <a:ln>
             <a:noFill/>
@@ -31195,14 +31711,14 @@
       </p:sp>
       <p:sp>
         <p:nvSpPr>
-          <p:cNvPr id="11" name="TextBox 10"/>
-          <p:cNvSpPr txBox="1"/>
-          <p:nvPr/>
-        </p:nvSpPr>
-        <p:spPr>
-          <a:xfrm>
-            <a:off x="685800" y="2363723"/>
-            <a:ext cx="2514600" cy="914400"/>
+          <p:cNvPr id="14" name="TextBox 13"/>
+          <p:cNvSpPr txBox="1"/>
+          <p:nvPr/>
+        </p:nvSpPr>
+        <p:spPr>
+          <a:xfrm>
+            <a:off x="8138160" y="4023359"/>
+            <a:ext cx="347472" cy="347472"/>
           </a:xfrm>
           <a:prstGeom prst="rect">
             <a:avLst/>
@@ -31213,13 +31729,55 @@
           <a:bodyPr wrap="square" anchor="ctr"/>
           <a:lstStyle/>
           <a:p>
+            <a:pPr algn="ctr">
+              <a:lnSpc>
+                <a:spcPct val="110000"/>
+              </a:lnSpc>
+            </a:pPr>
+            <a:r>
+              <a:rPr sz="1200" b="1">
+                <a:solidFill>
+                  <a:srgbClr val="13294B"/>
+                </a:solidFill>
+                <a:latin typeface="맑은 고딕"/>
+                <a:ea typeface="맑은 고딕"/>
+                <a:cs typeface="맑은 고딕"/>
+              </a:rPr>
+              <a:t>3</a:t>
+            </a:r>
+          </a:p>
+        </p:txBody>
+      </p:sp>
+      <p:sp>
+        <p:nvSpPr>
+          <p:cNvPr id="15" name="TextBox 14"/>
+          <p:cNvSpPr txBox="1"/>
+          <p:nvPr/>
+        </p:nvSpPr>
+        <p:spPr>
+          <a:xfrm>
+            <a:off x="8549640" y="3968496"/>
+            <a:ext cx="3093415" cy="1170432"/>
+          </a:xfrm>
+          <a:prstGeom prst="rect">
+            <a:avLst/>
+          </a:prstGeom>
+          <a:noFill/>
+        </p:spPr>
+        <p:txBody>
+          <a:bodyPr wrap="square" anchor="t"/>
+          <a:lstStyle/>
+          <a:p>
             <a:pPr algn="l">
               <a:lnSpc>
                 <a:spcPct val="110000"/>
               </a:lnSpc>
-            </a:pPr>
-            <a:r>
-              <a:rPr sz="1600" b="1">
+              <a:spcAft>
+                <a:spcPts val="400"/>
+              </a:spcAft>
+            </a:pPr>
+            <a:r>
+              <a:rPr sz="1700" b="1">
                 <a:solidFill>
                   <a:srgbClr val="13294B"/>
                 </a:solidFill>
@@ -31227,35 +31785,17 @@
                 <a:ea typeface="맑은 고딕"/>
                 <a:cs typeface="맑은 고딕"/>
               </a:rPr>
-              <a:t>1순위</a:t>
-            </a:r>
-          </a:p>
-        </p:txBody>
-      </p:sp>
-      <p:sp>
-        <p:nvSpPr>
-          <p:cNvPr id="12" name="TextBox 11"/>
-          <p:cNvSpPr txBox="1"/>
-          <p:nvPr/>
-        </p:nvSpPr>
-        <p:spPr>
-          <a:xfrm>
-            <a:off x="3200400" y="2363723"/>
-            <a:ext cx="6156655" cy="914400"/>
-          </a:xfrm>
-          <a:prstGeom prst="rect">
-            <a:avLst/>
-          </a:prstGeom>
-          <a:noFill/>
-        </p:spPr>
-        <p:txBody>
-          <a:bodyPr wrap="square" anchor="ctr"/>
-          <a:lstStyle/>
+              <a:t>추천</a:t>
+            </a:r>
+          </a:p>
           <a:p>
             <a:pPr algn="l">
               <a:lnSpc>
                 <a:spcPct val="110000"/>
               </a:lnSpc>
+              <a:spcAft>
+                <a:spcPts val="400"/>
+              </a:spcAft>
             </a:pPr>
             <a:r>
               <a:rPr sz="1400" b="0">
@@ -31266,68 +31806,48 @@
                 <a:ea typeface="맑은 고딕"/>
                 <a:cs typeface="맑은 고딕"/>
               </a:rPr>
-              <a:t>팬 최대 운전 · 49.8 ℃</a:t>
-            </a:r>
-          </a:p>
-        </p:txBody>
-      </p:sp>
-      <p:sp>
-        <p:nvSpPr>
-          <p:cNvPr id="13" name="TextBox 12"/>
-          <p:cNvSpPr txBox="1"/>
-          <p:nvPr/>
-        </p:nvSpPr>
-        <p:spPr>
-          <a:xfrm>
-            <a:off x="9448495" y="2363723"/>
-            <a:ext cx="2103120" cy="914400"/>
-          </a:xfrm>
-          <a:prstGeom prst="rect">
-            <a:avLst/>
-          </a:prstGeom>
-          <a:noFill/>
-        </p:spPr>
-        <p:txBody>
-          <a:bodyPr wrap="square" anchor="ctr"/>
-          <a:lstStyle/>
+              <a:t>팬 최대 운전</a:t>
+            </a:r>
+          </a:p>
           <a:p>
             <a:pPr algn="l">
               <a:lnSpc>
                 <a:spcPct val="110000"/>
               </a:lnSpc>
-            </a:pPr>
-            <a:r>
-              <a:rPr sz="1250" b="1">
-                <a:solidFill>
-                  <a:srgbClr val="1A6FC4"/>
-                </a:solidFill>
-                <a:latin typeface="맑은 고딕"/>
-                <a:ea typeface="맑은 고딕"/>
-                <a:cs typeface="맑은 고딕"/>
-              </a:rPr>
-              <a:t>추천</a:t>
-            </a:r>
-          </a:p>
-        </p:txBody>
-      </p:sp>
-      <p:sp>
-        <p:nvSpPr>
-          <p:cNvPr id="14" name="Rounded Rectangle 13"/>
+              <a:spcAft>
+                <a:spcPts val="400"/>
+              </a:spcAft>
+            </a:pPr>
+            <a:r>
+              <a:rPr sz="1400" b="0">
+                <a:solidFill>
+                  <a:srgbClr val="1F2A3A"/>
+                </a:solidFill>
+                <a:latin typeface="맑은 고딕"/>
+                <a:ea typeface="맑은 고딕"/>
+                <a:cs typeface="맑은 고딕"/>
+              </a:rPr>
+              <a:t>예측 유온 49.8 ℃</a:t>
+            </a:r>
+          </a:p>
+        </p:txBody>
+      </p:sp>
+      <p:sp>
+        <p:nvSpPr>
+          <p:cNvPr id="16" name="Oval 15"/>
           <p:cNvSpPr/>
           <p:nvPr/>
         </p:nvSpPr>
         <p:spPr>
           <a:xfrm>
-            <a:off x="548640" y="3310127"/>
-            <a:ext cx="11094415" cy="850392"/>
-          </a:xfrm>
-          <a:prstGeom prst="roundRect">
-            <a:avLst>
-              <a:gd name="adj" fmla="val 8000"/>
-            </a:avLst>
+            <a:off x="8138160" y="5193792"/>
+            <a:ext cx="347472" cy="347472"/>
+          </a:xfrm>
+          <a:prstGeom prst="ellipse">
+            <a:avLst/>
           </a:prstGeom>
           <a:solidFill>
-            <a:srgbClr val="F3F6F9"/>
+            <a:srgbClr val="13294B"/>
           </a:solidFill>
           <a:ln>
             <a:noFill/>
@@ -31343,14 +31863,14 @@
       </p:sp>
       <p:sp>
         <p:nvSpPr>
-          <p:cNvPr id="15" name="TextBox 14"/>
-          <p:cNvSpPr txBox="1"/>
-          <p:nvPr/>
-        </p:nvSpPr>
-        <p:spPr>
-          <a:xfrm>
-            <a:off x="685800" y="3278123"/>
-            <a:ext cx="2514600" cy="914400"/>
+          <p:cNvPr id="17" name="TextBox 16"/>
+          <p:cNvSpPr txBox="1"/>
+          <p:nvPr/>
+        </p:nvSpPr>
+        <p:spPr>
+          <a:xfrm>
+            <a:off x="8138160" y="5193792"/>
+            <a:ext cx="347472" cy="347472"/>
           </a:xfrm>
           <a:prstGeom prst="rect">
             <a:avLst/>
@@ -31361,13 +31881,55 @@
           <a:bodyPr wrap="square" anchor="ctr"/>
           <a:lstStyle/>
           <a:p>
+            <a:pPr algn="ctr">
+              <a:lnSpc>
+                <a:spcPct val="110000"/>
+              </a:lnSpc>
+            </a:pPr>
+            <a:r>
+              <a:rPr sz="1200" b="1">
+                <a:solidFill>
+                  <a:srgbClr val="FFFFFF"/>
+                </a:solidFill>
+                <a:latin typeface="맑은 고딕"/>
+                <a:ea typeface="맑은 고딕"/>
+                <a:cs typeface="맑은 고딕"/>
+              </a:rPr>
+              <a:t>4</a:t>
+            </a:r>
+          </a:p>
+        </p:txBody>
+      </p:sp>
+      <p:sp>
+        <p:nvSpPr>
+          <p:cNvPr id="18" name="TextBox 17"/>
+          <p:cNvSpPr txBox="1"/>
+          <p:nvPr/>
+        </p:nvSpPr>
+        <p:spPr>
+          <a:xfrm>
+            <a:off x="8549640" y="5138928"/>
+            <a:ext cx="3093415" cy="1170432"/>
+          </a:xfrm>
+          <a:prstGeom prst="rect">
+            <a:avLst/>
+          </a:prstGeom>
+          <a:noFill/>
+        </p:spPr>
+        <p:txBody>
+          <a:bodyPr wrap="square" anchor="t"/>
+          <a:lstStyle/>
+          <a:p>
             <a:pPr algn="l">
               <a:lnSpc>
                 <a:spcPct val="110000"/>
               </a:lnSpc>
-            </a:pPr>
-            <a:r>
-              <a:rPr sz="1600" b="1">
+              <a:spcAft>
+                <a:spcPts val="400"/>
+              </a:spcAft>
+            </a:pPr>
+            <a:r>
+              <a:rPr sz="1700" b="1">
                 <a:solidFill>
                   <a:srgbClr val="13294B"/>
                 </a:solidFill>
@@ -31375,35 +31937,17 @@
                 <a:ea typeface="맑은 고딕"/>
                 <a:cs typeface="맑은 고딕"/>
               </a:rPr>
-              <a:t>2순위</a:t>
-            </a:r>
-          </a:p>
-        </p:txBody>
-      </p:sp>
-      <p:sp>
-        <p:nvSpPr>
-          <p:cNvPr id="16" name="TextBox 15"/>
-          <p:cNvSpPr txBox="1"/>
-          <p:nvPr/>
-        </p:nvSpPr>
-        <p:spPr>
-          <a:xfrm>
-            <a:off x="3200400" y="3278123"/>
-            <a:ext cx="6156655" cy="914400"/>
-          </a:xfrm>
-          <a:prstGeom prst="rect">
-            <a:avLst/>
-          </a:prstGeom>
-          <a:noFill/>
-        </p:spPr>
-        <p:txBody>
-          <a:bodyPr wrap="square" anchor="ctr"/>
-          <a:lstStyle/>
+              <a:t>대안</a:t>
+            </a:r>
+          </a:p>
           <a:p>
             <a:pPr algn="l">
               <a:lnSpc>
                 <a:spcPct val="110000"/>
               </a:lnSpc>
+              <a:spcAft>
+                <a:spcPts val="400"/>
+              </a:spcAft>
             </a:pPr>
             <a:r>
               <a:rPr sz="1400" b="0">
@@ -31414,144 +31958,17 @@
                 <a:ea typeface="맑은 고딕"/>
                 <a:cs typeface="맑은 고딕"/>
               </a:rPr>
-              <a:t>부하 70 %와 야간 핀 세척 · 47.7 ℃</a:t>
-            </a:r>
-          </a:p>
-        </p:txBody>
-      </p:sp>
-      <p:sp>
-        <p:nvSpPr>
-          <p:cNvPr id="17" name="TextBox 16"/>
-          <p:cNvSpPr txBox="1"/>
-          <p:nvPr/>
-        </p:nvSpPr>
-        <p:spPr>
-          <a:xfrm>
-            <a:off x="9448495" y="3278123"/>
-            <a:ext cx="2103120" cy="914400"/>
-          </a:xfrm>
-          <a:prstGeom prst="rect">
-            <a:avLst/>
-          </a:prstGeom>
-          <a:noFill/>
-        </p:spPr>
-        <p:txBody>
-          <a:bodyPr wrap="square" anchor="ctr"/>
-          <a:lstStyle/>
+              <a:t>나머지 세 후보는 대안으로</a:t>
+            </a:r>
+          </a:p>
           <a:p>
             <a:pPr algn="l">
               <a:lnSpc>
                 <a:spcPct val="110000"/>
               </a:lnSpc>
-            </a:pPr>
-            <a:r>
-              <a:rPr sz="1250" b="1">
-                <a:solidFill>
-                  <a:srgbClr val="556175"/>
-                </a:solidFill>
-                <a:latin typeface="맑은 고딕"/>
-                <a:ea typeface="맑은 고딕"/>
-                <a:cs typeface="맑은 고딕"/>
-              </a:rPr>
-              <a:t>통과</a:t>
-            </a:r>
-          </a:p>
-        </p:txBody>
-      </p:sp>
-      <p:sp>
-        <p:nvSpPr>
-          <p:cNvPr id="18" name="Rounded Rectangle 17"/>
-          <p:cNvSpPr/>
-          <p:nvPr/>
-        </p:nvSpPr>
-        <p:spPr>
-          <a:xfrm>
-            <a:off x="548640" y="4224527"/>
-            <a:ext cx="11094415" cy="850392"/>
-          </a:xfrm>
-          <a:prstGeom prst="roundRect">
-            <a:avLst>
-              <a:gd name="adj" fmla="val 8000"/>
-            </a:avLst>
-          </a:prstGeom>
-          <a:solidFill>
-            <a:srgbClr val="F3F6F9"/>
-          </a:solidFill>
-          <a:ln>
-            <a:noFill/>
-          </a:ln>
-        </p:spPr>
-        <p:txBody>
-          <a:bodyPr rtlCol="0" anchor="ctr"/>
-          <a:lstStyle/>
-          <a:p>
-            <a:pPr algn="ctr"/>
-          </a:p>
-        </p:txBody>
-      </p:sp>
-      <p:sp>
-        <p:nvSpPr>
-          <p:cNvPr id="19" name="TextBox 18"/>
-          <p:cNvSpPr txBox="1"/>
-          <p:nvPr/>
-        </p:nvSpPr>
-        <p:spPr>
-          <a:xfrm>
-            <a:off x="685800" y="4192523"/>
-            <a:ext cx="2514600" cy="914400"/>
-          </a:xfrm>
-          <a:prstGeom prst="rect">
-            <a:avLst/>
-          </a:prstGeom>
-          <a:noFill/>
-        </p:spPr>
-        <p:txBody>
-          <a:bodyPr wrap="square" anchor="ctr"/>
-          <a:lstStyle/>
-          <a:p>
-            <a:pPr algn="l">
-              <a:lnSpc>
-                <a:spcPct val="110000"/>
-              </a:lnSpc>
-            </a:pPr>
-            <a:r>
-              <a:rPr sz="1600" b="1">
-                <a:solidFill>
-                  <a:srgbClr val="13294B"/>
-                </a:solidFill>
-                <a:latin typeface="맑은 고딕"/>
-                <a:ea typeface="맑은 고딕"/>
-                <a:cs typeface="맑은 고딕"/>
-              </a:rPr>
-              <a:t>3순위</a:t>
-            </a:r>
-          </a:p>
-        </p:txBody>
-      </p:sp>
-      <p:sp>
-        <p:nvSpPr>
-          <p:cNvPr id="20" name="TextBox 19"/>
-          <p:cNvSpPr txBox="1"/>
-          <p:nvPr/>
-        </p:nvSpPr>
-        <p:spPr>
-          <a:xfrm>
-            <a:off x="3200400" y="4192523"/>
-            <a:ext cx="6156655" cy="914400"/>
-          </a:xfrm>
-          <a:prstGeom prst="rect">
-            <a:avLst/>
-          </a:prstGeom>
-          <a:noFill/>
-        </p:spPr>
-        <p:txBody>
-          <a:bodyPr wrap="square" anchor="ctr"/>
-          <a:lstStyle/>
-          <a:p>
-            <a:pPr algn="l">
-              <a:lnSpc>
-                <a:spcPct val="110000"/>
-              </a:lnSpc>
+              <a:spcAft>
+                <a:spcPts val="400"/>
+              </a:spcAft>
             </a:pPr>
             <a:r>
               <a:rPr sz="1400" b="0">
@@ -31562,194 +31979,7 @@
                 <a:ea typeface="맑은 고딕"/>
                 <a:cs typeface="맑은 고딕"/>
               </a:rPr>
-              <a:t>팬 최대 운전과 부하 80 % · 44.6 ℃</a:t>
-            </a:r>
-          </a:p>
-        </p:txBody>
-      </p:sp>
-      <p:sp>
-        <p:nvSpPr>
-          <p:cNvPr id="21" name="TextBox 20"/>
-          <p:cNvSpPr txBox="1"/>
-          <p:nvPr/>
-        </p:nvSpPr>
-        <p:spPr>
-          <a:xfrm>
-            <a:off x="9448495" y="4192523"/>
-            <a:ext cx="2103120" cy="914400"/>
-          </a:xfrm>
-          <a:prstGeom prst="rect">
-            <a:avLst/>
-          </a:prstGeom>
-          <a:noFill/>
-        </p:spPr>
-        <p:txBody>
-          <a:bodyPr wrap="square" anchor="ctr"/>
-          <a:lstStyle/>
-          <a:p>
-            <a:pPr algn="l">
-              <a:lnSpc>
-                <a:spcPct val="110000"/>
-              </a:lnSpc>
-            </a:pPr>
-            <a:r>
-              <a:rPr sz="1250" b="1">
-                <a:solidFill>
-                  <a:srgbClr val="556175"/>
-                </a:solidFill>
-                <a:latin typeface="맑은 고딕"/>
-                <a:ea typeface="맑은 고딕"/>
-                <a:cs typeface="맑은 고딕"/>
-              </a:rPr>
-              <a:t>통과</a:t>
-            </a:r>
-          </a:p>
-        </p:txBody>
-      </p:sp>
-      <p:sp>
-        <p:nvSpPr>
-          <p:cNvPr id="22" name="Rounded Rectangle 21"/>
-          <p:cNvSpPr/>
-          <p:nvPr/>
-        </p:nvSpPr>
-        <p:spPr>
-          <a:xfrm>
-            <a:off x="548640" y="5138927"/>
-            <a:ext cx="11094415" cy="850392"/>
-          </a:xfrm>
-          <a:prstGeom prst="roundRect">
-            <a:avLst>
-              <a:gd name="adj" fmla="val 8000"/>
-            </a:avLst>
-          </a:prstGeom>
-          <a:solidFill>
-            <a:srgbClr val="F3F6F9"/>
-          </a:solidFill>
-          <a:ln>
-            <a:noFill/>
-          </a:ln>
-        </p:spPr>
-        <p:txBody>
-          <a:bodyPr rtlCol="0" anchor="ctr"/>
-          <a:lstStyle/>
-          <a:p>
-            <a:pPr algn="ctr"/>
-          </a:p>
-        </p:txBody>
-      </p:sp>
-      <p:sp>
-        <p:nvSpPr>
-          <p:cNvPr id="23" name="TextBox 22"/>
-          <p:cNvSpPr txBox="1"/>
-          <p:nvPr/>
-        </p:nvSpPr>
-        <p:spPr>
-          <a:xfrm>
-            <a:off x="685800" y="5106923"/>
-            <a:ext cx="2514600" cy="914400"/>
-          </a:xfrm>
-          <a:prstGeom prst="rect">
-            <a:avLst/>
-          </a:prstGeom>
-          <a:noFill/>
-        </p:spPr>
-        <p:txBody>
-          <a:bodyPr wrap="square" anchor="ctr"/>
-          <a:lstStyle/>
-          <a:p>
-            <a:pPr algn="l">
-              <a:lnSpc>
-                <a:spcPct val="110000"/>
-              </a:lnSpc>
-            </a:pPr>
-            <a:r>
-              <a:rPr sz="1600" b="1">
-                <a:solidFill>
-                  <a:srgbClr val="13294B"/>
-                </a:solidFill>
-                <a:latin typeface="맑은 고딕"/>
-                <a:ea typeface="맑은 고딕"/>
-                <a:cs typeface="맑은 고딕"/>
-              </a:rPr>
-              <a:t>4순위</a:t>
-            </a:r>
-          </a:p>
-        </p:txBody>
-      </p:sp>
-      <p:sp>
-        <p:nvSpPr>
-          <p:cNvPr id="24" name="TextBox 23"/>
-          <p:cNvSpPr txBox="1"/>
-          <p:nvPr/>
-        </p:nvSpPr>
-        <p:spPr>
-          <a:xfrm>
-            <a:off x="3200400" y="5106923"/>
-            <a:ext cx="6156655" cy="914400"/>
-          </a:xfrm>
-          <a:prstGeom prst="rect">
-            <a:avLst/>
-          </a:prstGeom>
-          <a:noFill/>
-        </p:spPr>
-        <p:txBody>
-          <a:bodyPr wrap="square" anchor="ctr"/>
-          <a:lstStyle/>
-          <a:p>
-            <a:pPr algn="l">
-              <a:lnSpc>
-                <a:spcPct val="110000"/>
-              </a:lnSpc>
-            </a:pPr>
-            <a:r>
-              <a:rPr sz="1400" b="0">
-                <a:solidFill>
-                  <a:srgbClr val="1F2A3A"/>
-                </a:solidFill>
-                <a:latin typeface="맑은 고딕"/>
-                <a:ea typeface="맑은 고딕"/>
-                <a:cs typeface="맑은 고딕"/>
-              </a:rPr>
-              <a:t>쿨러 핀 세척 · 62.5 ℃</a:t>
-            </a:r>
-          </a:p>
-        </p:txBody>
-      </p:sp>
-      <p:sp>
-        <p:nvSpPr>
-          <p:cNvPr id="25" name="TextBox 24"/>
-          <p:cNvSpPr txBox="1"/>
-          <p:nvPr/>
-        </p:nvSpPr>
-        <p:spPr>
-          <a:xfrm>
-            <a:off x="9448495" y="5106923"/>
-            <a:ext cx="2103120" cy="914400"/>
-          </a:xfrm>
-          <a:prstGeom prst="rect">
-            <a:avLst/>
-          </a:prstGeom>
-          <a:noFill/>
-        </p:spPr>
-        <p:txBody>
-          <a:bodyPr wrap="square" anchor="ctr"/>
-          <a:lstStyle/>
-          <a:p>
-            <a:pPr algn="l">
-              <a:lnSpc>
-                <a:spcPct val="110000"/>
-              </a:lnSpc>
-            </a:pPr>
-            <a:r>
-              <a:rPr sz="1250" b="1">
-                <a:solidFill>
-                  <a:srgbClr val="556175"/>
-                </a:solidFill>
-                <a:latin typeface="맑은 고딕"/>
-                <a:ea typeface="맑은 고딕"/>
-                <a:cs typeface="맑은 고딕"/>
-              </a:rPr>
-              <a:t>경고</a:t>
+              <a:t>추천과 함께 제시되었다.</a:t>
             </a:r>
           </a:p>
         </p:txBody>
@@ -33476,36 +33706,60 @@
           </a:p>
         </p:txBody>
       </p:sp>
-      <p:sp>
-        <p:nvSpPr>
-          <p:cNvPr id="6" name="TextBox 5"/>
-          <p:cNvSpPr txBox="1"/>
-          <p:nvPr/>
-        </p:nvSpPr>
-        <p:spPr>
-          <a:xfrm>
-            <a:off x="640080" y="1933956"/>
-            <a:ext cx="3291839" cy="1371600"/>
-          </a:xfrm>
-          <a:prstGeom prst="rect">
-            <a:avLst/>
-          </a:prstGeom>
-          <a:noFill/>
-        </p:spPr>
-        <p:txBody>
-          <a:bodyPr wrap="square" anchor="ctr"/>
-          <a:lstStyle/>
-          <a:p>
-            <a:pPr algn="l">
+      <p:pic>
+        <p:nvPicPr>
+          <p:cNvPr id="6" name="삽화:세층.svg" descr="illust_2931058874710175031_1791770880.png"/>
+          <p:cNvPicPr>
+            <a:picLocks noChangeAspect="1"/>
+          </p:cNvPicPr>
+          <p:nvPr/>
+        </p:nvPicPr>
+        <p:blipFill>
+          <a:blip r:embed="rId3"/>
+          <a:stretch>
+            <a:fillRect/>
+          </a:stretch>
+        </p:blipFill>
+        <p:spPr>
+          <a:xfrm>
+            <a:off x="641100" y="1627632"/>
+            <a:ext cx="10909495" cy="4727448"/>
+          </a:xfrm>
+          <a:prstGeom prst="rect">
+            <a:avLst/>
+          </a:prstGeom>
+        </p:spPr>
+      </p:pic>
+      <p:sp>
+        <p:nvSpPr>
+          <p:cNvPr id="7" name="TextBox 6"/>
+          <p:cNvSpPr txBox="1"/>
+          <p:nvPr/>
+        </p:nvSpPr>
+        <p:spPr>
+          <a:xfrm>
+            <a:off x="761104" y="1958553"/>
+            <a:ext cx="2072804" cy="678053"/>
+          </a:xfrm>
+          <a:prstGeom prst="rect">
+            <a:avLst/>
+          </a:prstGeom>
+          <a:noFill/>
+        </p:spPr>
+        <p:txBody>
+          <a:bodyPr wrap="square" anchor="t"/>
+          <a:lstStyle/>
+          <a:p>
+            <a:pPr algn="ctr">
               <a:lnSpc>
                 <a:spcPct val="110000"/>
               </a:lnSpc>
               <a:spcAft>
-                <a:spcPts val="200"/>
+                <a:spcPts val="100"/>
               </a:spcAft>
             </a:pPr>
             <a:r>
-              <a:rPr sz="1800" b="1">
+              <a:rPr sz="1350" b="1">
                 <a:solidFill>
                   <a:srgbClr val="13294B"/>
                 </a:solidFill>
@@ -33517,16 +33771,16 @@
             </a:r>
           </a:p>
           <a:p>
-            <a:pPr algn="l">
+            <a:pPr algn="ctr">
               <a:lnSpc>
                 <a:spcPct val="110000"/>
               </a:lnSpc>
               <a:spcAft>
-                <a:spcPts val="200"/>
+                <a:spcPts val="100"/>
               </a:spcAft>
             </a:pPr>
             <a:r>
-              <a:rPr sz="1150" b="0">
+              <a:rPr sz="1100" b="0">
                 <a:solidFill>
                   <a:srgbClr val="556175"/>
                 </a:solidFill>
@@ -33537,97 +33791,110 @@
               <a:t>지식의 구조</a:t>
             </a:r>
           </a:p>
-        </p:txBody>
-      </p:sp>
-      <p:sp>
-        <p:nvSpPr>
-          <p:cNvPr id="7" name="TextBox 6"/>
-          <p:cNvSpPr txBox="1"/>
-          <p:nvPr/>
-        </p:nvSpPr>
-        <p:spPr>
-          <a:xfrm>
-            <a:off x="4023359" y="1933956"/>
-            <a:ext cx="7528255" cy="1371600"/>
-          </a:xfrm>
-          <a:prstGeom prst="rect">
-            <a:avLst/>
-          </a:prstGeom>
-          <a:noFill/>
-        </p:spPr>
-        <p:txBody>
-          <a:bodyPr wrap="square" anchor="ctr"/>
-          <a:lstStyle/>
-          <a:p>
-            <a:pPr algn="l">
+          <a:p>
+            <a:pPr algn="ctr">
               <a:lnSpc>
                 <a:spcPct val="110000"/>
               </a:lnSpc>
               <a:spcAft>
-                <a:spcPts val="300"/>
+                <a:spcPts val="100"/>
               </a:spcAft>
             </a:pPr>
             <a:r>
-              <a:rPr sz="1400" b="0">
-                <a:solidFill>
-                  <a:srgbClr val="1F2A3A"/>
-                </a:solidFill>
-                <a:latin typeface="맑은 고딕"/>
-                <a:ea typeface="맑은 고딕"/>
-                <a:cs typeface="맑은 고딕"/>
-              </a:rPr>
-              <a:t>예: 원인은 고장 유형을 CAUSES로 가리킨다.</a:t>
-            </a:r>
-          </a:p>
-          <a:p>
-            <a:pPr algn="l">
+              <a:rPr sz="1100" b="0">
+                <a:solidFill>
+                  <a:srgbClr val="556175"/>
+                </a:solidFill>
+                <a:latin typeface="맑은 고딕"/>
+                <a:ea typeface="맑은 고딕"/>
+                <a:cs typeface="맑은 고딕"/>
+              </a:rPr>
+              <a:t>설계를 고칠 때만 바뀐다</a:t>
+            </a:r>
+          </a:p>
+        </p:txBody>
+      </p:sp>
+      <p:sp>
+        <p:nvSpPr>
+          <p:cNvPr id="8" name="TextBox 7"/>
+          <p:cNvSpPr txBox="1"/>
+          <p:nvPr/>
+        </p:nvSpPr>
+        <p:spPr>
+          <a:xfrm>
+            <a:off x="761104" y="3424062"/>
+            <a:ext cx="2072804" cy="678053"/>
+          </a:xfrm>
+          <a:prstGeom prst="rect">
+            <a:avLst/>
+          </a:prstGeom>
+          <a:noFill/>
+        </p:spPr>
+        <p:txBody>
+          <a:bodyPr wrap="square" anchor="t"/>
+          <a:lstStyle/>
+          <a:p>
+            <a:pPr algn="ctr">
               <a:lnSpc>
                 <a:spcPct val="110000"/>
               </a:lnSpc>
               <a:spcAft>
-                <a:spcPts val="300"/>
+                <a:spcPts val="100"/>
               </a:spcAft>
             </a:pPr>
             <a:r>
-              <a:rPr sz="1400" b="0">
-                <a:solidFill>
-                  <a:srgbClr val="1F2A3A"/>
-                </a:solidFill>
-                <a:latin typeface="맑은 고딕"/>
-                <a:ea typeface="맑은 고딕"/>
-                <a:cs typeface="맑은 고딕"/>
-              </a:rPr>
-              <a:t>설계를 고칠 때만 바뀐다.</a:t>
-            </a:r>
-          </a:p>
-        </p:txBody>
-      </p:sp>
-      <p:sp>
-        <p:nvSpPr>
-          <p:cNvPr id="8" name="Rectangle 7"/>
-          <p:cNvSpPr/>
-          <p:nvPr/>
-        </p:nvSpPr>
-        <p:spPr>
-          <a:xfrm>
-            <a:off x="548640" y="3296412"/>
-            <a:ext cx="11094415" cy="13716"/>
-          </a:xfrm>
-          <a:prstGeom prst="rect">
-            <a:avLst/>
-          </a:prstGeom>
-          <a:solidFill>
-            <a:srgbClr val="D3D9E1"/>
-          </a:solidFill>
-          <a:ln>
-            <a:noFill/>
-          </a:ln>
-        </p:spPr>
-        <p:txBody>
-          <a:bodyPr rtlCol="0" anchor="ctr"/>
-          <a:lstStyle/>
-          <a:p>
-            <a:pPr algn="ctr"/>
+              <a:rPr sz="1350" b="1">
+                <a:solidFill>
+                  <a:srgbClr val="13294B"/>
+                </a:solidFill>
+                <a:latin typeface="맑은 고딕"/>
+                <a:ea typeface="맑은 고딕"/>
+                <a:cs typeface="맑은 고딕"/>
+              </a:rPr>
+              <a:t>인스턴스 데이터</a:t>
+            </a:r>
+          </a:p>
+          <a:p>
+            <a:pPr algn="ctr">
+              <a:lnSpc>
+                <a:spcPct val="110000"/>
+              </a:lnSpc>
+              <a:spcAft>
+                <a:spcPts val="100"/>
+              </a:spcAft>
+            </a:pPr>
+            <a:r>
+              <a:rPr sz="1100" b="0">
+                <a:solidFill>
+                  <a:srgbClr val="556175"/>
+                </a:solidFill>
+                <a:latin typeface="맑은 고딕"/>
+                <a:ea typeface="맑은 고딕"/>
+                <a:cs typeface="맑은 고딕"/>
+              </a:rPr>
+              <a:t>지식</a:t>
+            </a:r>
+          </a:p>
+          <a:p>
+            <a:pPr algn="ctr">
+              <a:lnSpc>
+                <a:spcPct val="110000"/>
+              </a:lnSpc>
+              <a:spcAft>
+                <a:spcPts val="100"/>
+              </a:spcAft>
+            </a:pPr>
+            <a:r>
+              <a:rPr sz="1100" b="0">
+                <a:solidFill>
+                  <a:srgbClr val="556175"/>
+                </a:solidFill>
+                <a:latin typeface="맑은 고딕"/>
+                <a:ea typeface="맑은 고딕"/>
+                <a:cs typeface="맑은 고딕"/>
+              </a:rPr>
+              <a:t>근거 문서가 개정될 때 바뀐다</a:t>
+            </a:r>
           </a:p>
         </p:txBody>
       </p:sp>
@@ -33639,28 +33906,112 @@
         </p:nvSpPr>
         <p:spPr>
           <a:xfrm>
-            <a:off x="640080" y="3305556"/>
-            <a:ext cx="3291839" cy="1371600"/>
-          </a:xfrm>
-          <a:prstGeom prst="rect">
-            <a:avLst/>
-          </a:prstGeom>
-          <a:noFill/>
-        </p:spPr>
-        <p:txBody>
-          <a:bodyPr wrap="square" anchor="ctr"/>
-          <a:lstStyle/>
-          <a:p>
-            <a:pPr algn="l">
+            <a:off x="761104" y="5125943"/>
+            <a:ext cx="2072804" cy="848487"/>
+          </a:xfrm>
+          <a:prstGeom prst="rect">
+            <a:avLst/>
+          </a:prstGeom>
+          <a:noFill/>
+        </p:spPr>
+        <p:txBody>
+          <a:bodyPr wrap="square" anchor="t"/>
+          <a:lstStyle/>
+          <a:p>
+            <a:pPr algn="ctr">
               <a:lnSpc>
                 <a:spcPct val="110000"/>
               </a:lnSpc>
               <a:spcAft>
-                <a:spcPts val="200"/>
+                <a:spcPts val="100"/>
               </a:spcAft>
             </a:pPr>
             <a:r>
-              <a:rPr sz="1800" b="1">
+              <a:rPr sz="1350" b="1">
+                <a:solidFill>
+                  <a:srgbClr val="1A6FC4"/>
+                </a:solidFill>
+                <a:latin typeface="맑은 고딕"/>
+                <a:ea typeface="맑은 고딕"/>
+                <a:cs typeface="맑은 고딕"/>
+              </a:rPr>
+              <a:t>값</a:t>
+            </a:r>
+          </a:p>
+          <a:p>
+            <a:pPr algn="ctr">
+              <a:lnSpc>
+                <a:spcPct val="110000"/>
+              </a:lnSpc>
+              <a:spcAft>
+                <a:spcPts val="100"/>
+              </a:spcAft>
+            </a:pPr>
+            <a:r>
+              <a:rPr sz="1100" b="0">
+                <a:solidFill>
+                  <a:srgbClr val="556175"/>
+                </a:solidFill>
+                <a:latin typeface="맑은 고딕"/>
+                <a:ea typeface="맑은 고딕"/>
+                <a:cs typeface="맑은 고딕"/>
+              </a:rPr>
+              <a:t>실제 데이터</a:t>
+            </a:r>
+          </a:p>
+          <a:p>
+            <a:pPr algn="ctr">
+              <a:lnSpc>
+                <a:spcPct val="110000"/>
+              </a:lnSpc>
+              <a:spcAft>
+                <a:spcPts val="100"/>
+              </a:spcAft>
+            </a:pPr>
+            <a:r>
+              <a:rPr sz="1100" b="0">
+                <a:solidFill>
+                  <a:srgbClr val="556175"/>
+                </a:solidFill>
+                <a:latin typeface="맑은 고딕"/>
+                <a:ea typeface="맑은 고딕"/>
+                <a:cs typeface="맑은 고딕"/>
+              </a:rPr>
+              <a:t>매초, 또는 업무가 일어날 때마다 바뀐다</a:t>
+            </a:r>
+          </a:p>
+        </p:txBody>
+      </p:sp>
+      <p:sp>
+        <p:nvSpPr>
+          <p:cNvPr id="10" name="TextBox 9"/>
+          <p:cNvSpPr txBox="1"/>
+          <p:nvPr/>
+        </p:nvSpPr>
+        <p:spPr>
+          <a:xfrm>
+            <a:off x="3892129" y="2275292"/>
+            <a:ext cx="1309139" cy="507618"/>
+          </a:xfrm>
+          <a:prstGeom prst="rect">
+            <a:avLst/>
+          </a:prstGeom>
+          <a:noFill/>
+        </p:spPr>
+        <p:txBody>
+          <a:bodyPr wrap="square" anchor="t"/>
+          <a:lstStyle/>
+          <a:p>
+            <a:pPr algn="ctr">
+              <a:lnSpc>
+                <a:spcPct val="110000"/>
+              </a:lnSpc>
+              <a:spcAft>
+                <a:spcPts val="100"/>
+              </a:spcAft>
+            </a:pPr>
+            <a:r>
+              <a:rPr sz="1350" b="1">
                 <a:solidFill>
                   <a:srgbClr val="13294B"/>
                 </a:solidFill>
@@ -33668,20 +34019,20 @@
                 <a:ea typeface="맑은 고딕"/>
                 <a:cs typeface="맑은 고딕"/>
               </a:rPr>
-              <a:t>인스턴스 데이터</a:t>
-            </a:r>
-          </a:p>
-          <a:p>
-            <a:pPr algn="l">
+              <a:t>FailureMode</a:t>
+            </a:r>
+          </a:p>
+          <a:p>
+            <a:pPr algn="ctr">
               <a:lnSpc>
                 <a:spcPct val="110000"/>
               </a:lnSpc>
               <a:spcAft>
-                <a:spcPts val="200"/>
+                <a:spcPts val="100"/>
               </a:spcAft>
             </a:pPr>
             <a:r>
-              <a:rPr sz="1150" b="0">
+              <a:rPr sz="1100" b="0">
                 <a:solidFill>
                   <a:srgbClr val="556175"/>
                 </a:solidFill>
@@ -33689,131 +34040,134 @@
                 <a:ea typeface="맑은 고딕"/>
                 <a:cs typeface="맑은 고딕"/>
               </a:rPr>
-              <a:t>지식</a:t>
-            </a:r>
-          </a:p>
-        </p:txBody>
-      </p:sp>
-      <p:sp>
-        <p:nvSpPr>
-          <p:cNvPr id="10" name="TextBox 9"/>
-          <p:cNvSpPr txBox="1"/>
-          <p:nvPr/>
-        </p:nvSpPr>
-        <p:spPr>
-          <a:xfrm>
-            <a:off x="4023359" y="3305556"/>
-            <a:ext cx="7528255" cy="1371600"/>
-          </a:xfrm>
-          <a:prstGeom prst="rect">
-            <a:avLst/>
-          </a:prstGeom>
-          <a:noFill/>
-        </p:spPr>
-        <p:txBody>
-          <a:bodyPr wrap="square" anchor="ctr"/>
-          <a:lstStyle/>
-          <a:p>
-            <a:pPr algn="l">
+              <a:t>고장 유형</a:t>
+            </a:r>
+          </a:p>
+        </p:txBody>
+      </p:sp>
+      <p:sp>
+        <p:nvSpPr>
+          <p:cNvPr id="11" name="TextBox 10"/>
+          <p:cNvSpPr txBox="1"/>
+          <p:nvPr/>
+        </p:nvSpPr>
+        <p:spPr>
+          <a:xfrm>
+            <a:off x="6444951" y="2275292"/>
+            <a:ext cx="1309139" cy="507618"/>
+          </a:xfrm>
+          <a:prstGeom prst="rect">
+            <a:avLst/>
+          </a:prstGeom>
+          <a:noFill/>
+        </p:spPr>
+        <p:txBody>
+          <a:bodyPr wrap="square" anchor="t"/>
+          <a:lstStyle/>
+          <a:p>
+            <a:pPr algn="ctr">
               <a:lnSpc>
                 <a:spcPct val="110000"/>
               </a:lnSpc>
               <a:spcAft>
-                <a:spcPts val="300"/>
+                <a:spcPts val="100"/>
               </a:spcAft>
             </a:pPr>
             <a:r>
-              <a:rPr sz="1400" b="0">
-                <a:solidFill>
-                  <a:srgbClr val="1F2A3A"/>
-                </a:solidFill>
-                <a:latin typeface="맑은 고딕"/>
-                <a:ea typeface="맑은 고딕"/>
-                <a:cs typeface="맑은 고딕"/>
-              </a:rPr>
-              <a:t>예: 쿨러 핀 오염이 쿨러 냉각 성능 상실을 일으킨다.</a:t>
-            </a:r>
-          </a:p>
-          <a:p>
-            <a:pPr algn="l">
+              <a:rPr sz="1350" b="1">
+                <a:solidFill>
+                  <a:srgbClr val="13294B"/>
+                </a:solidFill>
+                <a:latin typeface="맑은 고딕"/>
+                <a:ea typeface="맑은 고딕"/>
+                <a:cs typeface="맑은 고딕"/>
+              </a:rPr>
+              <a:t>Cause</a:t>
+            </a:r>
+          </a:p>
+          <a:p>
+            <a:pPr algn="ctr">
               <a:lnSpc>
                 <a:spcPct val="110000"/>
               </a:lnSpc>
               <a:spcAft>
-                <a:spcPts val="300"/>
+                <a:spcPts val="100"/>
               </a:spcAft>
             </a:pPr>
             <a:r>
-              <a:rPr sz="1400" b="0">
-                <a:solidFill>
-                  <a:srgbClr val="1F2A3A"/>
-                </a:solidFill>
-                <a:latin typeface="맑은 고딕"/>
-                <a:ea typeface="맑은 고딕"/>
-                <a:cs typeface="맑은 고딕"/>
-              </a:rPr>
-              <a:t>근거 문서가 개정될 때 바뀐다.</a:t>
-            </a:r>
-          </a:p>
-        </p:txBody>
-      </p:sp>
-      <p:sp>
-        <p:nvSpPr>
-          <p:cNvPr id="11" name="Rectangle 10"/>
-          <p:cNvSpPr/>
-          <p:nvPr/>
-        </p:nvSpPr>
-        <p:spPr>
-          <a:xfrm>
-            <a:off x="548640" y="4668012"/>
-            <a:ext cx="11094415" cy="13716"/>
-          </a:xfrm>
-          <a:prstGeom prst="rect">
-            <a:avLst/>
-          </a:prstGeom>
-          <a:solidFill>
-            <a:srgbClr val="D3D9E1"/>
-          </a:solidFill>
-          <a:ln>
-            <a:noFill/>
-          </a:ln>
-        </p:spPr>
-        <p:txBody>
-          <a:bodyPr rtlCol="0" anchor="ctr"/>
-          <a:lstStyle/>
-          <a:p>
-            <a:pPr algn="ctr"/>
-          </a:p>
-        </p:txBody>
-      </p:sp>
-      <p:sp>
-        <p:nvSpPr>
-          <p:cNvPr id="12" name="Rounded Rectangle 11"/>
-          <p:cNvSpPr/>
-          <p:nvPr/>
-        </p:nvSpPr>
-        <p:spPr>
-          <a:xfrm>
-            <a:off x="548640" y="4704588"/>
-            <a:ext cx="11094415" cy="1316736"/>
-          </a:xfrm>
-          <a:prstGeom prst="roundRect">
-            <a:avLst>
-              <a:gd name="adj" fmla="val 6000"/>
-            </a:avLst>
-          </a:prstGeom>
-          <a:solidFill>
-            <a:srgbClr val="E7F3FD"/>
-          </a:solidFill>
-          <a:ln>
-            <a:noFill/>
-          </a:ln>
-        </p:spPr>
-        <p:txBody>
-          <a:bodyPr rtlCol="0" anchor="ctr"/>
-          <a:lstStyle/>
-          <a:p>
-            <a:pPr algn="ctr"/>
+              <a:rPr sz="1100" b="0">
+                <a:solidFill>
+                  <a:srgbClr val="556175"/>
+                </a:solidFill>
+                <a:latin typeface="맑은 고딕"/>
+                <a:ea typeface="맑은 고딕"/>
+                <a:cs typeface="맑은 고딕"/>
+              </a:rPr>
+              <a:t>원인</a:t>
+            </a:r>
+          </a:p>
+        </p:txBody>
+      </p:sp>
+      <p:sp>
+        <p:nvSpPr>
+          <p:cNvPr id="12" name="TextBox 11"/>
+          <p:cNvSpPr txBox="1"/>
+          <p:nvPr/>
+        </p:nvSpPr>
+        <p:spPr>
+          <a:xfrm>
+            <a:off x="8986863" y="2275292"/>
+            <a:ext cx="1309139" cy="507618"/>
+          </a:xfrm>
+          <a:prstGeom prst="rect">
+            <a:avLst/>
+          </a:prstGeom>
+          <a:noFill/>
+        </p:spPr>
+        <p:txBody>
+          <a:bodyPr wrap="square" anchor="t"/>
+          <a:lstStyle/>
+          <a:p>
+            <a:pPr algn="ctr">
+              <a:lnSpc>
+                <a:spcPct val="110000"/>
+              </a:lnSpc>
+              <a:spcAft>
+                <a:spcPts val="100"/>
+              </a:spcAft>
+            </a:pPr>
+            <a:r>
+              <a:rPr sz="1350" b="1">
+                <a:solidFill>
+                  <a:srgbClr val="13294B"/>
+                </a:solidFill>
+                <a:latin typeface="맑은 고딕"/>
+                <a:ea typeface="맑은 고딕"/>
+                <a:cs typeface="맑은 고딕"/>
+              </a:rPr>
+              <a:t>Evidence</a:t>
+            </a:r>
+          </a:p>
+          <a:p>
+            <a:pPr algn="ctr">
+              <a:lnSpc>
+                <a:spcPct val="110000"/>
+              </a:lnSpc>
+              <a:spcAft>
+                <a:spcPts val="100"/>
+              </a:spcAft>
+            </a:pPr>
+            <a:r>
+              <a:rPr sz="1100" b="0">
+                <a:solidFill>
+                  <a:srgbClr val="556175"/>
+                </a:solidFill>
+                <a:latin typeface="맑은 고딕"/>
+                <a:ea typeface="맑은 고딕"/>
+                <a:cs typeface="맑은 고딕"/>
+              </a:rPr>
+              <a:t>증거</a:t>
+            </a:r>
           </a:p>
         </p:txBody>
       </p:sp>
@@ -33825,28 +34179,28 @@
         </p:nvSpPr>
         <p:spPr>
           <a:xfrm>
-            <a:off x="640080" y="4677156"/>
-            <a:ext cx="3291839" cy="1371600"/>
-          </a:xfrm>
-          <a:prstGeom prst="rect">
-            <a:avLst/>
-          </a:prstGeom>
-          <a:noFill/>
-        </p:spPr>
-        <p:txBody>
-          <a:bodyPr wrap="square" anchor="ctr"/>
-          <a:lstStyle/>
-          <a:p>
-            <a:pPr algn="l">
+            <a:off x="5277635" y="1793092"/>
+            <a:ext cx="1090949" cy="337185"/>
+          </a:xfrm>
+          <a:prstGeom prst="rect">
+            <a:avLst/>
+          </a:prstGeom>
+          <a:noFill/>
+        </p:spPr>
+        <p:txBody>
+          <a:bodyPr wrap="square" anchor="t"/>
+          <a:lstStyle/>
+          <a:p>
+            <a:pPr algn="ctr">
               <a:lnSpc>
                 <a:spcPct val="110000"/>
               </a:lnSpc>
               <a:spcAft>
-                <a:spcPts val="200"/>
+                <a:spcPts val="100"/>
               </a:spcAft>
             </a:pPr>
             <a:r>
-              <a:rPr sz="1800" b="1">
+              <a:rPr sz="1350" b="1">
                 <a:solidFill>
                   <a:srgbClr val="13294B"/>
                 </a:solidFill>
@@ -33854,20 +34208,230 @@
                 <a:ea typeface="맑은 고딕"/>
                 <a:cs typeface="맑은 고딕"/>
               </a:rPr>
-              <a:t>값</a:t>
-            </a:r>
-          </a:p>
-          <a:p>
-            <a:pPr algn="l">
+              <a:t>CAUSES</a:t>
+            </a:r>
+          </a:p>
+        </p:txBody>
+      </p:sp>
+      <p:sp>
+        <p:nvSpPr>
+          <p:cNvPr id="14" name="TextBox 13"/>
+          <p:cNvSpPr txBox="1"/>
+          <p:nvPr/>
+        </p:nvSpPr>
+        <p:spPr>
+          <a:xfrm>
+            <a:off x="7601357" y="1793092"/>
+            <a:ext cx="1527329" cy="337185"/>
+          </a:xfrm>
+          <a:prstGeom prst="rect">
+            <a:avLst/>
+          </a:prstGeom>
+          <a:noFill/>
+        </p:spPr>
+        <p:txBody>
+          <a:bodyPr wrap="square" anchor="t"/>
+          <a:lstStyle/>
+          <a:p>
+            <a:pPr algn="ctr">
               <a:lnSpc>
                 <a:spcPct val="110000"/>
               </a:lnSpc>
               <a:spcAft>
-                <a:spcPts val="200"/>
+                <a:spcPts val="100"/>
               </a:spcAft>
             </a:pPr>
             <a:r>
-              <a:rPr sz="1150" b="0">
+              <a:rPr sz="1350" b="1">
+                <a:solidFill>
+                  <a:srgbClr val="13294B"/>
+                </a:solidFill>
+                <a:latin typeface="맑은 고딕"/>
+                <a:ea typeface="맑은 고딕"/>
+                <a:cs typeface="맑은 고딕"/>
+              </a:rPr>
+              <a:t>EVIDENCED_BY</a:t>
+            </a:r>
+          </a:p>
+        </p:txBody>
+      </p:sp>
+      <p:sp>
+        <p:nvSpPr>
+          <p:cNvPr id="15" name="TextBox 14"/>
+          <p:cNvSpPr txBox="1"/>
+          <p:nvPr/>
+        </p:nvSpPr>
+        <p:spPr>
+          <a:xfrm>
+            <a:off x="3455749" y="4180453"/>
+            <a:ext cx="2181899" cy="337185"/>
+          </a:xfrm>
+          <a:prstGeom prst="rect">
+            <a:avLst/>
+          </a:prstGeom>
+          <a:noFill/>
+        </p:spPr>
+        <p:txBody>
+          <a:bodyPr wrap="square" anchor="t"/>
+          <a:lstStyle/>
+          <a:p>
+            <a:pPr algn="ctr">
+              <a:lnSpc>
+                <a:spcPct val="110000"/>
+              </a:lnSpc>
+              <a:spcAft>
+                <a:spcPts val="100"/>
+              </a:spcAft>
+            </a:pPr>
+            <a:r>
+              <a:rPr sz="1350" b="1">
+                <a:solidFill>
+                  <a:srgbClr val="13294B"/>
+                </a:solidFill>
+                <a:latin typeface="맑은 고딕"/>
+                <a:ea typeface="맑은 고딕"/>
+                <a:cs typeface="맑은 고딕"/>
+              </a:rPr>
+              <a:t>쿨러 냉각 성능 상실</a:t>
+            </a:r>
+          </a:p>
+        </p:txBody>
+      </p:sp>
+      <p:sp>
+        <p:nvSpPr>
+          <p:cNvPr id="16" name="TextBox 15"/>
+          <p:cNvSpPr txBox="1"/>
+          <p:nvPr/>
+        </p:nvSpPr>
+        <p:spPr>
+          <a:xfrm>
+            <a:off x="6226761" y="4180453"/>
+            <a:ext cx="1745519" cy="337185"/>
+          </a:xfrm>
+          <a:prstGeom prst="rect">
+            <a:avLst/>
+          </a:prstGeom>
+          <a:noFill/>
+        </p:spPr>
+        <p:txBody>
+          <a:bodyPr wrap="square" anchor="t"/>
+          <a:lstStyle/>
+          <a:p>
+            <a:pPr algn="ctr">
+              <a:lnSpc>
+                <a:spcPct val="110000"/>
+              </a:lnSpc>
+              <a:spcAft>
+                <a:spcPts val="100"/>
+              </a:spcAft>
+            </a:pPr>
+            <a:r>
+              <a:rPr sz="1350" b="1">
+                <a:solidFill>
+                  <a:srgbClr val="13294B"/>
+                </a:solidFill>
+                <a:latin typeface="맑은 고딕"/>
+                <a:ea typeface="맑은 고딕"/>
+                <a:cs typeface="맑은 고딕"/>
+              </a:rPr>
+              <a:t>쿨러 핀 오염</a:t>
+            </a:r>
+          </a:p>
+        </p:txBody>
+      </p:sp>
+      <p:sp>
+        <p:nvSpPr>
+          <p:cNvPr id="17" name="TextBox 16"/>
+          <p:cNvSpPr txBox="1"/>
+          <p:nvPr/>
+        </p:nvSpPr>
+        <p:spPr>
+          <a:xfrm>
+            <a:off x="8605031" y="4180453"/>
+            <a:ext cx="2072804" cy="337185"/>
+          </a:xfrm>
+          <a:prstGeom prst="rect">
+            <a:avLst/>
+          </a:prstGeom>
+          <a:noFill/>
+        </p:spPr>
+        <p:txBody>
+          <a:bodyPr wrap="square" anchor="t"/>
+          <a:lstStyle/>
+          <a:p>
+            <a:pPr algn="ctr">
+              <a:lnSpc>
+                <a:spcPct val="110000"/>
+              </a:lnSpc>
+              <a:spcAft>
+                <a:spcPts val="100"/>
+              </a:spcAft>
+            </a:pPr>
+            <a:r>
+              <a:rPr sz="1350" b="1">
+                <a:solidFill>
+                  <a:srgbClr val="13294B"/>
+                </a:solidFill>
+                <a:latin typeface="맑은 고딕"/>
+                <a:ea typeface="맑은 고딕"/>
+                <a:cs typeface="맑은 고딕"/>
+              </a:rPr>
+              <a:t>냉각 효율 70 % 미만</a:t>
+            </a:r>
+          </a:p>
+        </p:txBody>
+      </p:sp>
+      <p:sp>
+        <p:nvSpPr>
+          <p:cNvPr id="18" name="TextBox 17"/>
+          <p:cNvSpPr txBox="1"/>
+          <p:nvPr/>
+        </p:nvSpPr>
+        <p:spPr>
+          <a:xfrm>
+            <a:off x="3564844" y="5740511"/>
+            <a:ext cx="1963709" cy="507618"/>
+          </a:xfrm>
+          <a:prstGeom prst="rect">
+            <a:avLst/>
+          </a:prstGeom>
+          <a:noFill/>
+        </p:spPr>
+        <p:txBody>
+          <a:bodyPr wrap="square" anchor="t"/>
+          <a:lstStyle/>
+          <a:p>
+            <a:pPr algn="ctr">
+              <a:lnSpc>
+                <a:spcPct val="110000"/>
+              </a:lnSpc>
+              <a:spcAft>
+                <a:spcPts val="100"/>
+              </a:spcAft>
+            </a:pPr>
+            <a:r>
+              <a:rPr sz="1350" b="1">
+                <a:solidFill>
+                  <a:srgbClr val="13294B"/>
+                </a:solidFill>
+                <a:latin typeface="맑은 고딕"/>
+                <a:ea typeface="맑은 고딕"/>
+                <a:cs typeface="맑은 고딕"/>
+              </a:rPr>
+              <a:t>납기까지 5.98시간</a:t>
+            </a:r>
+          </a:p>
+          <a:p>
+            <a:pPr algn="ctr">
+              <a:lnSpc>
+                <a:spcPct val="110000"/>
+              </a:lnSpc>
+              <a:spcAft>
+                <a:spcPts val="100"/>
+              </a:spcAft>
+            </a:pPr>
+            <a:r>
+              <a:rPr sz="1100" b="0">
                 <a:solidFill>
                   <a:srgbClr val="556175"/>
                 </a:solidFill>
@@ -33875,70 +34439,175 @@
                 <a:ea typeface="맑은 고딕"/>
                 <a:cs typeface="맑은 고딕"/>
               </a:rPr>
-              <a:t>실제 데이터</a:t>
-            </a:r>
-          </a:p>
-        </p:txBody>
-      </p:sp>
-      <p:sp>
-        <p:nvSpPr>
-          <p:cNvPr id="14" name="TextBox 13"/>
-          <p:cNvSpPr txBox="1"/>
-          <p:nvPr/>
-        </p:nvSpPr>
-        <p:spPr>
-          <a:xfrm>
-            <a:off x="4023359" y="4677156"/>
-            <a:ext cx="7528255" cy="1371600"/>
-          </a:xfrm>
-          <a:prstGeom prst="rect">
-            <a:avLst/>
-          </a:prstGeom>
-          <a:noFill/>
-        </p:spPr>
-        <p:txBody>
-          <a:bodyPr wrap="square" anchor="ctr"/>
-          <a:lstStyle/>
-          <a:p>
-            <a:pPr algn="l">
+              <a:t>MES</a:t>
+            </a:r>
+          </a:p>
+        </p:txBody>
+      </p:sp>
+      <p:sp>
+        <p:nvSpPr>
+          <p:cNvPr id="19" name="TextBox 18"/>
+          <p:cNvSpPr txBox="1"/>
+          <p:nvPr/>
+        </p:nvSpPr>
+        <p:spPr>
+          <a:xfrm>
+            <a:off x="6117666" y="5740511"/>
+            <a:ext cx="1963709" cy="507618"/>
+          </a:xfrm>
+          <a:prstGeom prst="rect">
+            <a:avLst/>
+          </a:prstGeom>
+          <a:noFill/>
+        </p:spPr>
+        <p:txBody>
+          <a:bodyPr wrap="square" anchor="t"/>
+          <a:lstStyle/>
+          <a:p>
+            <a:pPr algn="ctr">
               <a:lnSpc>
                 <a:spcPct val="110000"/>
               </a:lnSpc>
               <a:spcAft>
-                <a:spcPts val="300"/>
+                <a:spcPts val="100"/>
               </a:spcAft>
             </a:pPr>
             <a:r>
-              <a:rPr sz="1400" b="0">
-                <a:solidFill>
-                  <a:srgbClr val="1F2A3A"/>
-                </a:solidFill>
-                <a:latin typeface="맑은 고딕"/>
-                <a:ea typeface="맑은 고딕"/>
-                <a:cs typeface="맑은 고딕"/>
-              </a:rPr>
-              <a:t>예: 경보가 난 순간의 냉각 효율 46.2 %</a:t>
-            </a:r>
-          </a:p>
-          <a:p>
-            <a:pPr algn="l">
+              <a:rPr sz="1350" b="1">
+                <a:solidFill>
+                  <a:srgbClr val="13294B"/>
+                </a:solidFill>
+                <a:latin typeface="맑은 고딕"/>
+                <a:ea typeface="맑은 고딕"/>
+                <a:cs typeface="맑은 고딕"/>
+              </a:rPr>
+              <a:t>운전 모드 원격 자동</a:t>
+            </a:r>
+          </a:p>
+          <a:p>
+            <a:pPr algn="ctr">
               <a:lnSpc>
                 <a:spcPct val="110000"/>
               </a:lnSpc>
               <a:spcAft>
-                <a:spcPts val="300"/>
+                <a:spcPts val="100"/>
               </a:spcAft>
             </a:pPr>
             <a:r>
-              <a:rPr sz="1400" b="0">
-                <a:solidFill>
-                  <a:srgbClr val="1F2A3A"/>
-                </a:solidFill>
-                <a:latin typeface="맑은 고딕"/>
-                <a:ea typeface="맑은 고딕"/>
-                <a:cs typeface="맑은 고딕"/>
-              </a:rPr>
-              <a:t>매초, 또는 업무가 일어날 때마다 바뀐다.</a:t>
+              <a:rPr sz="1100" b="0">
+                <a:solidFill>
+                  <a:srgbClr val="556175"/>
+                </a:solidFill>
+                <a:latin typeface="맑은 고딕"/>
+                <a:ea typeface="맑은 고딕"/>
+                <a:cs typeface="맑은 고딕"/>
+              </a:rPr>
+              <a:t>PLC</a:t>
+            </a:r>
+          </a:p>
+        </p:txBody>
+      </p:sp>
+      <p:sp>
+        <p:nvSpPr>
+          <p:cNvPr id="20" name="TextBox 19"/>
+          <p:cNvSpPr txBox="1"/>
+          <p:nvPr/>
+        </p:nvSpPr>
+        <p:spPr>
+          <a:xfrm>
+            <a:off x="8659578" y="5740511"/>
+            <a:ext cx="1963709" cy="507618"/>
+          </a:xfrm>
+          <a:prstGeom prst="rect">
+            <a:avLst/>
+          </a:prstGeom>
+          <a:noFill/>
+        </p:spPr>
+        <p:txBody>
+          <a:bodyPr wrap="square" anchor="t"/>
+          <a:lstStyle/>
+          <a:p>
+            <a:pPr algn="ctr">
+              <a:lnSpc>
+                <a:spcPct val="110000"/>
+              </a:lnSpc>
+              <a:spcAft>
+                <a:spcPts val="100"/>
+              </a:spcAft>
+            </a:pPr>
+            <a:r>
+              <a:rPr sz="1350" b="1">
+                <a:solidFill>
+                  <a:srgbClr val="13294B"/>
+                </a:solidFill>
+                <a:latin typeface="맑은 고딕"/>
+                <a:ea typeface="맑은 고딕"/>
+                <a:cs typeface="맑은 고딕"/>
+              </a:rPr>
+              <a:t>냉각 효율 46.2 %</a:t>
+            </a:r>
+          </a:p>
+          <a:p>
+            <a:pPr algn="ctr">
+              <a:lnSpc>
+                <a:spcPct val="110000"/>
+              </a:lnSpc>
+              <a:spcAft>
+                <a:spcPts val="100"/>
+              </a:spcAft>
+            </a:pPr>
+            <a:r>
+              <a:rPr sz="1100" b="0">
+                <a:solidFill>
+                  <a:srgbClr val="556175"/>
+                </a:solidFill>
+                <a:latin typeface="맑은 고딕"/>
+                <a:ea typeface="맑은 고딕"/>
+                <a:cs typeface="맑은 고딕"/>
+              </a:rPr>
+              <a:t>시계열 DB</a:t>
+            </a:r>
+          </a:p>
+        </p:txBody>
+      </p:sp>
+      <p:sp>
+        <p:nvSpPr>
+          <p:cNvPr id="21" name="TextBox 20"/>
+          <p:cNvSpPr txBox="1"/>
+          <p:nvPr/>
+        </p:nvSpPr>
+        <p:spPr>
+          <a:xfrm>
+            <a:off x="6750417" y="4605924"/>
+            <a:ext cx="2400088" cy="337185"/>
+          </a:xfrm>
+          <a:prstGeom prst="rect">
+            <a:avLst/>
+          </a:prstGeom>
+          <a:noFill/>
+        </p:spPr>
+        <p:txBody>
+          <a:bodyPr wrap="square" anchor="t"/>
+          <a:lstStyle/>
+          <a:p>
+            <a:pPr algn="ctr">
+              <a:lnSpc>
+                <a:spcPct val="110000"/>
+              </a:lnSpc>
+              <a:spcAft>
+                <a:spcPts val="100"/>
+              </a:spcAft>
+            </a:pPr>
+            <a:r>
+              <a:rPr sz="1350" b="1">
+                <a:solidFill>
+                  <a:srgbClr val="13294B"/>
+                </a:solidFill>
+                <a:latin typeface="맑은 고딕"/>
+                <a:ea typeface="맑은 고딕"/>
+                <a:cs typeface="맑은 고딕"/>
+              </a:rPr>
+              <a:t>판단하는 순간에 읽는다</a:t>
             </a:r>
           </a:p>
         </p:txBody>
@@ -43359,7 +44028,7 @@
                 <a:ea typeface="맑은 고딕"/>
                 <a:cs typeface="맑은 고딕"/>
               </a:rPr>
-              <a:t>• 「쿨러 핀 오염이 가장 흔하다. 최근 30초 냉각 효율 평균이 70 % 미만이고 팬은 정상이면 핀 오염으로 판정한다.」</a:t>
+              <a:t>• 쿨러 핀 오염이 가장 흔하며, 최근 30초 냉각 효율 평균이 70 % 미만이고 팬이 정상이면 핀 오염으로 판정한다고 적혀 있다</a:t>
             </a:r>
           </a:p>
           <a:p>
@@ -45289,7 +45958,7 @@
       </p:sp>
       <p:pic>
         <p:nvPicPr>
-          <p:cNvPr id="6" name="삽화:인제스천_전체.svg" descr="illust_4549653583496841286_1791715498.png"/>
+          <p:cNvPr id="6" name="삽화:인제스천_전체.svg" descr="illust_3975304960310717750_1791770333.png"/>
           <p:cNvPicPr>
             <a:picLocks noChangeAspect="1"/>
           </p:cNvPicPr>

--- a/docs/교재/실전반_오프라인/03회차/실전반_오프라인_03회차.pptx
+++ b/docs/교재/실전반_오프라인/03회차/실전반_오프라인_03회차.pptx
@@ -10386,7 +10386,7 @@
       </p:sp>
       <p:pic>
         <p:nvPicPr>
-          <p:cNvPr id="6" name="삽화:인용.svg" descr="illust_5205224884406420648_1791770333.png"/>
+          <p:cNvPr id="6" name="삽화:인용.svg" descr="illust_381571845071757335_1791770333.png"/>
           <p:cNvPicPr>
             <a:picLocks noChangeAspect="1"/>
           </p:cNvPicPr>
@@ -11987,7 +11987,7 @@
       </p:sp>
       <p:pic>
         <p:nvPicPr>
-          <p:cNvPr id="6" name="삽화:인제스천_6.svg" descr="illust_1316949905828381950_1791770333.png"/>
+          <p:cNvPr id="6" name="삽화:인제스천_6.svg" descr="illust_6821017833016211375_1791770333.png"/>
           <p:cNvPicPr>
             <a:picLocks noChangeAspect="1"/>
           </p:cNvPicPr>
@@ -12541,7 +12541,7 @@
       </p:sp>
       <p:pic>
         <p:nvPicPr>
-          <p:cNvPr id="6" name="삽화:적재묶음_사슬.svg" descr="illust_7762298114911230886_1791770333.png"/>
+          <p:cNvPr id="6" name="삽화:적재묶음_사슬.svg" descr="illust_8612354463136255523_1791770333.png"/>
           <p:cNvPicPr>
             <a:picLocks noChangeAspect="1"/>
           </p:cNvPicPr>
@@ -21528,7 +21528,7 @@
       </p:sp>
       <p:pic>
         <p:nvPicPr>
-          <p:cNvPr id="6" name="삽화:네일차_흐름.svg" descr="illust_8627719086851511303_1791770333.png"/>
+          <p:cNvPr id="6" name="삽화:네일차_흐름.svg" descr="illust_2764932517087582967_1791770333.png"/>
           <p:cNvPicPr>
             <a:picLocks noChangeAspect="1"/>
           </p:cNvPicPr>
@@ -23373,7 +23373,7 @@
       </p:sp>
       <p:pic>
         <p:nvPicPr>
-          <p:cNvPr id="6" name="삽화:관계.svg" descr="illust_3806986617173556911_1791715399.png"/>
+          <p:cNvPr id="6" name="삽화:관계.svg" descr="illust_3539263635950024144_1791715399.png"/>
           <p:cNvPicPr>
             <a:picLocks noChangeAspect="1"/>
           </p:cNvPicPr>
@@ -24620,7 +24620,7 @@
       </p:sp>
       <p:pic>
         <p:nvPicPr>
-          <p:cNvPr id="6" name="삽화:두층_3.svg" descr="illust_8384317966668686316_1791770880.png"/>
+          <p:cNvPr id="6" name="삽화:두층_3.svg" descr="illust_4198833919739665803_1791770880.png"/>
           <p:cNvPicPr>
             <a:picLocks noChangeAspect="1"/>
           </p:cNvPicPr>
@@ -26549,7 +26549,7 @@
       </p:sp>
       <p:pic>
         <p:nvPicPr>
-          <p:cNvPr id="6" name="삽화:성과경로_5.svg" descr="illust_1060158762438132532_1791770880.png"/>
+          <p:cNvPr id="6" name="삽화:성과경로_5.svg" descr="illust_8834089481567784290_1791770880.png"/>
           <p:cNvPicPr>
             <a:picLocks noChangeAspect="1"/>
           </p:cNvPicPr>
@@ -29592,7 +29592,7 @@
       </p:sp>
       <p:pic>
         <p:nvPicPr>
-          <p:cNvPr id="6" name="삽화:경로_3.svg" descr="illust_9185223296310348004_1791715399.png"/>
+          <p:cNvPr id="6" name="삽화:경로_3.svg" descr="illust_7012756134629265003_1791715399.png"/>
           <p:cNvPicPr>
             <a:picLocks noChangeAspect="1"/>
           </p:cNvPicPr>
@@ -30565,7 +30565,7 @@
       </p:sp>
       <p:pic>
         <p:nvPicPr>
-          <p:cNvPr id="6" name="삽화:원인후보.svg" descr="illust_1541636311092453762_1791770880.png"/>
+          <p:cNvPr id="6" name="삽화:원인후보.svg" descr="illust_6205421910595779592_1791770880.png"/>
           <p:cNvPicPr>
             <a:picLocks noChangeAspect="1"/>
           </p:cNvPicPr>
@@ -33708,7 +33708,7 @@
       </p:sp>
       <p:pic>
         <p:nvPicPr>
-          <p:cNvPr id="6" name="삽화:세층.svg" descr="illust_2931058874710175031_1791770880.png"/>
+          <p:cNvPr id="6" name="삽화:세층.svg" descr="illust_3867615079395576119_1791770880.png"/>
           <p:cNvPicPr>
             <a:picLocks noChangeAspect="1"/>
           </p:cNvPicPr>
@@ -39716,7 +39716,7 @@
                 <a:ea typeface="맑은 고딕"/>
                 <a:cs typeface="맑은 고딕"/>
               </a:rPr>
-              <a:t>배운 내용을 바탕으로 정답을 맞춰보세요.</a:t>
+              <a:t>배운 내용을 바탕으로 정답을 맞혀 보세요.</a:t>
             </a:r>
           </a:p>
         </p:txBody>
@@ -45958,7 +45958,7 @@
       </p:sp>
       <p:pic>
         <p:nvPicPr>
-          <p:cNvPr id="6" name="삽화:인제스천_전체.svg" descr="illust_3975304960310717750_1791770333.png"/>
+          <p:cNvPr id="6" name="삽화:인제스천_전체.svg" descr="illust_1951901207242190623_1791770333.png"/>
           <p:cNvPicPr>
             <a:picLocks noChangeAspect="1"/>
           </p:cNvPicPr>

--- a/docs/교재/실전반_오프라인/03회차/실전반_오프라인_03회차.pptx
+++ b/docs/교재/실전반_오프라인/03회차/실전반_오프라인_03회차.pptx
@@ -10386,7 +10386,7 @@
       </p:sp>
       <p:pic>
         <p:nvPicPr>
-          <p:cNvPr id="6" name="삽화:인용.svg" descr="illust_381571845071757335_1791770333.png"/>
+          <p:cNvPr id="6" name="삽화:인용.svg" descr="illust_8034400609767364217_1791770333.png"/>
           <p:cNvPicPr>
             <a:picLocks noChangeAspect="1"/>
           </p:cNvPicPr>
@@ -11987,7 +11987,7 @@
       </p:sp>
       <p:pic>
         <p:nvPicPr>
-          <p:cNvPr id="6" name="삽화:인제스천_6.svg" descr="illust_6821017833016211375_1791770333.png"/>
+          <p:cNvPr id="6" name="삽화:인제스천_6.svg" descr="illust_3250191052306465244_1791770333.png"/>
           <p:cNvPicPr>
             <a:picLocks noChangeAspect="1"/>
           </p:cNvPicPr>
@@ -12541,7 +12541,7 @@
       </p:sp>
       <p:pic>
         <p:nvPicPr>
-          <p:cNvPr id="6" name="삽화:적재묶음_사슬.svg" descr="illust_8612354463136255523_1791770333.png"/>
+          <p:cNvPr id="6" name="삽화:적재묶음_사슬.svg" descr="illust_8805531144177133421_1791770333.png"/>
           <p:cNvPicPr>
             <a:picLocks noChangeAspect="1"/>
           </p:cNvPicPr>
@@ -17416,7 +17416,7 @@
                 <a:ea typeface="맑은 고딕"/>
                 <a:cs typeface="맑은 고딕"/>
               </a:rPr>
-              <a:t>실습: Claude Code로 문서에서 지식 추출하기</a:t>
+              <a:t>실습: 바이브 코딩으로 문서에서 지식 추출하기</a:t>
             </a:r>
           </a:p>
         </p:txBody>
@@ -17710,8 +17710,8 @@
         </p:nvSpPr>
         <p:spPr>
           <a:xfrm>
-            <a:off x="548640" y="2294635"/>
-            <a:ext cx="3515258" cy="3393440"/>
+            <a:off x="548640" y="2403094"/>
+            <a:ext cx="3515258" cy="3176523"/>
           </a:xfrm>
           <a:prstGeom prst="roundRect">
             <a:avLst>
@@ -17743,7 +17743,7 @@
         </p:nvSpPr>
         <p:spPr>
           <a:xfrm>
-            <a:off x="777240" y="2495804"/>
+            <a:off x="777240" y="2604262"/>
             <a:ext cx="731520" cy="731520"/>
           </a:xfrm>
           <a:prstGeom prst="ellipse">
@@ -17780,7 +17780,7 @@
         </p:blipFill>
         <p:spPr>
           <a:xfrm>
-            <a:off x="930859" y="2649423"/>
+            <a:off x="930859" y="2757881"/>
             <a:ext cx="424281" cy="424281"/>
           </a:xfrm>
           <a:prstGeom prst="rect">
@@ -17796,8 +17796,8 @@
         </p:nvSpPr>
         <p:spPr>
           <a:xfrm>
-            <a:off x="713232" y="3318764"/>
-            <a:ext cx="3186074" cy="1866392"/>
+            <a:off x="713232" y="3427222"/>
+            <a:ext cx="3186074" cy="1649475"/>
           </a:xfrm>
           <a:prstGeom prst="rect">
             <a:avLst/>
@@ -17880,7 +17880,7 @@
         </p:nvSpPr>
         <p:spPr>
           <a:xfrm>
-            <a:off x="777240" y="5258308"/>
+            <a:off x="777240" y="5149850"/>
             <a:ext cx="1021080" cy="292608"/>
           </a:xfrm>
           <a:prstGeom prst="roundRect">
@@ -17911,7 +17911,7 @@
         </p:nvSpPr>
         <p:spPr>
           <a:xfrm>
-            <a:off x="777240" y="5258308"/>
+            <a:off x="777240" y="5149850"/>
             <a:ext cx="1021080" cy="292608"/>
           </a:xfrm>
           <a:prstGeom prst="rect">
@@ -17950,8 +17950,8 @@
         </p:nvSpPr>
         <p:spPr>
           <a:xfrm>
-            <a:off x="4338218" y="2294635"/>
-            <a:ext cx="3515258" cy="3393440"/>
+            <a:off x="4338218" y="2403094"/>
+            <a:ext cx="3515258" cy="3176523"/>
           </a:xfrm>
           <a:prstGeom prst="roundRect">
             <a:avLst>
@@ -17983,7 +17983,7 @@
         </p:nvSpPr>
         <p:spPr>
           <a:xfrm>
-            <a:off x="4566818" y="2495804"/>
+            <a:off x="4566818" y="2604262"/>
             <a:ext cx="731520" cy="731520"/>
           </a:xfrm>
           <a:prstGeom prst="ellipse">
@@ -18006,7 +18006,7 @@
       </p:sp>
       <p:pic>
         <p:nvPicPr>
-          <p:cNvPr id="14" name="아이콘:terminal-2" descr="terminal-2_13294B_1.6.png"/>
+          <p:cNvPr id="14" name="아이콘:message-chatbot" descr="message-chatbot_13294B_1.6.png"/>
           <p:cNvPicPr>
             <a:picLocks noChangeAspect="1"/>
           </p:cNvPicPr>
@@ -18020,7 +18020,7 @@
         </p:blipFill>
         <p:spPr>
           <a:xfrm>
-            <a:off x="4720437" y="2649423"/>
+            <a:off x="4720437" y="2757881"/>
             <a:ext cx="424281" cy="424281"/>
           </a:xfrm>
           <a:prstGeom prst="rect">
@@ -18036,8 +18036,8 @@
         </p:nvSpPr>
         <p:spPr>
           <a:xfrm>
-            <a:off x="4502810" y="3318764"/>
-            <a:ext cx="3186074" cy="1866392"/>
+            <a:off x="4502810" y="3427222"/>
+            <a:ext cx="3186074" cy="1649475"/>
           </a:xfrm>
           <a:prstGeom prst="rect">
             <a:avLst/>
@@ -18086,7 +18086,7 @@
                 <a:ea typeface="맑은 고딕"/>
                 <a:cs typeface="맑은 고딕"/>
               </a:rPr>
-              <a:t>• 원인, 조치, 수행 조건을 스키마의 클래스에 맞춰 뽑도록 Claude Code에 지시한다</a:t>
+              <a:t>• AI에게 원인, 조치, 수행 조건을 스키마의 클래스에 맞춰 뽑게 한다</a:t>
             </a:r>
           </a:p>
           <a:p>
@@ -18120,7 +18120,7 @@
         </p:nvSpPr>
         <p:spPr>
           <a:xfrm>
-            <a:off x="4566818" y="5258308"/>
+            <a:off x="4566818" y="5149850"/>
             <a:ext cx="1173480" cy="292608"/>
           </a:xfrm>
           <a:prstGeom prst="roundRect">
@@ -18151,7 +18151,7 @@
         </p:nvSpPr>
         <p:spPr>
           <a:xfrm>
-            <a:off x="4566818" y="5258308"/>
+            <a:off x="4566818" y="5149850"/>
             <a:ext cx="1173480" cy="292608"/>
           </a:xfrm>
           <a:prstGeom prst="rect">
@@ -18190,8 +18190,8 @@
         </p:nvSpPr>
         <p:spPr>
           <a:xfrm>
-            <a:off x="8127796" y="2294635"/>
-            <a:ext cx="3515258" cy="3393440"/>
+            <a:off x="8127796" y="2403094"/>
+            <a:ext cx="3515258" cy="3176523"/>
           </a:xfrm>
           <a:prstGeom prst="roundRect">
             <a:avLst>
@@ -18223,7 +18223,7 @@
         </p:nvSpPr>
         <p:spPr>
           <a:xfrm>
-            <a:off x="8356396" y="2495804"/>
+            <a:off x="8356396" y="2604262"/>
             <a:ext cx="731520" cy="731520"/>
           </a:xfrm>
           <a:prstGeom prst="ellipse">
@@ -18260,7 +18260,7 @@
         </p:blipFill>
         <p:spPr>
           <a:xfrm>
-            <a:off x="8510016" y="2649423"/>
+            <a:off x="8510016" y="2757881"/>
             <a:ext cx="424281" cy="424281"/>
           </a:xfrm>
           <a:prstGeom prst="rect">
@@ -18276,8 +18276,8 @@
         </p:nvSpPr>
         <p:spPr>
           <a:xfrm>
-            <a:off x="8292388" y="3318764"/>
-            <a:ext cx="3186074" cy="1866392"/>
+            <a:off x="8292388" y="3427222"/>
+            <a:ext cx="3186074" cy="1649475"/>
           </a:xfrm>
           <a:prstGeom prst="rect">
             <a:avLst/>
@@ -18360,7 +18360,7 @@
         </p:nvSpPr>
         <p:spPr>
           <a:xfrm>
-            <a:off x="8356396" y="5258308"/>
+            <a:off x="8356396" y="5149850"/>
             <a:ext cx="1325879" cy="292608"/>
           </a:xfrm>
           <a:prstGeom prst="roundRect">
@@ -18391,7 +18391,7 @@
         </p:nvSpPr>
         <p:spPr>
           <a:xfrm>
-            <a:off x="8356396" y="5258308"/>
+            <a:off x="8356396" y="5149850"/>
             <a:ext cx="1325879" cy="292608"/>
           </a:xfrm>
           <a:prstGeom prst="rect">
@@ -19460,7 +19460,7 @@
                 <a:ea typeface="맑은 고딕"/>
                 <a:cs typeface="맑은 고딕"/>
               </a:rPr>
-              <a:t>• Claude Code로 적재 코드를 만든다</a:t>
+              <a:t>• 바이브 코딩으로 적재 코드를 만든다</a:t>
             </a:r>
           </a:p>
           <a:p>
@@ -21528,7 +21528,7 @@
       </p:sp>
       <p:pic>
         <p:nvPicPr>
-          <p:cNvPr id="6" name="삽화:네일차_흐름.svg" descr="illust_2764932517087582967_1791770333.png"/>
+          <p:cNvPr id="6" name="삽화:네일차_흐름.svg" descr="illust_1485631421748591543_1791770333.png"/>
           <p:cNvPicPr>
             <a:picLocks noChangeAspect="1"/>
           </p:cNvPicPr>
@@ -22554,7 +22554,7 @@
                 <a:ea typeface="맑은 고딕"/>
                 <a:cs typeface="맑은 고딕"/>
               </a:rPr>
-              <a:t>Claude Code로 문서에서 지식 추출하기</a:t>
+              <a:t>바이브 코딩으로 문서에서 지식 추출하기</a:t>
             </a:r>
           </a:p>
         </p:txBody>
@@ -23373,7 +23373,7 @@
       </p:sp>
       <p:pic>
         <p:nvPicPr>
-          <p:cNvPr id="6" name="삽화:관계.svg" descr="illust_3539263635950024144_1791715399.png"/>
+          <p:cNvPr id="6" name="삽화:관계.svg" descr="illust_9136543777030918723_1791715399.png"/>
           <p:cNvPicPr>
             <a:picLocks noChangeAspect="1"/>
           </p:cNvPicPr>
@@ -24620,7 +24620,7 @@
       </p:sp>
       <p:pic>
         <p:nvPicPr>
-          <p:cNvPr id="6" name="삽화:두층_3.svg" descr="illust_4198833919739665803_1791770880.png"/>
+          <p:cNvPr id="6" name="삽화:두층_3.svg" descr="illust_1178498562710407939_1791770880.png"/>
           <p:cNvPicPr>
             <a:picLocks noChangeAspect="1"/>
           </p:cNvPicPr>
@@ -26549,7 +26549,7 @@
       </p:sp>
       <p:pic>
         <p:nvPicPr>
-          <p:cNvPr id="6" name="삽화:성과경로_5.svg" descr="illust_8834089481567784290_1791770880.png"/>
+          <p:cNvPr id="6" name="삽화:성과경로_5.svg" descr="illust_4802573230985363131_1791770880.png"/>
           <p:cNvPicPr>
             <a:picLocks noChangeAspect="1"/>
           </p:cNvPicPr>
@@ -29592,7 +29592,7 @@
       </p:sp>
       <p:pic>
         <p:nvPicPr>
-          <p:cNvPr id="6" name="삽화:경로_3.svg" descr="illust_7012756134629265003_1791715399.png"/>
+          <p:cNvPr id="6" name="삽화:경로_3.svg" descr="illust_2051664597856313072_1791715399.png"/>
           <p:cNvPicPr>
             <a:picLocks noChangeAspect="1"/>
           </p:cNvPicPr>
@@ -30565,7 +30565,7 @@
       </p:sp>
       <p:pic>
         <p:nvPicPr>
-          <p:cNvPr id="6" name="삽화:원인후보.svg" descr="illust_6205421910595779592_1791770880.png"/>
+          <p:cNvPr id="6" name="삽화:원인후보.svg" descr="illust_617921206031373808_1791770880.png"/>
           <p:cNvPicPr>
             <a:picLocks noChangeAspect="1"/>
           </p:cNvPicPr>
@@ -33708,7 +33708,7 @@
       </p:sp>
       <p:pic>
         <p:nvPicPr>
-          <p:cNvPr id="6" name="삽화:세층.svg" descr="illust_3867615079395576119_1791770880.png"/>
+          <p:cNvPr id="6" name="삽화:세층.svg" descr="illust_3694279385451658329_1791770880.png"/>
           <p:cNvPicPr>
             <a:picLocks noChangeAspect="1"/>
           </p:cNvPicPr>
@@ -45958,7 +45958,7 @@
       </p:sp>
       <p:pic>
         <p:nvPicPr>
-          <p:cNvPr id="6" name="삽화:인제스천_전체.svg" descr="illust_1951901207242190623_1791770333.png"/>
+          <p:cNvPr id="6" name="삽화:인제스천_전체.svg" descr="illust_7967220269370929603_1791770333.png"/>
           <p:cNvPicPr>
             <a:picLocks noChangeAspect="1"/>
           </p:cNvPicPr>
